--- a/output/wordlabs-uni-prefix-3day.pptx
+++ b/output/wordlabs-uni-prefix-3day.pptx
@@ -6040,7 +6040,7 @@
                 <a:ea typeface="Calibri" pitchFamily="34" charset="-122"/>
                 <a:cs typeface="Calibri" pitchFamily="34" charset="-120"/>
               </a:rPr>
-              <a:t>The students wore their </a:t>
+              <a:t>Our school </a:t>
             </a:r>
             <a:pPr algn="l" indent="0" marL="0">
               <a:buNone/>
@@ -6071,118 +6071,215 @@
                 <a:ea typeface="Calibri" pitchFamily="34" charset="-122"/>
                 <a:cs typeface="Calibri" pitchFamily="34" charset="-120"/>
               </a:rPr>
-              <a:t> with pride at the </a:t>
-            </a:r>
+              <a:t> makes us feel like we belong to one team.</a:t>
+            </a:r>
+            <a:endParaRPr lang="en-US" sz="1800" dirty="0"/>
+          </a:p>
+        </p:txBody>
+      </p:sp>
+      <p:sp>
+        <p:nvSpPr>
+          <p:cNvPr id="13" name="Shape 11"/>
+          <p:cNvSpPr/>
+          <p:nvPr/>
+        </p:nvSpPr>
+        <p:spPr>
+          <a:xfrm>
+            <a:off x="365760" y="2852928"/>
+            <a:ext cx="8412480" cy="475488"/>
+          </a:xfrm>
+          <a:prstGeom prst="rect">
+            <a:avLst>
+              <a:gd name="adj" fmla="val 15385"/>
+            </a:avLst>
+          </a:prstGeom>
+          <a:solidFill>
+            <a:srgbClr val="CCFBF1"/>
+          </a:solidFill>
+          <a:ln w="12700">
+            <a:solidFill>
+              <a:srgbClr val="0D9488"/>
+            </a:solidFill>
+            <a:prstDash val="solid"/>
+          </a:ln>
+        </p:spPr>
+      </p:sp>
+      <p:sp>
+        <p:nvSpPr>
+          <p:cNvPr id="14" name="Text 12"/>
+          <p:cNvSpPr/>
+          <p:nvPr/>
+        </p:nvSpPr>
+        <p:spPr>
+          <a:xfrm>
+            <a:off x="502920" y="2852928"/>
+            <a:ext cx="8229600" cy="475488"/>
+          </a:xfrm>
+          <a:prstGeom prst="rect">
+            <a:avLst/>
+          </a:prstGeom>
+          <a:noFill/>
+          <a:ln/>
+        </p:spPr>
+        <p:txBody>
+          <a:bodyPr wrap="square" rtlCol="0" anchor="ctr"/>
+          <a:lstStyle/>
+          <a:p>
             <a:pPr algn="l" indent="0" marL="0">
               <a:buNone/>
             </a:pPr>
             <a:r>
-              <a:rPr lang="en-US" sz="1800" b="1" dirty="0">
-                <a:solidFill>
-                  <a:srgbClr val="0D9488"/>
-                </a:solidFill>
-                <a:highlight>
-                  <a:srgbClr val="CCFBF1"/>
-                </a:highlight>
+              <a:rPr lang="en-US" sz="1200" b="1" dirty="0">
+                <a:solidFill>
+                  <a:srgbClr val="0F766E"/>
+                </a:solidFill>
                 <a:latin typeface="Calibri" pitchFamily="34" charset="0"/>
                 <a:ea typeface="Calibri" pitchFamily="34" charset="-122"/>
                 <a:cs typeface="Calibri" pitchFamily="34" charset="-120"/>
               </a:rPr>
-              <a:t>universal</a:t>
-            </a:r>
-            <a:pPr algn="l" indent="0" marL="0">
-              <a:buNone/>
-            </a:pPr>
-            <a:r>
-              <a:rPr lang="en-US" sz="1800" dirty="0">
-                <a:solidFill>
-                  <a:srgbClr val="0F172A"/>
+              <a:t>Now rewrite each focus word below with space between letters — leave room for your breakdown.</a:t>
+            </a:r>
+            <a:endParaRPr lang="en-US" sz="1200" dirty="0"/>
+          </a:p>
+        </p:txBody>
+      </p:sp>
+      <p:sp>
+        <p:nvSpPr>
+          <p:cNvPr id="15" name="Shape 13"/>
+          <p:cNvSpPr/>
+          <p:nvPr/>
+        </p:nvSpPr>
+        <p:spPr>
+          <a:xfrm>
+            <a:off x="1737360" y="3456432"/>
+            <a:ext cx="2560320" cy="1005840"/>
+          </a:xfrm>
+          <a:prstGeom prst="rect">
+            <a:avLst>
+              <a:gd name="adj" fmla="val 7273"/>
+            </a:avLst>
+          </a:prstGeom>
+          <a:solidFill>
+            <a:srgbClr val="F8FAFC"/>
+          </a:solidFill>
+          <a:ln w="12700">
+            <a:solidFill>
+              <a:srgbClr val="E2E8F0"/>
+            </a:solidFill>
+            <a:prstDash val="solid"/>
+          </a:ln>
+        </p:spPr>
+      </p:sp>
+      <p:sp>
+        <p:nvSpPr>
+          <p:cNvPr id="16" name="Shape 14"/>
+          <p:cNvSpPr/>
+          <p:nvPr/>
+        </p:nvSpPr>
+        <p:spPr>
+          <a:xfrm>
+            <a:off x="1737360" y="3977640"/>
+            <a:ext cx="2560320" cy="0"/>
+          </a:xfrm>
+          <a:prstGeom prst="line">
+            <a:avLst/>
+          </a:prstGeom>
+          <a:noFill/>
+          <a:ln w="12700">
+            <a:solidFill>
+              <a:srgbClr val="E2E8F0"/>
+            </a:solidFill>
+            <a:prstDash val="dash"/>
+          </a:ln>
+        </p:spPr>
+      </p:sp>
+      <p:sp>
+        <p:nvSpPr>
+          <p:cNvPr id="17" name="Text 15"/>
+          <p:cNvSpPr/>
+          <p:nvPr/>
+        </p:nvSpPr>
+        <p:spPr>
+          <a:xfrm>
+            <a:off x="1737360" y="3456432"/>
+            <a:ext cx="2560320" cy="502920"/>
+          </a:xfrm>
+          <a:prstGeom prst="rect">
+            <a:avLst/>
+          </a:prstGeom>
+          <a:noFill/>
+          <a:ln/>
+        </p:spPr>
+        <p:txBody>
+          <a:bodyPr wrap="square" lIns="0" tIns="0" rIns="0" bIns="0" rtlCol="0" anchor="ctr"/>
+          <a:lstStyle/>
+          <a:p>
+            <a:pPr algn="ctr" indent="0" marL="0">
+              <a:buNone/>
+            </a:pPr>
+            <a:r>
+              <a:rPr lang="en-US" sz="1400" b="1" dirty="0">
+                <a:solidFill>
+                  <a:srgbClr val="0D9488"/>
+                </a:solidFill>
+                <a:latin typeface="Trebuchet MS" pitchFamily="34" charset="0"/>
+                <a:ea typeface="Trebuchet MS" pitchFamily="34" charset="-122"/>
+                <a:cs typeface="Trebuchet MS" pitchFamily="34" charset="-120"/>
+              </a:rPr>
+              <a:t>uniform</a:t>
+            </a:r>
+            <a:endParaRPr lang="en-US" sz="1400" dirty="0"/>
+          </a:p>
+        </p:txBody>
+      </p:sp>
+      <p:sp>
+        <p:nvSpPr>
+          <p:cNvPr id="18" name="Text 16"/>
+          <p:cNvSpPr/>
+          <p:nvPr/>
+        </p:nvSpPr>
+        <p:spPr>
+          <a:xfrm>
+            <a:off x="1737360" y="4005072"/>
+            <a:ext cx="2560320" cy="457200"/>
+          </a:xfrm>
+          <a:prstGeom prst="rect">
+            <a:avLst/>
+          </a:prstGeom>
+          <a:noFill/>
+          <a:ln/>
+        </p:spPr>
+        <p:txBody>
+          <a:bodyPr wrap="square" lIns="0" tIns="0" rIns="0" bIns="0" rtlCol="0" anchor="ctr"/>
+          <a:lstStyle/>
+          <a:p>
+            <a:pPr algn="ctr" indent="0" marL="0">
+              <a:buNone/>
+            </a:pPr>
+            <a:r>
+              <a:rPr lang="en-US" sz="900" i="1" dirty="0">
+                <a:solidFill>
+                  <a:srgbClr val="475569"/>
                 </a:solidFill>
                 <a:latin typeface="Calibri" pitchFamily="34" charset="0"/>
                 <a:ea typeface="Calibri" pitchFamily="34" charset="-122"/>
                 <a:cs typeface="Calibri" pitchFamily="34" charset="-120"/>
               </a:rPr>
-              <a:t> school celebration.</a:t>
-            </a:r>
-            <a:endParaRPr lang="en-US" sz="1800" dirty="0"/>
-          </a:p>
-        </p:txBody>
-      </p:sp>
-      <p:sp>
-        <p:nvSpPr>
-          <p:cNvPr id="13" name="Shape 11"/>
-          <p:cNvSpPr/>
-          <p:nvPr/>
-        </p:nvSpPr>
-        <p:spPr>
-          <a:xfrm>
-            <a:off x="365760" y="2852928"/>
-            <a:ext cx="8412480" cy="475488"/>
-          </a:xfrm>
-          <a:prstGeom prst="rect">
-            <a:avLst>
-              <a:gd name="adj" fmla="val 15385"/>
-            </a:avLst>
-          </a:prstGeom>
-          <a:solidFill>
-            <a:srgbClr val="CCFBF1"/>
-          </a:solidFill>
-          <a:ln w="12700">
-            <a:solidFill>
-              <a:srgbClr val="0D9488"/>
-            </a:solidFill>
-            <a:prstDash val="solid"/>
-          </a:ln>
-        </p:spPr>
-      </p:sp>
-      <p:sp>
-        <p:nvSpPr>
-          <p:cNvPr id="14" name="Text 12"/>
-          <p:cNvSpPr/>
-          <p:nvPr/>
-        </p:nvSpPr>
-        <p:spPr>
-          <a:xfrm>
-            <a:off x="502920" y="2852928"/>
-            <a:ext cx="8229600" cy="475488"/>
-          </a:xfrm>
-          <a:prstGeom prst="rect">
-            <a:avLst/>
-          </a:prstGeom>
-          <a:noFill/>
-          <a:ln/>
-        </p:spPr>
-        <p:txBody>
-          <a:bodyPr wrap="square" rtlCol="0" anchor="ctr"/>
-          <a:lstStyle/>
-          <a:p>
-            <a:pPr algn="l" indent="0" marL="0">
-              <a:buNone/>
-            </a:pPr>
-            <a:r>
-              <a:rPr lang="en-US" sz="1200" b="1" dirty="0">
-                <a:solidFill>
-                  <a:srgbClr val="0F766E"/>
-                </a:solidFill>
-                <a:latin typeface="Calibri" pitchFamily="34" charset="0"/>
-                <a:ea typeface="Calibri" pitchFamily="34" charset="-122"/>
-                <a:cs typeface="Calibri" pitchFamily="34" charset="-120"/>
-              </a:rPr>
-              <a:t>Now rewrite each focus word below with space between letters — leave room for your breakdown.</a:t>
-            </a:r>
-            <a:endParaRPr lang="en-US" sz="1200" dirty="0"/>
-          </a:p>
-        </p:txBody>
-      </p:sp>
-      <p:sp>
-        <p:nvSpPr>
-          <p:cNvPr id="15" name="Shape 13"/>
-          <p:cNvSpPr/>
-          <p:nvPr/>
-        </p:nvSpPr>
-        <p:spPr>
-          <a:xfrm>
-            <a:off x="1737360" y="3456432"/>
+              <a:t>write your breakdown below</a:t>
+            </a:r>
+            <a:endParaRPr lang="en-US" sz="900" dirty="0"/>
+          </a:p>
+        </p:txBody>
+      </p:sp>
+      <p:sp>
+        <p:nvSpPr>
+          <p:cNvPr id="19" name="Shape 17"/>
+          <p:cNvSpPr/>
+          <p:nvPr/>
+        </p:nvSpPr>
+        <p:spPr>
+          <a:xfrm>
+            <a:off x="4572000" y="3456432"/>
             <a:ext cx="2560320" cy="1005840"/>
           </a:xfrm>
           <a:prstGeom prst="rect">
@@ -6203,13 +6300,13 @@
       </p:sp>
       <p:sp>
         <p:nvSpPr>
-          <p:cNvPr id="16" name="Shape 14"/>
-          <p:cNvSpPr/>
-          <p:nvPr/>
-        </p:nvSpPr>
-        <p:spPr>
-          <a:xfrm>
-            <a:off x="1737360" y="3977640"/>
+          <p:cNvPr id="20" name="Shape 18"/>
+          <p:cNvSpPr/>
+          <p:nvPr/>
+        </p:nvSpPr>
+        <p:spPr>
+          <a:xfrm>
+            <a:off x="4572000" y="3977640"/>
             <a:ext cx="2560320" cy="0"/>
           </a:xfrm>
           <a:prstGeom prst="line">
@@ -6226,13 +6323,13 @@
       </p:sp>
       <p:sp>
         <p:nvSpPr>
-          <p:cNvPr id="17" name="Text 15"/>
-          <p:cNvSpPr/>
-          <p:nvPr/>
-        </p:nvSpPr>
-        <p:spPr>
-          <a:xfrm>
-            <a:off x="1737360" y="3456432"/>
+          <p:cNvPr id="21" name="Text 19"/>
+          <p:cNvSpPr/>
+          <p:nvPr/>
+        </p:nvSpPr>
+        <p:spPr>
+          <a:xfrm>
+            <a:off x="4572000" y="3456432"/>
             <a:ext cx="2560320" cy="502920"/>
           </a:xfrm>
           <a:prstGeom prst="rect">
@@ -6257,135 +6354,7 @@
                 <a:ea typeface="Trebuchet MS" pitchFamily="34" charset="-122"/>
                 <a:cs typeface="Trebuchet MS" pitchFamily="34" charset="-120"/>
               </a:rPr>
-              <a:t>uniform</a:t>
-            </a:r>
-            <a:endParaRPr lang="en-US" sz="1400" dirty="0"/>
-          </a:p>
-        </p:txBody>
-      </p:sp>
-      <p:sp>
-        <p:nvSpPr>
-          <p:cNvPr id="18" name="Text 16"/>
-          <p:cNvSpPr/>
-          <p:nvPr/>
-        </p:nvSpPr>
-        <p:spPr>
-          <a:xfrm>
-            <a:off x="1737360" y="4005072"/>
-            <a:ext cx="2560320" cy="457200"/>
-          </a:xfrm>
-          <a:prstGeom prst="rect">
-            <a:avLst/>
-          </a:prstGeom>
-          <a:noFill/>
-          <a:ln/>
-        </p:spPr>
-        <p:txBody>
-          <a:bodyPr wrap="square" lIns="0" tIns="0" rIns="0" bIns="0" rtlCol="0" anchor="ctr"/>
-          <a:lstStyle/>
-          <a:p>
-            <a:pPr algn="ctr" indent="0" marL="0">
-              <a:buNone/>
-            </a:pPr>
-            <a:r>
-              <a:rPr lang="en-US" sz="900" i="1" dirty="0">
-                <a:solidFill>
-                  <a:srgbClr val="475569"/>
-                </a:solidFill>
-                <a:latin typeface="Calibri" pitchFamily="34" charset="0"/>
-                <a:ea typeface="Calibri" pitchFamily="34" charset="-122"/>
-                <a:cs typeface="Calibri" pitchFamily="34" charset="-120"/>
-              </a:rPr>
-              <a:t>write your breakdown below</a:t>
-            </a:r>
-            <a:endParaRPr lang="en-US" sz="900" dirty="0"/>
-          </a:p>
-        </p:txBody>
-      </p:sp>
-      <p:sp>
-        <p:nvSpPr>
-          <p:cNvPr id="19" name="Shape 17"/>
-          <p:cNvSpPr/>
-          <p:nvPr/>
-        </p:nvSpPr>
-        <p:spPr>
-          <a:xfrm>
-            <a:off x="4572000" y="3456432"/>
-            <a:ext cx="2560320" cy="1005840"/>
-          </a:xfrm>
-          <a:prstGeom prst="rect">
-            <a:avLst>
-              <a:gd name="adj" fmla="val 7273"/>
-            </a:avLst>
-          </a:prstGeom>
-          <a:solidFill>
-            <a:srgbClr val="F8FAFC"/>
-          </a:solidFill>
-          <a:ln w="12700">
-            <a:solidFill>
-              <a:srgbClr val="E2E8F0"/>
-            </a:solidFill>
-            <a:prstDash val="solid"/>
-          </a:ln>
-        </p:spPr>
-      </p:sp>
-      <p:sp>
-        <p:nvSpPr>
-          <p:cNvPr id="20" name="Shape 18"/>
-          <p:cNvSpPr/>
-          <p:nvPr/>
-        </p:nvSpPr>
-        <p:spPr>
-          <a:xfrm>
-            <a:off x="4572000" y="3977640"/>
-            <a:ext cx="2560320" cy="0"/>
-          </a:xfrm>
-          <a:prstGeom prst="line">
-            <a:avLst/>
-          </a:prstGeom>
-          <a:noFill/>
-          <a:ln w="12700">
-            <a:solidFill>
-              <a:srgbClr val="E2E8F0"/>
-            </a:solidFill>
-            <a:prstDash val="dash"/>
-          </a:ln>
-        </p:spPr>
-      </p:sp>
-      <p:sp>
-        <p:nvSpPr>
-          <p:cNvPr id="21" name="Text 19"/>
-          <p:cNvSpPr/>
-          <p:nvPr/>
-        </p:nvSpPr>
-        <p:spPr>
-          <a:xfrm>
-            <a:off x="4572000" y="3456432"/>
-            <a:ext cx="2560320" cy="502920"/>
-          </a:xfrm>
-          <a:prstGeom prst="rect">
-            <a:avLst/>
-          </a:prstGeom>
-          <a:noFill/>
-          <a:ln/>
-        </p:spPr>
-        <p:txBody>
-          <a:bodyPr wrap="square" lIns="0" tIns="0" rIns="0" bIns="0" rtlCol="0" anchor="ctr"/>
-          <a:lstStyle/>
-          <a:p>
-            <a:pPr algn="ctr" indent="0" marL="0">
-              <a:buNone/>
-            </a:pPr>
-            <a:r>
-              <a:rPr lang="en-US" sz="1400" b="1" dirty="0">
-                <a:solidFill>
-                  <a:srgbClr val="0D9488"/>
-                </a:solidFill>
-                <a:latin typeface="Trebuchet MS" pitchFamily="34" charset="0"/>
-                <a:ea typeface="Trebuchet MS" pitchFamily="34" charset="-122"/>
-                <a:cs typeface="Trebuchet MS" pitchFamily="34" charset="-120"/>
-              </a:rPr>
-              <a:t>universal</a:t>
+              <a:t>unison</a:t>
             </a:r>
             <a:endParaRPr lang="en-US" sz="1400" dirty="0"/>
           </a:p>
@@ -11468,7 +11437,7 @@
                 <a:ea typeface="Trebuchet MS" pitchFamily="34" charset="-122"/>
                 <a:cs typeface="Trebuchet MS" pitchFamily="34" charset="-120"/>
               </a:rPr>
-              <a:t>universal</a:t>
+              <a:t>unison</a:t>
             </a:r>
             <a:endParaRPr lang="en-US" sz="2800" dirty="0"/>
           </a:p>
@@ -12295,7 +12264,7 @@
                 <a:ea typeface="Trebuchet MS" pitchFamily="34" charset="-122"/>
                 <a:cs typeface="Trebuchet MS" pitchFamily="34" charset="-120"/>
               </a:rPr>
-              <a:t>universal</a:t>
+              <a:t>unison</a:t>
             </a:r>
             <a:endParaRPr lang="en-US" sz="2800" dirty="0"/>
           </a:p>
@@ -12375,7 +12344,7 @@
         </p:nvSpPr>
         <p:spPr>
           <a:xfrm>
-            <a:off x="2221992" y="2258568"/>
+            <a:off x="2938272" y="2258568"/>
             <a:ext cx="1828800" cy="292608"/>
           </a:xfrm>
           <a:prstGeom prst="rect">
@@ -12409,7 +12378,7 @@
         </p:nvSpPr>
         <p:spPr>
           <a:xfrm>
-            <a:off x="2221992" y="2258568"/>
+            <a:off x="2938272" y="2258568"/>
             <a:ext cx="1828800" cy="292608"/>
           </a:xfrm>
           <a:prstGeom prst="rect">
@@ -12448,7 +12417,7 @@
         </p:nvSpPr>
         <p:spPr>
           <a:xfrm>
-            <a:off x="2221992" y="2569464"/>
+            <a:off x="2938272" y="2569464"/>
             <a:ext cx="1828800" cy="201168"/>
           </a:xfrm>
           <a:prstGeom prst="rect">
@@ -12487,7 +12456,7 @@
         </p:nvSpPr>
         <p:spPr>
           <a:xfrm>
-            <a:off x="4370832" y="2258568"/>
+            <a:off x="5803392" y="2258568"/>
             <a:ext cx="1828800" cy="292608"/>
           </a:xfrm>
           <a:prstGeom prst="rect">
@@ -12521,7 +12490,7 @@
         </p:nvSpPr>
         <p:spPr>
           <a:xfrm>
-            <a:off x="4370832" y="2258568"/>
+            <a:off x="5803392" y="2258568"/>
             <a:ext cx="1828800" cy="292608"/>
           </a:xfrm>
           <a:prstGeom prst="rect">
@@ -12546,7 +12515,7 @@
                 <a:ea typeface="Trebuchet MS" pitchFamily="34" charset="-122"/>
                 <a:cs typeface="Trebuchet MS" pitchFamily="34" charset="-120"/>
               </a:rPr>
-              <a:t>verse</a:t>
+              <a:t>son</a:t>
             </a:r>
             <a:endParaRPr lang="en-US" sz="1300" dirty="0"/>
           </a:p>
@@ -12560,7 +12529,7 @@
         </p:nvSpPr>
         <p:spPr>
           <a:xfrm>
-            <a:off x="4370832" y="2569464"/>
+            <a:off x="5803392" y="2569464"/>
             <a:ext cx="1828800" cy="201168"/>
           </a:xfrm>
           <a:prstGeom prst="rect">
@@ -12585,7 +12554,7 @@
                 <a:ea typeface="Calibri" pitchFamily="34" charset="-122"/>
                 <a:cs typeface="Calibri" pitchFamily="34" charset="-120"/>
               </a:rPr>
-              <a:t>to turn</a:t>
+              <a:t>sound</a:t>
             </a:r>
             <a:endParaRPr lang="en-US" sz="850" dirty="0"/>
           </a:p>
@@ -12599,30 +12568,23 @@
         </p:nvSpPr>
         <p:spPr>
           <a:xfrm>
-            <a:off x="6519672" y="2258568"/>
-            <a:ext cx="1828800" cy="292608"/>
+            <a:off x="365760" y="3273552"/>
+            <a:ext cx="1371600" cy="658368"/>
           </a:xfrm>
           <a:prstGeom prst="rect">
             <a:avLst>
-              <a:gd name="adj" fmla="val 25000"/>
+              <a:gd name="adj" fmla="val 8333"/>
             </a:avLst>
           </a:prstGeom>
           <a:solidFill>
-            <a:srgbClr val="FCE7F3"/>
-          </a:solidFill>
-          <a:ln w="19050">
-            <a:solidFill>
-              <a:srgbClr val="DB2777"/>
-            </a:solidFill>
-            <a:prstDash val="solid"/>
-          </a:ln>
-          <a:effectLst>
-            <a:outerShdw sx="100000" sy="100000" kx="0" ky="0" algn="bl" rotWithShape="0" blurRad="101600" dist="38100" dir="8100000">
-              <a:srgbClr val="000000">
-                <a:alpha val="12000"/>
-              </a:srgbClr>
-            </a:outerShdw>
-          </a:effectLst>
+            <a:srgbClr val="E2E8F0"/>
+          </a:solidFill>
+          <a:ln w="12700">
+            <a:solidFill>
+              <a:srgbClr val="E2E8F0"/>
+            </a:solidFill>
+            <a:prstDash val="solid"/>
+          </a:ln>
         </p:spPr>
       </p:sp>
       <p:sp>
@@ -12633,90 +12595,117 @@
         </p:nvSpPr>
         <p:spPr>
           <a:xfrm>
-            <a:off x="6519672" y="2258568"/>
-            <a:ext cx="1828800" cy="292608"/>
-          </a:xfrm>
-          <a:prstGeom prst="rect">
-            <a:avLst/>
-          </a:prstGeom>
-          <a:noFill/>
-          <a:ln/>
-        </p:spPr>
-        <p:txBody>
-          <a:bodyPr wrap="square" lIns="0" tIns="0" rIns="0" bIns="0" rtlCol="0" anchor="ctr"/>
-          <a:lstStyle/>
-          <a:p>
-            <a:pPr algn="ctr" indent="0" marL="0">
-              <a:buNone/>
-            </a:pPr>
-            <a:r>
-              <a:rPr lang="en-US" sz="1300" b="1" dirty="0">
-                <a:solidFill>
-                  <a:srgbClr val="9D174D"/>
+            <a:off x="365760" y="3273552"/>
+            <a:ext cx="1371600" cy="658368"/>
+          </a:xfrm>
+          <a:prstGeom prst="rect">
+            <a:avLst/>
+          </a:prstGeom>
+          <a:noFill/>
+          <a:ln/>
+        </p:spPr>
+        <p:txBody>
+          <a:bodyPr wrap="square" lIns="0" tIns="0" rIns="0" bIns="0" rtlCol="0" anchor="ctr"/>
+          <a:lstStyle/>
+          <a:p>
+            <a:pPr algn="ctr" indent="0" marL="0">
+              <a:buNone/>
+            </a:pPr>
+            <a:r>
+              <a:rPr lang="en-US" sz="1100" b="1" dirty="0">
+                <a:solidFill>
+                  <a:srgbClr val="475569"/>
                 </a:solidFill>
                 <a:latin typeface="Trebuchet MS" pitchFamily="34" charset="0"/>
                 <a:ea typeface="Trebuchet MS" pitchFamily="34" charset="-122"/>
                 <a:cs typeface="Trebuchet MS" pitchFamily="34" charset="-120"/>
               </a:rPr>
-              <a:t>al</a:t>
-            </a:r>
-            <a:endParaRPr lang="en-US" sz="1300" dirty="0"/>
-          </a:p>
-        </p:txBody>
-      </p:sp>
-      <p:sp>
-        <p:nvSpPr>
-          <p:cNvPr id="24" name="Text 22"/>
-          <p:cNvSpPr/>
-          <p:nvPr/>
-        </p:nvSpPr>
-        <p:spPr>
-          <a:xfrm>
-            <a:off x="6519672" y="2569464"/>
-            <a:ext cx="1828800" cy="201168"/>
-          </a:xfrm>
-          <a:prstGeom prst="rect">
-            <a:avLst/>
-          </a:prstGeom>
-          <a:noFill/>
-          <a:ln/>
-        </p:spPr>
-        <p:txBody>
-          <a:bodyPr wrap="square" lIns="0" tIns="0" rIns="0" bIns="0" rtlCol="0" anchor="t"/>
-          <a:lstStyle/>
-          <a:p>
-            <a:pPr algn="ctr" indent="0" marL="0">
-              <a:buNone/>
-            </a:pPr>
-            <a:r>
-              <a:rPr lang="en-US" sz="850" dirty="0">
-                <a:solidFill>
-                  <a:srgbClr val="475569"/>
+              <a:t>Syllables</a:t>
+            </a:r>
+            <a:endParaRPr lang="en-US" sz="1100" dirty="0"/>
+          </a:p>
+        </p:txBody>
+      </p:sp>
+      <p:sp>
+        <p:nvSpPr>
+          <p:cNvPr id="24" name="Shape 22"/>
+          <p:cNvSpPr/>
+          <p:nvPr/>
+        </p:nvSpPr>
+        <p:spPr>
+          <a:xfrm>
+            <a:off x="1874520" y="3273552"/>
+            <a:ext cx="6903720" cy="658368"/>
+          </a:xfrm>
+          <a:prstGeom prst="rect">
+            <a:avLst>
+              <a:gd name="adj" fmla="val 8333"/>
+            </a:avLst>
+          </a:prstGeom>
+          <a:solidFill>
+            <a:srgbClr val="F8FAFC"/>
+          </a:solidFill>
+          <a:ln w="12700">
+            <a:solidFill>
+              <a:srgbClr val="E2E8F0"/>
+            </a:solidFill>
+            <a:prstDash val="dash"/>
+          </a:ln>
+        </p:spPr>
+      </p:sp>
+      <p:sp>
+        <p:nvSpPr>
+          <p:cNvPr id="25" name="Text 23"/>
+          <p:cNvSpPr/>
+          <p:nvPr/>
+        </p:nvSpPr>
+        <p:spPr>
+          <a:xfrm>
+            <a:off x="1874520" y="3273552"/>
+            <a:ext cx="6903720" cy="658368"/>
+          </a:xfrm>
+          <a:prstGeom prst="rect">
+            <a:avLst/>
+          </a:prstGeom>
+          <a:noFill/>
+          <a:ln/>
+        </p:spPr>
+        <p:txBody>
+          <a:bodyPr wrap="square" rtlCol="0" anchor="ctr"/>
+          <a:lstStyle/>
+          <a:p>
+            <a:pPr algn="ctr" indent="0" marL="0">
+              <a:buNone/>
+            </a:pPr>
+            <a:r>
+              <a:rPr lang="en-US" sz="1100" i="1" dirty="0">
+                <a:solidFill>
+                  <a:srgbClr val="CBD5E1"/>
                 </a:solidFill>
                 <a:latin typeface="Calibri" pitchFamily="34" charset="0"/>
                 <a:ea typeface="Calibri" pitchFamily="34" charset="-122"/>
                 <a:cs typeface="Calibri" pitchFamily="34" charset="-120"/>
               </a:rPr>
-              <a:t>relating to</a:t>
-            </a:r>
-            <a:endParaRPr lang="en-US" sz="850" dirty="0"/>
-          </a:p>
-        </p:txBody>
-      </p:sp>
-      <p:sp>
-        <p:nvSpPr>
-          <p:cNvPr id="25" name="Shape 23"/>
-          <p:cNvSpPr/>
-          <p:nvPr/>
-        </p:nvSpPr>
-        <p:spPr>
-          <a:xfrm>
-            <a:off x="365760" y="3273552"/>
-            <a:ext cx="1371600" cy="658368"/>
+              <a:t>Write here...</a:t>
+            </a:r>
+            <a:endParaRPr lang="en-US" sz="1100" dirty="0"/>
+          </a:p>
+        </p:txBody>
+      </p:sp>
+      <p:sp>
+        <p:nvSpPr>
+          <p:cNvPr id="26" name="Shape 24"/>
+          <p:cNvSpPr/>
+          <p:nvPr/>
+        </p:nvSpPr>
+        <p:spPr>
+          <a:xfrm>
+            <a:off x="365760" y="4096512"/>
+            <a:ext cx="1371600" cy="804672"/>
           </a:xfrm>
           <a:prstGeom prst="rect">
             <a:avLst>
-              <a:gd name="adj" fmla="val 8333"/>
+              <a:gd name="adj" fmla="val 6818"/>
             </a:avLst>
           </a:prstGeom>
           <a:solidFill>
@@ -12732,14 +12721,14 @@
       </p:sp>
       <p:sp>
         <p:nvSpPr>
-          <p:cNvPr id="26" name="Text 24"/>
-          <p:cNvSpPr/>
-          <p:nvPr/>
-        </p:nvSpPr>
-        <p:spPr>
-          <a:xfrm>
-            <a:off x="365760" y="3273552"/>
-            <a:ext cx="1371600" cy="658368"/>
+          <p:cNvPr id="27" name="Text 25"/>
+          <p:cNvSpPr/>
+          <p:nvPr/>
+        </p:nvSpPr>
+        <p:spPr>
+          <a:xfrm>
+            <a:off x="365760" y="4096512"/>
+            <a:ext cx="1371600" cy="804672"/>
           </a:xfrm>
           <a:prstGeom prst="rect">
             <a:avLst/>
@@ -12763,7 +12752,7 @@
                 <a:ea typeface="Trebuchet MS" pitchFamily="34" charset="-122"/>
                 <a:cs typeface="Trebuchet MS" pitchFamily="34" charset="-120"/>
               </a:rPr>
-              <a:t>Syllables</a:t>
+              <a:t>Phonemes</a:t>
             </a:r>
             <a:endParaRPr lang="en-US" sz="1100" dirty="0"/>
           </a:p>
@@ -12771,80 +12760,14 @@
       </p:sp>
       <p:sp>
         <p:nvSpPr>
-          <p:cNvPr id="27" name="Shape 25"/>
-          <p:cNvSpPr/>
-          <p:nvPr/>
-        </p:nvSpPr>
-        <p:spPr>
-          <a:xfrm>
-            <a:off x="1874520" y="3273552"/>
-            <a:ext cx="6903720" cy="658368"/>
-          </a:xfrm>
-          <a:prstGeom prst="rect">
-            <a:avLst>
-              <a:gd name="adj" fmla="val 8333"/>
-            </a:avLst>
-          </a:prstGeom>
-          <a:solidFill>
-            <a:srgbClr val="F8FAFC"/>
-          </a:solidFill>
-          <a:ln w="12700">
-            <a:solidFill>
-              <a:srgbClr val="E2E8F0"/>
-            </a:solidFill>
-            <a:prstDash val="dash"/>
-          </a:ln>
-        </p:spPr>
-      </p:sp>
-      <p:sp>
-        <p:nvSpPr>
-          <p:cNvPr id="28" name="Text 26"/>
-          <p:cNvSpPr/>
-          <p:nvPr/>
-        </p:nvSpPr>
-        <p:spPr>
-          <a:xfrm>
-            <a:off x="1874520" y="3273552"/>
-            <a:ext cx="6903720" cy="658368"/>
-          </a:xfrm>
-          <a:prstGeom prst="rect">
-            <a:avLst/>
-          </a:prstGeom>
-          <a:noFill/>
-          <a:ln/>
-        </p:spPr>
-        <p:txBody>
-          <a:bodyPr wrap="square" rtlCol="0" anchor="ctr"/>
-          <a:lstStyle/>
-          <a:p>
-            <a:pPr algn="ctr" indent="0" marL="0">
-              <a:buNone/>
-            </a:pPr>
-            <a:r>
-              <a:rPr lang="en-US" sz="1100" i="1" dirty="0">
-                <a:solidFill>
-                  <a:srgbClr val="CBD5E1"/>
-                </a:solidFill>
-                <a:latin typeface="Calibri" pitchFamily="34" charset="0"/>
-                <a:ea typeface="Calibri" pitchFamily="34" charset="-122"/>
-                <a:cs typeface="Calibri" pitchFamily="34" charset="-120"/>
-              </a:rPr>
-              <a:t>Write here...</a:t>
-            </a:r>
-            <a:endParaRPr lang="en-US" sz="1100" dirty="0"/>
-          </a:p>
-        </p:txBody>
-      </p:sp>
-      <p:sp>
-        <p:nvSpPr>
-          <p:cNvPr id="29" name="Shape 27"/>
-          <p:cNvSpPr/>
-          <p:nvPr/>
-        </p:nvSpPr>
-        <p:spPr>
-          <a:xfrm>
-            <a:off x="365760" y="4096512"/>
-            <a:ext cx="1371600" cy="804672"/>
+          <p:cNvPr id="28" name="Shape 26"/>
+          <p:cNvSpPr/>
+          <p:nvPr/>
+        </p:nvSpPr>
+        <p:spPr>
+          <a:xfrm>
+            <a:off x="1874520" y="4096512"/>
+            <a:ext cx="6903720" cy="804672"/>
           </a:xfrm>
           <a:prstGeom prst="rect">
             <a:avLst>
@@ -12852,85 +12775,19 @@
             </a:avLst>
           </a:prstGeom>
           <a:solidFill>
-            <a:srgbClr val="E2E8F0"/>
+            <a:srgbClr val="F8FAFC"/>
           </a:solidFill>
           <a:ln w="12700">
             <a:solidFill>
               <a:srgbClr val="E2E8F0"/>
             </a:solidFill>
-            <a:prstDash val="solid"/>
-          </a:ln>
-        </p:spPr>
-      </p:sp>
-      <p:sp>
-        <p:nvSpPr>
-          <p:cNvPr id="30" name="Text 28"/>
-          <p:cNvSpPr/>
-          <p:nvPr/>
-        </p:nvSpPr>
-        <p:spPr>
-          <a:xfrm>
-            <a:off x="365760" y="4096512"/>
-            <a:ext cx="1371600" cy="804672"/>
-          </a:xfrm>
-          <a:prstGeom prst="rect">
-            <a:avLst/>
-          </a:prstGeom>
-          <a:noFill/>
-          <a:ln/>
-        </p:spPr>
-        <p:txBody>
-          <a:bodyPr wrap="square" lIns="0" tIns="0" rIns="0" bIns="0" rtlCol="0" anchor="ctr"/>
-          <a:lstStyle/>
-          <a:p>
-            <a:pPr algn="ctr" indent="0" marL="0">
-              <a:buNone/>
-            </a:pPr>
-            <a:r>
-              <a:rPr lang="en-US" sz="1100" b="1" dirty="0">
-                <a:solidFill>
-                  <a:srgbClr val="475569"/>
-                </a:solidFill>
-                <a:latin typeface="Trebuchet MS" pitchFamily="34" charset="0"/>
-                <a:ea typeface="Trebuchet MS" pitchFamily="34" charset="-122"/>
-                <a:cs typeface="Trebuchet MS" pitchFamily="34" charset="-120"/>
-              </a:rPr>
-              <a:t>Phonemes</a:t>
-            </a:r>
-            <a:endParaRPr lang="en-US" sz="1100" dirty="0"/>
-          </a:p>
-        </p:txBody>
-      </p:sp>
-      <p:sp>
-        <p:nvSpPr>
-          <p:cNvPr id="31" name="Shape 29"/>
-          <p:cNvSpPr/>
-          <p:nvPr/>
-        </p:nvSpPr>
-        <p:spPr>
-          <a:xfrm>
-            <a:off x="1874520" y="4096512"/>
-            <a:ext cx="6903720" cy="804672"/>
-          </a:xfrm>
-          <a:prstGeom prst="rect">
-            <a:avLst>
-              <a:gd name="adj" fmla="val 6818"/>
-            </a:avLst>
-          </a:prstGeom>
-          <a:solidFill>
-            <a:srgbClr val="F8FAFC"/>
-          </a:solidFill>
-          <a:ln w="12700">
-            <a:solidFill>
-              <a:srgbClr val="E2E8F0"/>
-            </a:solidFill>
             <a:prstDash val="dash"/>
           </a:ln>
         </p:spPr>
       </p:sp>
       <p:sp>
         <p:nvSpPr>
-          <p:cNvPr id="32" name="Text 30"/>
+          <p:cNvPr id="29" name="Text 27"/>
           <p:cNvSpPr/>
           <p:nvPr/>
         </p:nvSpPr>
@@ -13392,7 +13249,7 @@
                 <a:ea typeface="Trebuchet MS" pitchFamily="34" charset="-122"/>
                 <a:cs typeface="Trebuchet MS" pitchFamily="34" charset="-120"/>
               </a:rPr>
-              <a:t>universal</a:t>
+              <a:t>unison</a:t>
             </a:r>
             <a:endParaRPr lang="en-US" sz="2800" dirty="0"/>
           </a:p>
@@ -13472,7 +13329,7 @@
         </p:nvSpPr>
         <p:spPr>
           <a:xfrm>
-            <a:off x="2221992" y="2258568"/>
+            <a:off x="2938272" y="2258568"/>
             <a:ext cx="1828800" cy="292608"/>
           </a:xfrm>
           <a:prstGeom prst="rect">
@@ -13506,7 +13363,7 @@
         </p:nvSpPr>
         <p:spPr>
           <a:xfrm>
-            <a:off x="2221992" y="2258568"/>
+            <a:off x="2938272" y="2258568"/>
             <a:ext cx="1828800" cy="292608"/>
           </a:xfrm>
           <a:prstGeom prst="rect">
@@ -13545,7 +13402,7 @@
         </p:nvSpPr>
         <p:spPr>
           <a:xfrm>
-            <a:off x="2221992" y="2569464"/>
+            <a:off x="2938272" y="2569464"/>
             <a:ext cx="1828800" cy="201168"/>
           </a:xfrm>
           <a:prstGeom prst="rect">
@@ -13584,7 +13441,7 @@
         </p:nvSpPr>
         <p:spPr>
           <a:xfrm>
-            <a:off x="4370832" y="2258568"/>
+            <a:off x="5803392" y="2258568"/>
             <a:ext cx="1828800" cy="292608"/>
           </a:xfrm>
           <a:prstGeom prst="rect">
@@ -13618,7 +13475,7 @@
         </p:nvSpPr>
         <p:spPr>
           <a:xfrm>
-            <a:off x="4370832" y="2258568"/>
+            <a:off x="5803392" y="2258568"/>
             <a:ext cx="1828800" cy="292608"/>
           </a:xfrm>
           <a:prstGeom prst="rect">
@@ -13643,7 +13500,7 @@
                 <a:ea typeface="Trebuchet MS" pitchFamily="34" charset="-122"/>
                 <a:cs typeface="Trebuchet MS" pitchFamily="34" charset="-120"/>
               </a:rPr>
-              <a:t>verse</a:t>
+              <a:t>son</a:t>
             </a:r>
             <a:endParaRPr lang="en-US" sz="1300" dirty="0"/>
           </a:p>
@@ -13657,7 +13514,7 @@
         </p:nvSpPr>
         <p:spPr>
           <a:xfrm>
-            <a:off x="4370832" y="2569464"/>
+            <a:off x="5803392" y="2569464"/>
             <a:ext cx="1828800" cy="201168"/>
           </a:xfrm>
           <a:prstGeom prst="rect">
@@ -13682,7 +13539,7 @@
                 <a:ea typeface="Calibri" pitchFamily="34" charset="-122"/>
                 <a:cs typeface="Calibri" pitchFamily="34" charset="-120"/>
               </a:rPr>
-              <a:t>to turn</a:t>
+              <a:t>sound</a:t>
             </a:r>
             <a:endParaRPr lang="en-US" sz="850" dirty="0"/>
           </a:p>
@@ -13696,30 +13553,23 @@
         </p:nvSpPr>
         <p:spPr>
           <a:xfrm>
-            <a:off x="6519672" y="2258568"/>
-            <a:ext cx="1828800" cy="292608"/>
+            <a:off x="365760" y="3273552"/>
+            <a:ext cx="1371600" cy="658368"/>
           </a:xfrm>
           <a:prstGeom prst="rect">
             <a:avLst>
-              <a:gd name="adj" fmla="val 25000"/>
+              <a:gd name="adj" fmla="val 8333"/>
             </a:avLst>
           </a:prstGeom>
           <a:solidFill>
-            <a:srgbClr val="FCE7F3"/>
-          </a:solidFill>
-          <a:ln w="19050">
-            <a:solidFill>
-              <a:srgbClr val="DB2777"/>
-            </a:solidFill>
-            <a:prstDash val="solid"/>
-          </a:ln>
-          <a:effectLst>
-            <a:outerShdw sx="100000" sy="100000" kx="0" ky="0" algn="bl" rotWithShape="0" blurRad="101600" dist="38100" dir="8100000">
-              <a:srgbClr val="000000">
-                <a:alpha val="12000"/>
-              </a:srgbClr>
-            </a:outerShdw>
-          </a:effectLst>
+            <a:srgbClr val="E2E8F0"/>
+          </a:solidFill>
+          <a:ln w="12700">
+            <a:solidFill>
+              <a:srgbClr val="E2E8F0"/>
+            </a:solidFill>
+            <a:prstDash val="solid"/>
+          </a:ln>
         </p:spPr>
       </p:sp>
       <p:sp>
@@ -13730,86 +13580,47 @@
         </p:nvSpPr>
         <p:spPr>
           <a:xfrm>
-            <a:off x="6519672" y="2258568"/>
-            <a:ext cx="1828800" cy="292608"/>
-          </a:xfrm>
-          <a:prstGeom prst="rect">
-            <a:avLst/>
-          </a:prstGeom>
-          <a:noFill/>
-          <a:ln/>
-        </p:spPr>
-        <p:txBody>
-          <a:bodyPr wrap="square" lIns="0" tIns="0" rIns="0" bIns="0" rtlCol="0" anchor="ctr"/>
-          <a:lstStyle/>
-          <a:p>
-            <a:pPr algn="ctr" indent="0" marL="0">
-              <a:buNone/>
-            </a:pPr>
-            <a:r>
-              <a:rPr lang="en-US" sz="1300" b="1" dirty="0">
-                <a:solidFill>
-                  <a:srgbClr val="9D174D"/>
+            <a:off x="365760" y="3273552"/>
+            <a:ext cx="1371600" cy="658368"/>
+          </a:xfrm>
+          <a:prstGeom prst="rect">
+            <a:avLst/>
+          </a:prstGeom>
+          <a:noFill/>
+          <a:ln/>
+        </p:spPr>
+        <p:txBody>
+          <a:bodyPr wrap="square" lIns="0" tIns="0" rIns="0" bIns="0" rtlCol="0" anchor="ctr"/>
+          <a:lstStyle/>
+          <a:p>
+            <a:pPr algn="ctr" indent="0" marL="0">
+              <a:buNone/>
+            </a:pPr>
+            <a:r>
+              <a:rPr lang="en-US" sz="1100" b="1" dirty="0">
+                <a:solidFill>
+                  <a:srgbClr val="475569"/>
                 </a:solidFill>
                 <a:latin typeface="Trebuchet MS" pitchFamily="34" charset="0"/>
                 <a:ea typeface="Trebuchet MS" pitchFamily="34" charset="-122"/>
                 <a:cs typeface="Trebuchet MS" pitchFamily="34" charset="-120"/>
               </a:rPr>
-              <a:t>al</a:t>
-            </a:r>
-            <a:endParaRPr lang="en-US" sz="1300" dirty="0"/>
-          </a:p>
-        </p:txBody>
-      </p:sp>
-      <p:sp>
-        <p:nvSpPr>
-          <p:cNvPr id="24" name="Text 22"/>
-          <p:cNvSpPr/>
-          <p:nvPr/>
-        </p:nvSpPr>
-        <p:spPr>
-          <a:xfrm>
-            <a:off x="6519672" y="2569464"/>
-            <a:ext cx="1828800" cy="201168"/>
-          </a:xfrm>
-          <a:prstGeom prst="rect">
-            <a:avLst/>
-          </a:prstGeom>
-          <a:noFill/>
-          <a:ln/>
-        </p:spPr>
-        <p:txBody>
-          <a:bodyPr wrap="square" lIns="0" tIns="0" rIns="0" bIns="0" rtlCol="0" anchor="t"/>
-          <a:lstStyle/>
-          <a:p>
-            <a:pPr algn="ctr" indent="0" marL="0">
-              <a:buNone/>
-            </a:pPr>
-            <a:r>
-              <a:rPr lang="en-US" sz="850" dirty="0">
-                <a:solidFill>
-                  <a:srgbClr val="475569"/>
-                </a:solidFill>
-                <a:latin typeface="Calibri" pitchFamily="34" charset="0"/>
-                <a:ea typeface="Calibri" pitchFamily="34" charset="-122"/>
-                <a:cs typeface="Calibri" pitchFamily="34" charset="-120"/>
-              </a:rPr>
-              <a:t>relating to</a:t>
-            </a:r>
-            <a:endParaRPr lang="en-US" sz="850" dirty="0"/>
-          </a:p>
-        </p:txBody>
-      </p:sp>
-      <p:sp>
-        <p:nvSpPr>
-          <p:cNvPr id="25" name="Shape 23"/>
-          <p:cNvSpPr/>
-          <p:nvPr/>
-        </p:nvSpPr>
-        <p:spPr>
-          <a:xfrm>
-            <a:off x="365760" y="3273552"/>
-            <a:ext cx="1371600" cy="658368"/>
+              <a:t>Syllables</a:t>
+            </a:r>
+            <a:endParaRPr lang="en-US" sz="1100" dirty="0"/>
+          </a:p>
+        </p:txBody>
+      </p:sp>
+      <p:sp>
+        <p:nvSpPr>
+          <p:cNvPr id="24" name="Shape 22"/>
+          <p:cNvSpPr/>
+          <p:nvPr/>
+        </p:nvSpPr>
+        <p:spPr>
+          <a:xfrm>
+            <a:off x="1874520" y="3273552"/>
+            <a:ext cx="6903720" cy="658368"/>
           </a:xfrm>
           <a:prstGeom prst="rect">
             <a:avLst>
@@ -13817,11 +13628,38 @@
             </a:avLst>
           </a:prstGeom>
           <a:solidFill>
-            <a:srgbClr val="E2E8F0"/>
-          </a:solidFill>
-          <a:ln w="12700">
-            <a:solidFill>
-              <a:srgbClr val="E2E8F0"/>
+            <a:srgbClr val="CCFBF1"/>
+          </a:solidFill>
+          <a:ln w="12700">
+            <a:solidFill>
+              <a:srgbClr val="0D9488"/>
+            </a:solidFill>
+            <a:prstDash val="solid"/>
+          </a:ln>
+        </p:spPr>
+      </p:sp>
+      <p:sp>
+        <p:nvSpPr>
+          <p:cNvPr id="25" name="Shape 23"/>
+          <p:cNvSpPr/>
+          <p:nvPr/>
+        </p:nvSpPr>
+        <p:spPr>
+          <a:xfrm>
+            <a:off x="2313432" y="3364992"/>
+            <a:ext cx="1645920" cy="475488"/>
+          </a:xfrm>
+          <a:prstGeom prst="rect">
+            <a:avLst>
+              <a:gd name="adj" fmla="val 9615"/>
+            </a:avLst>
+          </a:prstGeom>
+          <a:solidFill>
+            <a:srgbClr val="FFFFFF"/>
+          </a:solidFill>
+          <a:ln w="12700">
+            <a:solidFill>
+              <a:srgbClr val="0D9488"/>
             </a:solidFill>
             <a:prstDash val="solid"/>
           </a:ln>
@@ -13835,63 +13673,75 @@
         </p:nvSpPr>
         <p:spPr>
           <a:xfrm>
-            <a:off x="365760" y="3273552"/>
-            <a:ext cx="1371600" cy="658368"/>
-          </a:xfrm>
-          <a:prstGeom prst="rect">
-            <a:avLst/>
-          </a:prstGeom>
-          <a:noFill/>
-          <a:ln/>
-        </p:spPr>
-        <p:txBody>
-          <a:bodyPr wrap="square" lIns="0" tIns="0" rIns="0" bIns="0" rtlCol="0" anchor="ctr"/>
-          <a:lstStyle/>
-          <a:p>
-            <a:pPr algn="ctr" indent="0" marL="0">
-              <a:buNone/>
-            </a:pPr>
-            <a:r>
-              <a:rPr lang="en-US" sz="1100" b="1" dirty="0">
-                <a:solidFill>
-                  <a:srgbClr val="475569"/>
+            <a:off x="2313432" y="3364992"/>
+            <a:ext cx="1645920" cy="475488"/>
+          </a:xfrm>
+          <a:prstGeom prst="rect">
+            <a:avLst/>
+          </a:prstGeom>
+          <a:noFill/>
+          <a:ln/>
+        </p:spPr>
+        <p:txBody>
+          <a:bodyPr wrap="square" lIns="0" tIns="0" rIns="0" bIns="0" rtlCol="0" anchor="ctr"/>
+          <a:lstStyle/>
+          <a:p>
+            <a:pPr algn="ctr" indent="0" marL="0">
+              <a:buNone/>
+            </a:pPr>
+            <a:r>
+              <a:rPr lang="en-US" sz="1400" b="1" dirty="0">
+                <a:solidFill>
+                  <a:srgbClr val="0D9488"/>
                 </a:solidFill>
                 <a:latin typeface="Trebuchet MS" pitchFamily="34" charset="0"/>
                 <a:ea typeface="Trebuchet MS" pitchFamily="34" charset="-122"/>
                 <a:cs typeface="Trebuchet MS" pitchFamily="34" charset="-120"/>
               </a:rPr>
-              <a:t>Syllables</a:t>
-            </a:r>
-            <a:endParaRPr lang="en-US" sz="1100" dirty="0"/>
-          </a:p>
-        </p:txBody>
-      </p:sp>
-      <p:sp>
-        <p:nvSpPr>
-          <p:cNvPr id="27" name="Shape 25"/>
-          <p:cNvSpPr/>
-          <p:nvPr/>
-        </p:nvSpPr>
-        <p:spPr>
-          <a:xfrm>
-            <a:off x="1874520" y="3273552"/>
-            <a:ext cx="6903720" cy="658368"/>
-          </a:xfrm>
-          <a:prstGeom prst="rect">
-            <a:avLst>
-              <a:gd name="adj" fmla="val 8333"/>
-            </a:avLst>
-          </a:prstGeom>
-          <a:solidFill>
-            <a:srgbClr val="CCFBF1"/>
-          </a:solidFill>
-          <a:ln w="12700">
-            <a:solidFill>
-              <a:srgbClr val="0D9488"/>
-            </a:solidFill>
-            <a:prstDash val="solid"/>
-          </a:ln>
-        </p:spPr>
+              <a:t>u</a:t>
+            </a:r>
+            <a:endParaRPr lang="en-US" sz="1400" dirty="0"/>
+          </a:p>
+        </p:txBody>
+      </p:sp>
+      <p:sp>
+        <p:nvSpPr>
+          <p:cNvPr id="27" name="Text 25"/>
+          <p:cNvSpPr/>
+          <p:nvPr/>
+        </p:nvSpPr>
+        <p:spPr>
+          <a:xfrm>
+            <a:off x="3959352" y="3364992"/>
+            <a:ext cx="411480" cy="475488"/>
+          </a:xfrm>
+          <a:prstGeom prst="rect">
+            <a:avLst/>
+          </a:prstGeom>
+          <a:noFill/>
+          <a:ln/>
+        </p:spPr>
+        <p:txBody>
+          <a:bodyPr wrap="square" lIns="0" tIns="0" rIns="0" bIns="0" rtlCol="0" anchor="ctr"/>
+          <a:lstStyle/>
+          <a:p>
+            <a:pPr algn="ctr" indent="0" marL="0">
+              <a:buNone/>
+            </a:pPr>
+            <a:r>
+              <a:rPr lang="en-US" sz="1600" b="1" dirty="0">
+                <a:solidFill>
+                  <a:srgbClr val="0D9488"/>
+                </a:solidFill>
+                <a:latin typeface="Trebuchet MS" pitchFamily="34" charset="0"/>
+                <a:ea typeface="Trebuchet MS" pitchFamily="34" charset="-122"/>
+                <a:cs typeface="Trebuchet MS" pitchFamily="34" charset="-120"/>
+              </a:rPr>
+              <a:t>·</a:t>
+            </a:r>
+            <a:endParaRPr lang="en-US" sz="1600" dirty="0"/>
+          </a:p>
+        </p:txBody>
       </p:sp>
       <p:sp>
         <p:nvSpPr>
@@ -13901,8 +13751,8 @@
         </p:nvSpPr>
         <p:spPr>
           <a:xfrm>
-            <a:off x="1975104" y="3364992"/>
-            <a:ext cx="1554480" cy="475488"/>
+            <a:off x="4370832" y="3364992"/>
+            <a:ext cx="1645920" cy="475488"/>
           </a:xfrm>
           <a:prstGeom prst="rect">
             <a:avLst>
@@ -13928,8 +13778,8 @@
         </p:nvSpPr>
         <p:spPr>
           <a:xfrm>
-            <a:off x="1975104" y="3364992"/>
-            <a:ext cx="1554480" cy="475488"/>
+            <a:off x="4370832" y="3364992"/>
+            <a:ext cx="1645920" cy="475488"/>
           </a:xfrm>
           <a:prstGeom prst="rect">
             <a:avLst/>
@@ -13953,7 +13803,7 @@
                 <a:ea typeface="Trebuchet MS" pitchFamily="34" charset="-122"/>
                 <a:cs typeface="Trebuchet MS" pitchFamily="34" charset="-120"/>
               </a:rPr>
-              <a:t>u</a:t>
+              <a:t>ni</a:t>
             </a:r>
             <a:endParaRPr lang="en-US" sz="1400" dirty="0"/>
           </a:p>
@@ -13967,8 +13817,8 @@
         </p:nvSpPr>
         <p:spPr>
           <a:xfrm>
-            <a:off x="3529584" y="3364992"/>
-            <a:ext cx="73152" cy="475488"/>
+            <a:off x="6016752" y="3364992"/>
+            <a:ext cx="411480" cy="475488"/>
           </a:xfrm>
           <a:prstGeom prst="rect">
             <a:avLst/>
@@ -14006,8 +13856,8 @@
         </p:nvSpPr>
         <p:spPr>
           <a:xfrm>
-            <a:off x="3602736" y="3364992"/>
-            <a:ext cx="1554480" cy="475488"/>
+            <a:off x="6428232" y="3364992"/>
+            <a:ext cx="1645920" cy="475488"/>
           </a:xfrm>
           <a:prstGeom prst="rect">
             <a:avLst>
@@ -14033,8 +13883,8 @@
         </p:nvSpPr>
         <p:spPr>
           <a:xfrm>
-            <a:off x="3602736" y="3364992"/>
-            <a:ext cx="1554480" cy="475488"/>
+            <a:off x="6428232" y="3364992"/>
+            <a:ext cx="1645920" cy="475488"/>
           </a:xfrm>
           <a:prstGeom prst="rect">
             <a:avLst/>
@@ -14058,7 +13908,7 @@
                 <a:ea typeface="Trebuchet MS" pitchFamily="34" charset="-122"/>
                 <a:cs typeface="Trebuchet MS" pitchFamily="34" charset="-120"/>
               </a:rPr>
-              <a:t>ni</a:t>
+              <a:t>son</a:t>
             </a:r>
             <a:endParaRPr lang="en-US" sz="1400" dirty="0"/>
           </a:p>
@@ -14066,224 +13916,80 @@
       </p:sp>
       <p:sp>
         <p:nvSpPr>
-          <p:cNvPr id="33" name="Text 31"/>
-          <p:cNvSpPr/>
-          <p:nvPr/>
-        </p:nvSpPr>
-        <p:spPr>
-          <a:xfrm>
-            <a:off x="5157216" y="3364992"/>
-            <a:ext cx="73152" cy="475488"/>
-          </a:xfrm>
-          <a:prstGeom prst="rect">
-            <a:avLst/>
-          </a:prstGeom>
-          <a:noFill/>
-          <a:ln/>
-        </p:spPr>
-        <p:txBody>
-          <a:bodyPr wrap="square" lIns="0" tIns="0" rIns="0" bIns="0" rtlCol="0" anchor="ctr"/>
-          <a:lstStyle/>
-          <a:p>
-            <a:pPr algn="ctr" indent="0" marL="0">
-              <a:buNone/>
-            </a:pPr>
-            <a:r>
-              <a:rPr lang="en-US" sz="1600" b="1" dirty="0">
-                <a:solidFill>
-                  <a:srgbClr val="0D9488"/>
+          <p:cNvPr id="33" name="Shape 31"/>
+          <p:cNvSpPr/>
+          <p:nvPr/>
+        </p:nvSpPr>
+        <p:spPr>
+          <a:xfrm>
+            <a:off x="365760" y="4096512"/>
+            <a:ext cx="1371600" cy="804672"/>
+          </a:xfrm>
+          <a:prstGeom prst="rect">
+            <a:avLst>
+              <a:gd name="adj" fmla="val 6818"/>
+            </a:avLst>
+          </a:prstGeom>
+          <a:solidFill>
+            <a:srgbClr val="E2E8F0"/>
+          </a:solidFill>
+          <a:ln w="12700">
+            <a:solidFill>
+              <a:srgbClr val="E2E8F0"/>
+            </a:solidFill>
+            <a:prstDash val="solid"/>
+          </a:ln>
+        </p:spPr>
+      </p:sp>
+      <p:sp>
+        <p:nvSpPr>
+          <p:cNvPr id="34" name="Text 32"/>
+          <p:cNvSpPr/>
+          <p:nvPr/>
+        </p:nvSpPr>
+        <p:spPr>
+          <a:xfrm>
+            <a:off x="365760" y="4096512"/>
+            <a:ext cx="1371600" cy="804672"/>
+          </a:xfrm>
+          <a:prstGeom prst="rect">
+            <a:avLst/>
+          </a:prstGeom>
+          <a:noFill/>
+          <a:ln/>
+        </p:spPr>
+        <p:txBody>
+          <a:bodyPr wrap="square" lIns="0" tIns="0" rIns="0" bIns="0" rtlCol="0" anchor="ctr"/>
+          <a:lstStyle/>
+          <a:p>
+            <a:pPr algn="ctr" indent="0" marL="0">
+              <a:buNone/>
+            </a:pPr>
+            <a:r>
+              <a:rPr lang="en-US" sz="1100" b="1" dirty="0">
+                <a:solidFill>
+                  <a:srgbClr val="475569"/>
                 </a:solidFill>
                 <a:latin typeface="Trebuchet MS" pitchFamily="34" charset="0"/>
                 <a:ea typeface="Trebuchet MS" pitchFamily="34" charset="-122"/>
                 <a:cs typeface="Trebuchet MS" pitchFamily="34" charset="-120"/>
               </a:rPr>
-              <a:t>·</a:t>
-            </a:r>
-            <a:endParaRPr lang="en-US" sz="1600" dirty="0"/>
-          </a:p>
-        </p:txBody>
-      </p:sp>
-      <p:sp>
-        <p:nvSpPr>
-          <p:cNvPr id="34" name="Shape 32"/>
-          <p:cNvSpPr/>
-          <p:nvPr/>
-        </p:nvSpPr>
-        <p:spPr>
-          <a:xfrm>
-            <a:off x="5230368" y="3364992"/>
-            <a:ext cx="1554480" cy="475488"/>
-          </a:xfrm>
-          <a:prstGeom prst="rect">
-            <a:avLst>
-              <a:gd name="adj" fmla="val 9615"/>
-            </a:avLst>
-          </a:prstGeom>
-          <a:solidFill>
-            <a:srgbClr val="FFFFFF"/>
-          </a:solidFill>
-          <a:ln w="12700">
-            <a:solidFill>
-              <a:srgbClr val="0D9488"/>
-            </a:solidFill>
-            <a:prstDash val="solid"/>
-          </a:ln>
-        </p:spPr>
-      </p:sp>
-      <p:sp>
-        <p:nvSpPr>
-          <p:cNvPr id="35" name="Text 33"/>
-          <p:cNvSpPr/>
-          <p:nvPr/>
-        </p:nvSpPr>
-        <p:spPr>
-          <a:xfrm>
-            <a:off x="5230368" y="3364992"/>
-            <a:ext cx="1554480" cy="475488"/>
-          </a:xfrm>
-          <a:prstGeom prst="rect">
-            <a:avLst/>
-          </a:prstGeom>
-          <a:noFill/>
-          <a:ln/>
-        </p:spPr>
-        <p:txBody>
-          <a:bodyPr wrap="square" lIns="0" tIns="0" rIns="0" bIns="0" rtlCol="0" anchor="ctr"/>
-          <a:lstStyle/>
-          <a:p>
-            <a:pPr algn="ctr" indent="0" marL="0">
-              <a:buNone/>
-            </a:pPr>
-            <a:r>
-              <a:rPr lang="en-US" sz="1400" b="1" dirty="0">
-                <a:solidFill>
-                  <a:srgbClr val="0D9488"/>
-                </a:solidFill>
-                <a:latin typeface="Trebuchet MS" pitchFamily="34" charset="0"/>
-                <a:ea typeface="Trebuchet MS" pitchFamily="34" charset="-122"/>
-                <a:cs typeface="Trebuchet MS" pitchFamily="34" charset="-120"/>
-              </a:rPr>
-              <a:t>ver</a:t>
-            </a:r>
-            <a:endParaRPr lang="en-US" sz="1400" dirty="0"/>
-          </a:p>
-        </p:txBody>
-      </p:sp>
-      <p:sp>
-        <p:nvSpPr>
-          <p:cNvPr id="36" name="Text 34"/>
-          <p:cNvSpPr/>
-          <p:nvPr/>
-        </p:nvSpPr>
-        <p:spPr>
-          <a:xfrm>
-            <a:off x="6784848" y="3364992"/>
-            <a:ext cx="73152" cy="475488"/>
-          </a:xfrm>
-          <a:prstGeom prst="rect">
-            <a:avLst/>
-          </a:prstGeom>
-          <a:noFill/>
-          <a:ln/>
-        </p:spPr>
-        <p:txBody>
-          <a:bodyPr wrap="square" lIns="0" tIns="0" rIns="0" bIns="0" rtlCol="0" anchor="ctr"/>
-          <a:lstStyle/>
-          <a:p>
-            <a:pPr algn="ctr" indent="0" marL="0">
-              <a:buNone/>
-            </a:pPr>
-            <a:r>
-              <a:rPr lang="en-US" sz="1600" b="1" dirty="0">
-                <a:solidFill>
-                  <a:srgbClr val="0D9488"/>
-                </a:solidFill>
-                <a:latin typeface="Trebuchet MS" pitchFamily="34" charset="0"/>
-                <a:ea typeface="Trebuchet MS" pitchFamily="34" charset="-122"/>
-                <a:cs typeface="Trebuchet MS" pitchFamily="34" charset="-120"/>
-              </a:rPr>
-              <a:t>·</a:t>
-            </a:r>
-            <a:endParaRPr lang="en-US" sz="1600" dirty="0"/>
-          </a:p>
-        </p:txBody>
-      </p:sp>
-      <p:sp>
-        <p:nvSpPr>
-          <p:cNvPr id="37" name="Shape 35"/>
-          <p:cNvSpPr/>
-          <p:nvPr/>
-        </p:nvSpPr>
-        <p:spPr>
-          <a:xfrm>
-            <a:off x="6858000" y="3364992"/>
-            <a:ext cx="1554480" cy="475488"/>
-          </a:xfrm>
-          <a:prstGeom prst="rect">
-            <a:avLst>
-              <a:gd name="adj" fmla="val 9615"/>
-            </a:avLst>
-          </a:prstGeom>
-          <a:solidFill>
-            <a:srgbClr val="FFFFFF"/>
-          </a:solidFill>
-          <a:ln w="12700">
-            <a:solidFill>
-              <a:srgbClr val="0D9488"/>
-            </a:solidFill>
-            <a:prstDash val="solid"/>
-          </a:ln>
-        </p:spPr>
-      </p:sp>
-      <p:sp>
-        <p:nvSpPr>
-          <p:cNvPr id="38" name="Text 36"/>
-          <p:cNvSpPr/>
-          <p:nvPr/>
-        </p:nvSpPr>
-        <p:spPr>
-          <a:xfrm>
-            <a:off x="6858000" y="3364992"/>
-            <a:ext cx="1554480" cy="475488"/>
-          </a:xfrm>
-          <a:prstGeom prst="rect">
-            <a:avLst/>
-          </a:prstGeom>
-          <a:noFill/>
-          <a:ln/>
-        </p:spPr>
-        <p:txBody>
-          <a:bodyPr wrap="square" lIns="0" tIns="0" rIns="0" bIns="0" rtlCol="0" anchor="ctr"/>
-          <a:lstStyle/>
-          <a:p>
-            <a:pPr algn="ctr" indent="0" marL="0">
-              <a:buNone/>
-            </a:pPr>
-            <a:r>
-              <a:rPr lang="en-US" sz="1400" b="1" dirty="0">
-                <a:solidFill>
-                  <a:srgbClr val="0D9488"/>
-                </a:solidFill>
-                <a:latin typeface="Trebuchet MS" pitchFamily="34" charset="0"/>
-                <a:ea typeface="Trebuchet MS" pitchFamily="34" charset="-122"/>
-                <a:cs typeface="Trebuchet MS" pitchFamily="34" charset="-120"/>
-              </a:rPr>
-              <a:t>sal</a:t>
-            </a:r>
-            <a:endParaRPr lang="en-US" sz="1400" dirty="0"/>
-          </a:p>
-        </p:txBody>
-      </p:sp>
-      <p:sp>
-        <p:nvSpPr>
-          <p:cNvPr id="39" name="Shape 37"/>
-          <p:cNvSpPr/>
-          <p:nvPr/>
-        </p:nvSpPr>
-        <p:spPr>
-          <a:xfrm>
-            <a:off x="365760" y="4096512"/>
-            <a:ext cx="1371600" cy="804672"/>
+              <a:t>Phonemes</a:t>
+            </a:r>
+            <a:endParaRPr lang="en-US" sz="1100" dirty="0"/>
+          </a:p>
+        </p:txBody>
+      </p:sp>
+      <p:sp>
+        <p:nvSpPr>
+          <p:cNvPr id="35" name="Shape 33"/>
+          <p:cNvSpPr/>
+          <p:nvPr/>
+        </p:nvSpPr>
+        <p:spPr>
+          <a:xfrm>
+            <a:off x="1874520" y="4096512"/>
+            <a:ext cx="6903720" cy="804672"/>
           </a:xfrm>
           <a:prstGeom prst="rect">
             <a:avLst>
@@ -14291,85 +13997,19 @@
             </a:avLst>
           </a:prstGeom>
           <a:solidFill>
-            <a:srgbClr val="E2E8F0"/>
+            <a:srgbClr val="F8FAFC"/>
           </a:solidFill>
           <a:ln w="12700">
             <a:solidFill>
               <a:srgbClr val="E2E8F0"/>
             </a:solidFill>
-            <a:prstDash val="solid"/>
-          </a:ln>
-        </p:spPr>
-      </p:sp>
-      <p:sp>
-        <p:nvSpPr>
-          <p:cNvPr id="40" name="Text 38"/>
-          <p:cNvSpPr/>
-          <p:nvPr/>
-        </p:nvSpPr>
-        <p:spPr>
-          <a:xfrm>
-            <a:off x="365760" y="4096512"/>
-            <a:ext cx="1371600" cy="804672"/>
-          </a:xfrm>
-          <a:prstGeom prst="rect">
-            <a:avLst/>
-          </a:prstGeom>
-          <a:noFill/>
-          <a:ln/>
-        </p:spPr>
-        <p:txBody>
-          <a:bodyPr wrap="square" lIns="0" tIns="0" rIns="0" bIns="0" rtlCol="0" anchor="ctr"/>
-          <a:lstStyle/>
-          <a:p>
-            <a:pPr algn="ctr" indent="0" marL="0">
-              <a:buNone/>
-            </a:pPr>
-            <a:r>
-              <a:rPr lang="en-US" sz="1100" b="1" dirty="0">
-                <a:solidFill>
-                  <a:srgbClr val="475569"/>
-                </a:solidFill>
-                <a:latin typeface="Trebuchet MS" pitchFamily="34" charset="0"/>
-                <a:ea typeface="Trebuchet MS" pitchFamily="34" charset="-122"/>
-                <a:cs typeface="Trebuchet MS" pitchFamily="34" charset="-120"/>
-              </a:rPr>
-              <a:t>Phonemes</a:t>
-            </a:r>
-            <a:endParaRPr lang="en-US" sz="1100" dirty="0"/>
-          </a:p>
-        </p:txBody>
-      </p:sp>
-      <p:sp>
-        <p:nvSpPr>
-          <p:cNvPr id="41" name="Shape 39"/>
-          <p:cNvSpPr/>
-          <p:nvPr/>
-        </p:nvSpPr>
-        <p:spPr>
-          <a:xfrm>
-            <a:off x="1874520" y="4096512"/>
-            <a:ext cx="6903720" cy="804672"/>
-          </a:xfrm>
-          <a:prstGeom prst="rect">
-            <a:avLst>
-              <a:gd name="adj" fmla="val 6818"/>
-            </a:avLst>
-          </a:prstGeom>
-          <a:solidFill>
-            <a:srgbClr val="F8FAFC"/>
-          </a:solidFill>
-          <a:ln w="12700">
-            <a:solidFill>
-              <a:srgbClr val="E2E8F0"/>
-            </a:solidFill>
             <a:prstDash val="dash"/>
           </a:ln>
         </p:spPr>
       </p:sp>
       <p:sp>
         <p:nvSpPr>
-          <p:cNvPr id="42" name="Text 40"/>
+          <p:cNvPr id="36" name="Text 34"/>
           <p:cNvSpPr/>
           <p:nvPr/>
         </p:nvSpPr>
@@ -15096,7 +14736,7 @@
                 <a:ea typeface="Trebuchet MS" pitchFamily="34" charset="-122"/>
                 <a:cs typeface="Trebuchet MS" pitchFamily="34" charset="-120"/>
               </a:rPr>
-              <a:t>universal</a:t>
+              <a:t>unison</a:t>
             </a:r>
             <a:endParaRPr lang="en-US" sz="2800" dirty="0"/>
           </a:p>
@@ -15176,7 +14816,7 @@
         </p:nvSpPr>
         <p:spPr>
           <a:xfrm>
-            <a:off x="2221992" y="2258568"/>
+            <a:off x="2938272" y="2258568"/>
             <a:ext cx="1828800" cy="292608"/>
           </a:xfrm>
           <a:prstGeom prst="rect">
@@ -15210,7 +14850,7 @@
         </p:nvSpPr>
         <p:spPr>
           <a:xfrm>
-            <a:off x="2221992" y="2258568"/>
+            <a:off x="2938272" y="2258568"/>
             <a:ext cx="1828800" cy="292608"/>
           </a:xfrm>
           <a:prstGeom prst="rect">
@@ -15249,7 +14889,7 @@
         </p:nvSpPr>
         <p:spPr>
           <a:xfrm>
-            <a:off x="2221992" y="2569464"/>
+            <a:off x="2938272" y="2569464"/>
             <a:ext cx="1828800" cy="201168"/>
           </a:xfrm>
           <a:prstGeom prst="rect">
@@ -15288,7 +14928,7 @@
         </p:nvSpPr>
         <p:spPr>
           <a:xfrm>
-            <a:off x="4370832" y="2258568"/>
+            <a:off x="5803392" y="2258568"/>
             <a:ext cx="1828800" cy="292608"/>
           </a:xfrm>
           <a:prstGeom prst="rect">
@@ -15322,7 +14962,7 @@
         </p:nvSpPr>
         <p:spPr>
           <a:xfrm>
-            <a:off x="4370832" y="2258568"/>
+            <a:off x="5803392" y="2258568"/>
             <a:ext cx="1828800" cy="292608"/>
           </a:xfrm>
           <a:prstGeom prst="rect">
@@ -15347,7 +14987,7 @@
                 <a:ea typeface="Trebuchet MS" pitchFamily="34" charset="-122"/>
                 <a:cs typeface="Trebuchet MS" pitchFamily="34" charset="-120"/>
               </a:rPr>
-              <a:t>verse</a:t>
+              <a:t>son</a:t>
             </a:r>
             <a:endParaRPr lang="en-US" sz="1300" dirty="0"/>
           </a:p>
@@ -15361,7 +15001,7 @@
         </p:nvSpPr>
         <p:spPr>
           <a:xfrm>
-            <a:off x="4370832" y="2569464"/>
+            <a:off x="5803392" y="2569464"/>
             <a:ext cx="1828800" cy="201168"/>
           </a:xfrm>
           <a:prstGeom prst="rect">
@@ -15386,7 +15026,7 @@
                 <a:ea typeface="Calibri" pitchFamily="34" charset="-122"/>
                 <a:cs typeface="Calibri" pitchFamily="34" charset="-120"/>
               </a:rPr>
-              <a:t>to turn</a:t>
+              <a:t>sound</a:t>
             </a:r>
             <a:endParaRPr lang="en-US" sz="850" dirty="0"/>
           </a:p>
@@ -15400,30 +15040,23 @@
         </p:nvSpPr>
         <p:spPr>
           <a:xfrm>
-            <a:off x="6519672" y="2258568"/>
-            <a:ext cx="1828800" cy="292608"/>
+            <a:off x="365760" y="3273552"/>
+            <a:ext cx="1371600" cy="658368"/>
           </a:xfrm>
           <a:prstGeom prst="rect">
             <a:avLst>
-              <a:gd name="adj" fmla="val 25000"/>
+              <a:gd name="adj" fmla="val 8333"/>
             </a:avLst>
           </a:prstGeom>
           <a:solidFill>
-            <a:srgbClr val="FCE7F3"/>
-          </a:solidFill>
-          <a:ln w="19050">
-            <a:solidFill>
-              <a:srgbClr val="DB2777"/>
-            </a:solidFill>
-            <a:prstDash val="solid"/>
-          </a:ln>
-          <a:effectLst>
-            <a:outerShdw sx="100000" sy="100000" kx="0" ky="0" algn="bl" rotWithShape="0" blurRad="101600" dist="38100" dir="8100000">
-              <a:srgbClr val="000000">
-                <a:alpha val="12000"/>
-              </a:srgbClr>
-            </a:outerShdw>
-          </a:effectLst>
+            <a:srgbClr val="E2E8F0"/>
+          </a:solidFill>
+          <a:ln w="12700">
+            <a:solidFill>
+              <a:srgbClr val="E2E8F0"/>
+            </a:solidFill>
+            <a:prstDash val="solid"/>
+          </a:ln>
         </p:spPr>
       </p:sp>
       <p:sp>
@@ -15434,86 +15067,47 @@
         </p:nvSpPr>
         <p:spPr>
           <a:xfrm>
-            <a:off x="6519672" y="2258568"/>
-            <a:ext cx="1828800" cy="292608"/>
-          </a:xfrm>
-          <a:prstGeom prst="rect">
-            <a:avLst/>
-          </a:prstGeom>
-          <a:noFill/>
-          <a:ln/>
-        </p:spPr>
-        <p:txBody>
-          <a:bodyPr wrap="square" lIns="0" tIns="0" rIns="0" bIns="0" rtlCol="0" anchor="ctr"/>
-          <a:lstStyle/>
-          <a:p>
-            <a:pPr algn="ctr" indent="0" marL="0">
-              <a:buNone/>
-            </a:pPr>
-            <a:r>
-              <a:rPr lang="en-US" sz="1300" b="1" dirty="0">
-                <a:solidFill>
-                  <a:srgbClr val="9D174D"/>
+            <a:off x="365760" y="3273552"/>
+            <a:ext cx="1371600" cy="658368"/>
+          </a:xfrm>
+          <a:prstGeom prst="rect">
+            <a:avLst/>
+          </a:prstGeom>
+          <a:noFill/>
+          <a:ln/>
+        </p:spPr>
+        <p:txBody>
+          <a:bodyPr wrap="square" lIns="0" tIns="0" rIns="0" bIns="0" rtlCol="0" anchor="ctr"/>
+          <a:lstStyle/>
+          <a:p>
+            <a:pPr algn="ctr" indent="0" marL="0">
+              <a:buNone/>
+            </a:pPr>
+            <a:r>
+              <a:rPr lang="en-US" sz="1100" b="1" dirty="0">
+                <a:solidFill>
+                  <a:srgbClr val="475569"/>
                 </a:solidFill>
                 <a:latin typeface="Trebuchet MS" pitchFamily="34" charset="0"/>
                 <a:ea typeface="Trebuchet MS" pitchFamily="34" charset="-122"/>
                 <a:cs typeface="Trebuchet MS" pitchFamily="34" charset="-120"/>
               </a:rPr>
-              <a:t>al</a:t>
-            </a:r>
-            <a:endParaRPr lang="en-US" sz="1300" dirty="0"/>
-          </a:p>
-        </p:txBody>
-      </p:sp>
-      <p:sp>
-        <p:nvSpPr>
-          <p:cNvPr id="24" name="Text 22"/>
-          <p:cNvSpPr/>
-          <p:nvPr/>
-        </p:nvSpPr>
-        <p:spPr>
-          <a:xfrm>
-            <a:off x="6519672" y="2569464"/>
-            <a:ext cx="1828800" cy="201168"/>
-          </a:xfrm>
-          <a:prstGeom prst="rect">
-            <a:avLst/>
-          </a:prstGeom>
-          <a:noFill/>
-          <a:ln/>
-        </p:spPr>
-        <p:txBody>
-          <a:bodyPr wrap="square" lIns="0" tIns="0" rIns="0" bIns="0" rtlCol="0" anchor="t"/>
-          <a:lstStyle/>
-          <a:p>
-            <a:pPr algn="ctr" indent="0" marL="0">
-              <a:buNone/>
-            </a:pPr>
-            <a:r>
-              <a:rPr lang="en-US" sz="850" dirty="0">
-                <a:solidFill>
-                  <a:srgbClr val="475569"/>
-                </a:solidFill>
-                <a:latin typeface="Calibri" pitchFamily="34" charset="0"/>
-                <a:ea typeface="Calibri" pitchFamily="34" charset="-122"/>
-                <a:cs typeface="Calibri" pitchFamily="34" charset="-120"/>
-              </a:rPr>
-              <a:t>relating to</a:t>
-            </a:r>
-            <a:endParaRPr lang="en-US" sz="850" dirty="0"/>
-          </a:p>
-        </p:txBody>
-      </p:sp>
-      <p:sp>
-        <p:nvSpPr>
-          <p:cNvPr id="25" name="Shape 23"/>
-          <p:cNvSpPr/>
-          <p:nvPr/>
-        </p:nvSpPr>
-        <p:spPr>
-          <a:xfrm>
-            <a:off x="365760" y="3273552"/>
-            <a:ext cx="1371600" cy="658368"/>
+              <a:t>Syllables</a:t>
+            </a:r>
+            <a:endParaRPr lang="en-US" sz="1100" dirty="0"/>
+          </a:p>
+        </p:txBody>
+      </p:sp>
+      <p:sp>
+        <p:nvSpPr>
+          <p:cNvPr id="24" name="Shape 22"/>
+          <p:cNvSpPr/>
+          <p:nvPr/>
+        </p:nvSpPr>
+        <p:spPr>
+          <a:xfrm>
+            <a:off x="1874520" y="3273552"/>
+            <a:ext cx="6903720" cy="658368"/>
           </a:xfrm>
           <a:prstGeom prst="rect">
             <a:avLst>
@@ -15521,11 +15115,38 @@
             </a:avLst>
           </a:prstGeom>
           <a:solidFill>
-            <a:srgbClr val="E2E8F0"/>
-          </a:solidFill>
-          <a:ln w="12700">
-            <a:solidFill>
-              <a:srgbClr val="E2E8F0"/>
+            <a:srgbClr val="CCFBF1"/>
+          </a:solidFill>
+          <a:ln w="12700">
+            <a:solidFill>
+              <a:srgbClr val="0D9488"/>
+            </a:solidFill>
+            <a:prstDash val="solid"/>
+          </a:ln>
+        </p:spPr>
+      </p:sp>
+      <p:sp>
+        <p:nvSpPr>
+          <p:cNvPr id="25" name="Shape 23"/>
+          <p:cNvSpPr/>
+          <p:nvPr/>
+        </p:nvSpPr>
+        <p:spPr>
+          <a:xfrm>
+            <a:off x="2313432" y="3364992"/>
+            <a:ext cx="1645920" cy="475488"/>
+          </a:xfrm>
+          <a:prstGeom prst="rect">
+            <a:avLst>
+              <a:gd name="adj" fmla="val 9615"/>
+            </a:avLst>
+          </a:prstGeom>
+          <a:solidFill>
+            <a:srgbClr val="FFFFFF"/>
+          </a:solidFill>
+          <a:ln w="12700">
+            <a:solidFill>
+              <a:srgbClr val="0D9488"/>
             </a:solidFill>
             <a:prstDash val="solid"/>
           </a:ln>
@@ -15539,32 +15160,308 @@
         </p:nvSpPr>
         <p:spPr>
           <a:xfrm>
-            <a:off x="365760" y="3273552"/>
-            <a:ext cx="1371600" cy="658368"/>
-          </a:xfrm>
-          <a:prstGeom prst="rect">
-            <a:avLst/>
-          </a:prstGeom>
-          <a:noFill/>
-          <a:ln/>
-        </p:spPr>
-        <p:txBody>
-          <a:bodyPr wrap="square" lIns="0" tIns="0" rIns="0" bIns="0" rtlCol="0" anchor="ctr"/>
-          <a:lstStyle/>
-          <a:p>
-            <a:pPr algn="ctr" indent="0" marL="0">
-              <a:buNone/>
-            </a:pPr>
-            <a:r>
-              <a:rPr lang="en-US" sz="1100" b="1" dirty="0">
-                <a:solidFill>
-                  <a:srgbClr val="475569"/>
+            <a:off x="2313432" y="3364992"/>
+            <a:ext cx="1645920" cy="475488"/>
+          </a:xfrm>
+          <a:prstGeom prst="rect">
+            <a:avLst/>
+          </a:prstGeom>
+          <a:noFill/>
+          <a:ln/>
+        </p:spPr>
+        <p:txBody>
+          <a:bodyPr wrap="square" lIns="0" tIns="0" rIns="0" bIns="0" rtlCol="0" anchor="ctr"/>
+          <a:lstStyle/>
+          <a:p>
+            <a:pPr algn="ctr" indent="0" marL="0">
+              <a:buNone/>
+            </a:pPr>
+            <a:r>
+              <a:rPr lang="en-US" sz="1400" b="1" dirty="0">
+                <a:solidFill>
+                  <a:srgbClr val="0D9488"/>
                 </a:solidFill>
                 <a:latin typeface="Trebuchet MS" pitchFamily="34" charset="0"/>
                 <a:ea typeface="Trebuchet MS" pitchFamily="34" charset="-122"/>
                 <a:cs typeface="Trebuchet MS" pitchFamily="34" charset="-120"/>
               </a:rPr>
-              <a:t>Syllables</a:t>
+              <a:t>u</a:t>
+            </a:r>
+            <a:endParaRPr lang="en-US" sz="1400" dirty="0"/>
+          </a:p>
+        </p:txBody>
+      </p:sp>
+      <p:sp>
+        <p:nvSpPr>
+          <p:cNvPr id="27" name="Text 25"/>
+          <p:cNvSpPr/>
+          <p:nvPr/>
+        </p:nvSpPr>
+        <p:spPr>
+          <a:xfrm>
+            <a:off x="3959352" y="3364992"/>
+            <a:ext cx="411480" cy="475488"/>
+          </a:xfrm>
+          <a:prstGeom prst="rect">
+            <a:avLst/>
+          </a:prstGeom>
+          <a:noFill/>
+          <a:ln/>
+        </p:spPr>
+        <p:txBody>
+          <a:bodyPr wrap="square" lIns="0" tIns="0" rIns="0" bIns="0" rtlCol="0" anchor="ctr"/>
+          <a:lstStyle/>
+          <a:p>
+            <a:pPr algn="ctr" indent="0" marL="0">
+              <a:buNone/>
+            </a:pPr>
+            <a:r>
+              <a:rPr lang="en-US" sz="1600" b="1" dirty="0">
+                <a:solidFill>
+                  <a:srgbClr val="0D9488"/>
+                </a:solidFill>
+                <a:latin typeface="Trebuchet MS" pitchFamily="34" charset="0"/>
+                <a:ea typeface="Trebuchet MS" pitchFamily="34" charset="-122"/>
+                <a:cs typeface="Trebuchet MS" pitchFamily="34" charset="-120"/>
+              </a:rPr>
+              <a:t>·</a:t>
+            </a:r>
+            <a:endParaRPr lang="en-US" sz="1600" dirty="0"/>
+          </a:p>
+        </p:txBody>
+      </p:sp>
+      <p:sp>
+        <p:nvSpPr>
+          <p:cNvPr id="28" name="Shape 26"/>
+          <p:cNvSpPr/>
+          <p:nvPr/>
+        </p:nvSpPr>
+        <p:spPr>
+          <a:xfrm>
+            <a:off x="4370832" y="3364992"/>
+            <a:ext cx="1645920" cy="475488"/>
+          </a:xfrm>
+          <a:prstGeom prst="rect">
+            <a:avLst>
+              <a:gd name="adj" fmla="val 9615"/>
+            </a:avLst>
+          </a:prstGeom>
+          <a:solidFill>
+            <a:srgbClr val="FFFFFF"/>
+          </a:solidFill>
+          <a:ln w="12700">
+            <a:solidFill>
+              <a:srgbClr val="0D9488"/>
+            </a:solidFill>
+            <a:prstDash val="solid"/>
+          </a:ln>
+        </p:spPr>
+      </p:sp>
+      <p:sp>
+        <p:nvSpPr>
+          <p:cNvPr id="29" name="Text 27"/>
+          <p:cNvSpPr/>
+          <p:nvPr/>
+        </p:nvSpPr>
+        <p:spPr>
+          <a:xfrm>
+            <a:off x="4370832" y="3364992"/>
+            <a:ext cx="1645920" cy="475488"/>
+          </a:xfrm>
+          <a:prstGeom prst="rect">
+            <a:avLst/>
+          </a:prstGeom>
+          <a:noFill/>
+          <a:ln/>
+        </p:spPr>
+        <p:txBody>
+          <a:bodyPr wrap="square" lIns="0" tIns="0" rIns="0" bIns="0" rtlCol="0" anchor="ctr"/>
+          <a:lstStyle/>
+          <a:p>
+            <a:pPr algn="ctr" indent="0" marL="0">
+              <a:buNone/>
+            </a:pPr>
+            <a:r>
+              <a:rPr lang="en-US" sz="1400" b="1" dirty="0">
+                <a:solidFill>
+                  <a:srgbClr val="0D9488"/>
+                </a:solidFill>
+                <a:latin typeface="Trebuchet MS" pitchFamily="34" charset="0"/>
+                <a:ea typeface="Trebuchet MS" pitchFamily="34" charset="-122"/>
+                <a:cs typeface="Trebuchet MS" pitchFamily="34" charset="-120"/>
+              </a:rPr>
+              <a:t>ni</a:t>
+            </a:r>
+            <a:endParaRPr lang="en-US" sz="1400" dirty="0"/>
+          </a:p>
+        </p:txBody>
+      </p:sp>
+      <p:sp>
+        <p:nvSpPr>
+          <p:cNvPr id="30" name="Text 28"/>
+          <p:cNvSpPr/>
+          <p:nvPr/>
+        </p:nvSpPr>
+        <p:spPr>
+          <a:xfrm>
+            <a:off x="6016752" y="3364992"/>
+            <a:ext cx="411480" cy="475488"/>
+          </a:xfrm>
+          <a:prstGeom prst="rect">
+            <a:avLst/>
+          </a:prstGeom>
+          <a:noFill/>
+          <a:ln/>
+        </p:spPr>
+        <p:txBody>
+          <a:bodyPr wrap="square" lIns="0" tIns="0" rIns="0" bIns="0" rtlCol="0" anchor="ctr"/>
+          <a:lstStyle/>
+          <a:p>
+            <a:pPr algn="ctr" indent="0" marL="0">
+              <a:buNone/>
+            </a:pPr>
+            <a:r>
+              <a:rPr lang="en-US" sz="1600" b="1" dirty="0">
+                <a:solidFill>
+                  <a:srgbClr val="0D9488"/>
+                </a:solidFill>
+                <a:latin typeface="Trebuchet MS" pitchFamily="34" charset="0"/>
+                <a:ea typeface="Trebuchet MS" pitchFamily="34" charset="-122"/>
+                <a:cs typeface="Trebuchet MS" pitchFamily="34" charset="-120"/>
+              </a:rPr>
+              <a:t>·</a:t>
+            </a:r>
+            <a:endParaRPr lang="en-US" sz="1600" dirty="0"/>
+          </a:p>
+        </p:txBody>
+      </p:sp>
+      <p:sp>
+        <p:nvSpPr>
+          <p:cNvPr id="31" name="Shape 29"/>
+          <p:cNvSpPr/>
+          <p:nvPr/>
+        </p:nvSpPr>
+        <p:spPr>
+          <a:xfrm>
+            <a:off x="6428232" y="3364992"/>
+            <a:ext cx="1645920" cy="475488"/>
+          </a:xfrm>
+          <a:prstGeom prst="rect">
+            <a:avLst>
+              <a:gd name="adj" fmla="val 9615"/>
+            </a:avLst>
+          </a:prstGeom>
+          <a:solidFill>
+            <a:srgbClr val="FFFFFF"/>
+          </a:solidFill>
+          <a:ln w="12700">
+            <a:solidFill>
+              <a:srgbClr val="0D9488"/>
+            </a:solidFill>
+            <a:prstDash val="solid"/>
+          </a:ln>
+        </p:spPr>
+      </p:sp>
+      <p:sp>
+        <p:nvSpPr>
+          <p:cNvPr id="32" name="Text 30"/>
+          <p:cNvSpPr/>
+          <p:nvPr/>
+        </p:nvSpPr>
+        <p:spPr>
+          <a:xfrm>
+            <a:off x="6428232" y="3364992"/>
+            <a:ext cx="1645920" cy="475488"/>
+          </a:xfrm>
+          <a:prstGeom prst="rect">
+            <a:avLst/>
+          </a:prstGeom>
+          <a:noFill/>
+          <a:ln/>
+        </p:spPr>
+        <p:txBody>
+          <a:bodyPr wrap="square" lIns="0" tIns="0" rIns="0" bIns="0" rtlCol="0" anchor="ctr"/>
+          <a:lstStyle/>
+          <a:p>
+            <a:pPr algn="ctr" indent="0" marL="0">
+              <a:buNone/>
+            </a:pPr>
+            <a:r>
+              <a:rPr lang="en-US" sz="1400" b="1" dirty="0">
+                <a:solidFill>
+                  <a:srgbClr val="0D9488"/>
+                </a:solidFill>
+                <a:latin typeface="Trebuchet MS" pitchFamily="34" charset="0"/>
+                <a:ea typeface="Trebuchet MS" pitchFamily="34" charset="-122"/>
+                <a:cs typeface="Trebuchet MS" pitchFamily="34" charset="-120"/>
+              </a:rPr>
+              <a:t>son</a:t>
+            </a:r>
+            <a:endParaRPr lang="en-US" sz="1400" dirty="0"/>
+          </a:p>
+        </p:txBody>
+      </p:sp>
+      <p:sp>
+        <p:nvSpPr>
+          <p:cNvPr id="33" name="Shape 31"/>
+          <p:cNvSpPr/>
+          <p:nvPr/>
+        </p:nvSpPr>
+        <p:spPr>
+          <a:xfrm>
+            <a:off x="365760" y="4096512"/>
+            <a:ext cx="1371600" cy="804672"/>
+          </a:xfrm>
+          <a:prstGeom prst="rect">
+            <a:avLst>
+              <a:gd name="adj" fmla="val 6818"/>
+            </a:avLst>
+          </a:prstGeom>
+          <a:solidFill>
+            <a:srgbClr val="E2E8F0"/>
+          </a:solidFill>
+          <a:ln w="12700">
+            <a:solidFill>
+              <a:srgbClr val="E2E8F0"/>
+            </a:solidFill>
+            <a:prstDash val="solid"/>
+          </a:ln>
+        </p:spPr>
+      </p:sp>
+      <p:sp>
+        <p:nvSpPr>
+          <p:cNvPr id="34" name="Text 32"/>
+          <p:cNvSpPr/>
+          <p:nvPr/>
+        </p:nvSpPr>
+        <p:spPr>
+          <a:xfrm>
+            <a:off x="365760" y="4096512"/>
+            <a:ext cx="1371600" cy="804672"/>
+          </a:xfrm>
+          <a:prstGeom prst="rect">
+            <a:avLst/>
+          </a:prstGeom>
+          <a:noFill/>
+          <a:ln/>
+        </p:spPr>
+        <p:txBody>
+          <a:bodyPr wrap="square" lIns="0" tIns="0" rIns="0" bIns="0" rtlCol="0" anchor="ctr"/>
+          <a:lstStyle/>
+          <a:p>
+            <a:pPr algn="ctr" indent="0" marL="0">
+              <a:buNone/>
+            </a:pPr>
+            <a:r>
+              <a:rPr lang="en-US" sz="1100" b="1" dirty="0">
+                <a:solidFill>
+                  <a:srgbClr val="475569"/>
+                </a:solidFill>
+                <a:latin typeface="Trebuchet MS" pitchFamily="34" charset="0"/>
+                <a:ea typeface="Trebuchet MS" pitchFamily="34" charset="-122"/>
+                <a:cs typeface="Trebuchet MS" pitchFamily="34" charset="-120"/>
+              </a:rPr>
+              <a:t>Phonemes</a:t>
             </a:r>
             <a:endParaRPr lang="en-US" sz="1100" dirty="0"/>
           </a:p>
@@ -15572,13 +15469,13 @@
       </p:sp>
       <p:sp>
         <p:nvSpPr>
-          <p:cNvPr id="27" name="Shape 25"/>
-          <p:cNvSpPr/>
-          <p:nvPr/>
-        </p:nvSpPr>
-        <p:spPr>
-          <a:xfrm>
-            <a:off x="1874520" y="3273552"/>
+          <p:cNvPr id="35" name="Shape 33"/>
+          <p:cNvSpPr/>
+          <p:nvPr/>
+        </p:nvSpPr>
+        <p:spPr>
+          <a:xfrm>
+            <a:off x="1874520" y="4096512"/>
             <a:ext cx="6903720" cy="658368"/>
           </a:xfrm>
           <a:prstGeom prst="rect">
@@ -15587,30 +15484,30 @@
             </a:avLst>
           </a:prstGeom>
           <a:solidFill>
-            <a:srgbClr val="CCFBF1"/>
-          </a:solidFill>
-          <a:ln w="12700">
-            <a:solidFill>
-              <a:srgbClr val="0D9488"/>
-            </a:solidFill>
-            <a:prstDash val="solid"/>
-          </a:ln>
-        </p:spPr>
-      </p:sp>
-      <p:sp>
-        <p:nvSpPr>
-          <p:cNvPr id="28" name="Shape 26"/>
-          <p:cNvSpPr/>
-          <p:nvPr/>
-        </p:nvSpPr>
-        <p:spPr>
-          <a:xfrm>
-            <a:off x="1975104" y="3364992"/>
-            <a:ext cx="1554480" cy="475488"/>
+            <a:srgbClr val="FCE7F3"/>
+          </a:solidFill>
+          <a:ln w="12700">
+            <a:solidFill>
+              <a:srgbClr val="DB2777"/>
+            </a:solidFill>
+            <a:prstDash val="solid"/>
+          </a:ln>
+        </p:spPr>
+      </p:sp>
+      <p:sp>
+        <p:nvSpPr>
+          <p:cNvPr id="36" name="Shape 34"/>
+          <p:cNvSpPr/>
+          <p:nvPr/>
+        </p:nvSpPr>
+        <p:spPr>
+          <a:xfrm>
+            <a:off x="2254649" y="4169664"/>
+            <a:ext cx="685800" cy="475488"/>
           </a:xfrm>
           <a:prstGeom prst="rect">
             <a:avLst>
-              <a:gd name="adj" fmla="val 9615"/>
+              <a:gd name="adj" fmla="val 7692"/>
             </a:avLst>
           </a:prstGeom>
           <a:solidFill>
@@ -15618,40 +15515,40 @@
           </a:solidFill>
           <a:ln w="12700">
             <a:solidFill>
-              <a:srgbClr val="0D9488"/>
-            </a:solidFill>
-            <a:prstDash val="solid"/>
-          </a:ln>
-        </p:spPr>
-      </p:sp>
-      <p:sp>
-        <p:nvSpPr>
-          <p:cNvPr id="29" name="Text 27"/>
-          <p:cNvSpPr/>
-          <p:nvPr/>
-        </p:nvSpPr>
-        <p:spPr>
-          <a:xfrm>
-            <a:off x="1975104" y="3364992"/>
-            <a:ext cx="1554480" cy="475488"/>
-          </a:xfrm>
-          <a:prstGeom prst="rect">
-            <a:avLst/>
-          </a:prstGeom>
-          <a:noFill/>
-          <a:ln/>
-        </p:spPr>
-        <p:txBody>
-          <a:bodyPr wrap="square" lIns="0" tIns="0" rIns="0" bIns="0" rtlCol="0" anchor="ctr"/>
-          <a:lstStyle/>
-          <a:p>
-            <a:pPr algn="ctr" indent="0" marL="0">
-              <a:buNone/>
-            </a:pPr>
-            <a:r>
-              <a:rPr lang="en-US" sz="1400" b="1" dirty="0">
-                <a:solidFill>
-                  <a:srgbClr val="0D9488"/>
+              <a:srgbClr val="DB2777"/>
+            </a:solidFill>
+            <a:prstDash val="solid"/>
+          </a:ln>
+        </p:spPr>
+      </p:sp>
+      <p:sp>
+        <p:nvSpPr>
+          <p:cNvPr id="37" name="Text 35"/>
+          <p:cNvSpPr/>
+          <p:nvPr/>
+        </p:nvSpPr>
+        <p:spPr>
+          <a:xfrm>
+            <a:off x="2254649" y="4169664"/>
+            <a:ext cx="685800" cy="475488"/>
+          </a:xfrm>
+          <a:prstGeom prst="rect">
+            <a:avLst/>
+          </a:prstGeom>
+          <a:noFill/>
+          <a:ln/>
+        </p:spPr>
+        <p:txBody>
+          <a:bodyPr wrap="square" lIns="0" tIns="0" rIns="0" bIns="0" rtlCol="0" anchor="ctr"/>
+          <a:lstStyle/>
+          <a:p>
+            <a:pPr algn="ctr" indent="0" marL="0">
+              <a:buNone/>
+            </a:pPr>
+            <a:r>
+              <a:rPr lang="en-US" sz="900" b="1" dirty="0">
+                <a:solidFill>
+                  <a:srgbClr val="9D174D"/>
                 </a:solidFill>
                 <a:latin typeface="Trebuchet MS" pitchFamily="34" charset="0"/>
                 <a:ea typeface="Trebuchet MS" pitchFamily="34" charset="-122"/>
@@ -15659,63 +15556,90 @@
               </a:rPr>
               <a:t>u</a:t>
             </a:r>
-            <a:endParaRPr lang="en-US" sz="1400" dirty="0"/>
-          </a:p>
-        </p:txBody>
-      </p:sp>
-      <p:sp>
-        <p:nvSpPr>
-          <p:cNvPr id="30" name="Text 28"/>
-          <p:cNvSpPr/>
-          <p:nvPr/>
-        </p:nvSpPr>
-        <p:spPr>
-          <a:xfrm>
-            <a:off x="3529584" y="3364992"/>
-            <a:ext cx="73152" cy="475488"/>
-          </a:xfrm>
-          <a:prstGeom prst="rect">
-            <a:avLst/>
-          </a:prstGeom>
-          <a:noFill/>
-          <a:ln/>
-        </p:spPr>
-        <p:txBody>
-          <a:bodyPr wrap="square" lIns="0" tIns="0" rIns="0" bIns="0" rtlCol="0" anchor="ctr"/>
-          <a:lstStyle/>
-          <a:p>
-            <a:pPr algn="ctr" indent="0" marL="0">
-              <a:buNone/>
-            </a:pPr>
-            <a:r>
-              <a:rPr lang="en-US" sz="1600" b="1" dirty="0">
-                <a:solidFill>
-                  <a:srgbClr val="0D9488"/>
+            <a:endParaRPr lang="en-US" sz="900" dirty="0"/>
+          </a:p>
+        </p:txBody>
+      </p:sp>
+      <p:sp>
+        <p:nvSpPr>
+          <p:cNvPr id="38" name="Shape 36"/>
+          <p:cNvSpPr/>
+          <p:nvPr/>
+        </p:nvSpPr>
+        <p:spPr>
+          <a:xfrm>
+            <a:off x="3293146" y="4169664"/>
+            <a:ext cx="685800" cy="475488"/>
+          </a:xfrm>
+          <a:prstGeom prst="rect">
+            <a:avLst>
+              <a:gd name="adj" fmla="val 7692"/>
+            </a:avLst>
+          </a:prstGeom>
+          <a:solidFill>
+            <a:srgbClr val="FFFFFF"/>
+          </a:solidFill>
+          <a:ln w="12700">
+            <a:solidFill>
+              <a:srgbClr val="DB2777"/>
+            </a:solidFill>
+            <a:prstDash val="solid"/>
+          </a:ln>
+        </p:spPr>
+      </p:sp>
+      <p:sp>
+        <p:nvSpPr>
+          <p:cNvPr id="39" name="Text 37"/>
+          <p:cNvSpPr/>
+          <p:nvPr/>
+        </p:nvSpPr>
+        <p:spPr>
+          <a:xfrm>
+            <a:off x="3293146" y="4169664"/>
+            <a:ext cx="685800" cy="475488"/>
+          </a:xfrm>
+          <a:prstGeom prst="rect">
+            <a:avLst/>
+          </a:prstGeom>
+          <a:noFill/>
+          <a:ln/>
+        </p:spPr>
+        <p:txBody>
+          <a:bodyPr wrap="square" lIns="0" tIns="0" rIns="0" bIns="0" rtlCol="0" anchor="ctr"/>
+          <a:lstStyle/>
+          <a:p>
+            <a:pPr algn="ctr" indent="0" marL="0">
+              <a:buNone/>
+            </a:pPr>
+            <a:r>
+              <a:rPr lang="en-US" sz="900" b="1" dirty="0">
+                <a:solidFill>
+                  <a:srgbClr val="9D174D"/>
                 </a:solidFill>
                 <a:latin typeface="Trebuchet MS" pitchFamily="34" charset="0"/>
                 <a:ea typeface="Trebuchet MS" pitchFamily="34" charset="-122"/>
                 <a:cs typeface="Trebuchet MS" pitchFamily="34" charset="-120"/>
               </a:rPr>
-              <a:t>·</a:t>
-            </a:r>
-            <a:endParaRPr lang="en-US" sz="1600" dirty="0"/>
-          </a:p>
-        </p:txBody>
-      </p:sp>
-      <p:sp>
-        <p:nvSpPr>
-          <p:cNvPr id="31" name="Shape 29"/>
-          <p:cNvSpPr/>
-          <p:nvPr/>
-        </p:nvSpPr>
-        <p:spPr>
-          <a:xfrm>
-            <a:off x="3602736" y="3364992"/>
-            <a:ext cx="1554480" cy="475488"/>
+              <a:t>n</a:t>
+            </a:r>
+            <a:endParaRPr lang="en-US" sz="900" dirty="0"/>
+          </a:p>
+        </p:txBody>
+      </p:sp>
+      <p:sp>
+        <p:nvSpPr>
+          <p:cNvPr id="40" name="Shape 38"/>
+          <p:cNvSpPr/>
+          <p:nvPr/>
+        </p:nvSpPr>
+        <p:spPr>
+          <a:xfrm>
+            <a:off x="4331643" y="4169664"/>
+            <a:ext cx="685800" cy="475488"/>
           </a:xfrm>
           <a:prstGeom prst="rect">
             <a:avLst>
-              <a:gd name="adj" fmla="val 9615"/>
+              <a:gd name="adj" fmla="val 7692"/>
             </a:avLst>
           </a:prstGeom>
           <a:solidFill>
@@ -15723,104 +15647,131 @@
           </a:solidFill>
           <a:ln w="12700">
             <a:solidFill>
-              <a:srgbClr val="0D9488"/>
-            </a:solidFill>
-            <a:prstDash val="solid"/>
-          </a:ln>
-        </p:spPr>
-      </p:sp>
-      <p:sp>
-        <p:nvSpPr>
-          <p:cNvPr id="32" name="Text 30"/>
-          <p:cNvSpPr/>
-          <p:nvPr/>
-        </p:nvSpPr>
-        <p:spPr>
-          <a:xfrm>
-            <a:off x="3602736" y="3364992"/>
-            <a:ext cx="1554480" cy="475488"/>
-          </a:xfrm>
-          <a:prstGeom prst="rect">
-            <a:avLst/>
-          </a:prstGeom>
-          <a:noFill/>
-          <a:ln/>
-        </p:spPr>
-        <p:txBody>
-          <a:bodyPr wrap="square" lIns="0" tIns="0" rIns="0" bIns="0" rtlCol="0" anchor="ctr"/>
-          <a:lstStyle/>
-          <a:p>
-            <a:pPr algn="ctr" indent="0" marL="0">
-              <a:buNone/>
-            </a:pPr>
-            <a:r>
-              <a:rPr lang="en-US" sz="1400" b="1" dirty="0">
-                <a:solidFill>
-                  <a:srgbClr val="0D9488"/>
+              <a:srgbClr val="DB2777"/>
+            </a:solidFill>
+            <a:prstDash val="solid"/>
+          </a:ln>
+        </p:spPr>
+      </p:sp>
+      <p:sp>
+        <p:nvSpPr>
+          <p:cNvPr id="41" name="Text 39"/>
+          <p:cNvSpPr/>
+          <p:nvPr/>
+        </p:nvSpPr>
+        <p:spPr>
+          <a:xfrm>
+            <a:off x="4331643" y="4169664"/>
+            <a:ext cx="685800" cy="475488"/>
+          </a:xfrm>
+          <a:prstGeom prst="rect">
+            <a:avLst/>
+          </a:prstGeom>
+          <a:noFill/>
+          <a:ln/>
+        </p:spPr>
+        <p:txBody>
+          <a:bodyPr wrap="square" lIns="0" tIns="0" rIns="0" bIns="0" rtlCol="0" anchor="ctr"/>
+          <a:lstStyle/>
+          <a:p>
+            <a:pPr algn="ctr" indent="0" marL="0">
+              <a:buNone/>
+            </a:pPr>
+            <a:r>
+              <a:rPr lang="en-US" sz="900" b="1" dirty="0">
+                <a:solidFill>
+                  <a:srgbClr val="9D174D"/>
                 </a:solidFill>
                 <a:latin typeface="Trebuchet MS" pitchFamily="34" charset="0"/>
                 <a:ea typeface="Trebuchet MS" pitchFamily="34" charset="-122"/>
                 <a:cs typeface="Trebuchet MS" pitchFamily="34" charset="-120"/>
               </a:rPr>
-              <a:t>ni</a:t>
-            </a:r>
-            <a:endParaRPr lang="en-US" sz="1400" dirty="0"/>
-          </a:p>
-        </p:txBody>
-      </p:sp>
-      <p:sp>
-        <p:nvSpPr>
-          <p:cNvPr id="33" name="Text 31"/>
-          <p:cNvSpPr/>
-          <p:nvPr/>
-        </p:nvSpPr>
-        <p:spPr>
-          <a:xfrm>
-            <a:off x="5157216" y="3364992"/>
-            <a:ext cx="73152" cy="475488"/>
-          </a:xfrm>
-          <a:prstGeom prst="rect">
-            <a:avLst/>
-          </a:prstGeom>
-          <a:noFill/>
-          <a:ln/>
-        </p:spPr>
-        <p:txBody>
-          <a:bodyPr wrap="square" lIns="0" tIns="0" rIns="0" bIns="0" rtlCol="0" anchor="ctr"/>
-          <a:lstStyle/>
-          <a:p>
-            <a:pPr algn="ctr" indent="0" marL="0">
-              <a:buNone/>
-            </a:pPr>
-            <a:r>
-              <a:rPr lang="en-US" sz="1600" b="1" dirty="0">
-                <a:solidFill>
-                  <a:srgbClr val="0D9488"/>
+              <a:t>i</a:t>
+            </a:r>
+            <a:endParaRPr lang="en-US" sz="900" dirty="0"/>
+          </a:p>
+        </p:txBody>
+      </p:sp>
+      <p:sp>
+        <p:nvSpPr>
+          <p:cNvPr id="42" name="Shape 40"/>
+          <p:cNvSpPr/>
+          <p:nvPr/>
+        </p:nvSpPr>
+        <p:spPr>
+          <a:xfrm>
+            <a:off x="5370141" y="4169664"/>
+            <a:ext cx="685800" cy="475488"/>
+          </a:xfrm>
+          <a:prstGeom prst="rect">
+            <a:avLst>
+              <a:gd name="adj" fmla="val 7692"/>
+            </a:avLst>
+          </a:prstGeom>
+          <a:solidFill>
+            <a:srgbClr val="FFFFFF"/>
+          </a:solidFill>
+          <a:ln w="12700">
+            <a:solidFill>
+              <a:srgbClr val="DB2777"/>
+            </a:solidFill>
+            <a:prstDash val="solid"/>
+          </a:ln>
+        </p:spPr>
+      </p:sp>
+      <p:sp>
+        <p:nvSpPr>
+          <p:cNvPr id="43" name="Text 41"/>
+          <p:cNvSpPr/>
+          <p:nvPr/>
+        </p:nvSpPr>
+        <p:spPr>
+          <a:xfrm>
+            <a:off x="5370141" y="4169664"/>
+            <a:ext cx="685800" cy="475488"/>
+          </a:xfrm>
+          <a:prstGeom prst="rect">
+            <a:avLst/>
+          </a:prstGeom>
+          <a:noFill/>
+          <a:ln/>
+        </p:spPr>
+        <p:txBody>
+          <a:bodyPr wrap="square" lIns="0" tIns="0" rIns="0" bIns="0" rtlCol="0" anchor="ctr"/>
+          <a:lstStyle/>
+          <a:p>
+            <a:pPr algn="ctr" indent="0" marL="0">
+              <a:buNone/>
+            </a:pPr>
+            <a:r>
+              <a:rPr lang="en-US" sz="900" b="1" dirty="0">
+                <a:solidFill>
+                  <a:srgbClr val="9D174D"/>
                 </a:solidFill>
                 <a:latin typeface="Trebuchet MS" pitchFamily="34" charset="0"/>
                 <a:ea typeface="Trebuchet MS" pitchFamily="34" charset="-122"/>
                 <a:cs typeface="Trebuchet MS" pitchFamily="34" charset="-120"/>
               </a:rPr>
-              <a:t>·</a:t>
-            </a:r>
-            <a:endParaRPr lang="en-US" sz="1600" dirty="0"/>
-          </a:p>
-        </p:txBody>
-      </p:sp>
-      <p:sp>
-        <p:nvSpPr>
-          <p:cNvPr id="34" name="Shape 32"/>
-          <p:cNvSpPr/>
-          <p:nvPr/>
-        </p:nvSpPr>
-        <p:spPr>
-          <a:xfrm>
-            <a:off x="5230368" y="3364992"/>
-            <a:ext cx="1554480" cy="475488"/>
+              <a:t>s</a:t>
+            </a:r>
+            <a:endParaRPr lang="en-US" sz="900" dirty="0"/>
+          </a:p>
+        </p:txBody>
+      </p:sp>
+      <p:sp>
+        <p:nvSpPr>
+          <p:cNvPr id="44" name="Shape 42"/>
+          <p:cNvSpPr/>
+          <p:nvPr/>
+        </p:nvSpPr>
+        <p:spPr>
+          <a:xfrm>
+            <a:off x="6408638" y="4169664"/>
+            <a:ext cx="685800" cy="475488"/>
           </a:xfrm>
           <a:prstGeom prst="rect">
             <a:avLst>
-              <a:gd name="adj" fmla="val 9615"/>
+              <a:gd name="adj" fmla="val 7692"/>
             </a:avLst>
           </a:prstGeom>
           <a:solidFill>
@@ -15828,811 +15779,112 @@
           </a:solidFill>
           <a:ln w="12700">
             <a:solidFill>
-              <a:srgbClr val="0D9488"/>
-            </a:solidFill>
-            <a:prstDash val="solid"/>
-          </a:ln>
-        </p:spPr>
-      </p:sp>
-      <p:sp>
-        <p:nvSpPr>
-          <p:cNvPr id="35" name="Text 33"/>
-          <p:cNvSpPr/>
-          <p:nvPr/>
-        </p:nvSpPr>
-        <p:spPr>
-          <a:xfrm>
-            <a:off x="5230368" y="3364992"/>
-            <a:ext cx="1554480" cy="475488"/>
-          </a:xfrm>
-          <a:prstGeom prst="rect">
-            <a:avLst/>
-          </a:prstGeom>
-          <a:noFill/>
-          <a:ln/>
-        </p:spPr>
-        <p:txBody>
-          <a:bodyPr wrap="square" lIns="0" tIns="0" rIns="0" bIns="0" rtlCol="0" anchor="ctr"/>
-          <a:lstStyle/>
-          <a:p>
-            <a:pPr algn="ctr" indent="0" marL="0">
-              <a:buNone/>
-            </a:pPr>
-            <a:r>
-              <a:rPr lang="en-US" sz="1400" b="1" dirty="0">
-                <a:solidFill>
-                  <a:srgbClr val="0D9488"/>
+              <a:srgbClr val="DB2777"/>
+            </a:solidFill>
+            <a:prstDash val="solid"/>
+          </a:ln>
+        </p:spPr>
+      </p:sp>
+      <p:sp>
+        <p:nvSpPr>
+          <p:cNvPr id="45" name="Text 43"/>
+          <p:cNvSpPr/>
+          <p:nvPr/>
+        </p:nvSpPr>
+        <p:spPr>
+          <a:xfrm>
+            <a:off x="6408638" y="4169664"/>
+            <a:ext cx="685800" cy="475488"/>
+          </a:xfrm>
+          <a:prstGeom prst="rect">
+            <a:avLst/>
+          </a:prstGeom>
+          <a:noFill/>
+          <a:ln/>
+        </p:spPr>
+        <p:txBody>
+          <a:bodyPr wrap="square" lIns="0" tIns="0" rIns="0" bIns="0" rtlCol="0" anchor="ctr"/>
+          <a:lstStyle/>
+          <a:p>
+            <a:pPr algn="ctr" indent="0" marL="0">
+              <a:buNone/>
+            </a:pPr>
+            <a:r>
+              <a:rPr lang="en-US" sz="900" b="1" dirty="0">
+                <a:solidFill>
+                  <a:srgbClr val="9D174D"/>
                 </a:solidFill>
                 <a:latin typeface="Trebuchet MS" pitchFamily="34" charset="0"/>
                 <a:ea typeface="Trebuchet MS" pitchFamily="34" charset="-122"/>
                 <a:cs typeface="Trebuchet MS" pitchFamily="34" charset="-120"/>
               </a:rPr>
-              <a:t>ver</a:t>
-            </a:r>
-            <a:endParaRPr lang="en-US" sz="1400" dirty="0"/>
-          </a:p>
-        </p:txBody>
-      </p:sp>
-      <p:sp>
-        <p:nvSpPr>
-          <p:cNvPr id="36" name="Text 34"/>
-          <p:cNvSpPr/>
-          <p:nvPr/>
-        </p:nvSpPr>
-        <p:spPr>
-          <a:xfrm>
-            <a:off x="6784848" y="3364992"/>
-            <a:ext cx="73152" cy="475488"/>
-          </a:xfrm>
-          <a:prstGeom prst="rect">
-            <a:avLst/>
-          </a:prstGeom>
-          <a:noFill/>
-          <a:ln/>
-        </p:spPr>
-        <p:txBody>
-          <a:bodyPr wrap="square" lIns="0" tIns="0" rIns="0" bIns="0" rtlCol="0" anchor="ctr"/>
-          <a:lstStyle/>
-          <a:p>
-            <a:pPr algn="ctr" indent="0" marL="0">
-              <a:buNone/>
-            </a:pPr>
-            <a:r>
-              <a:rPr lang="en-US" sz="1600" b="1" dirty="0">
-                <a:solidFill>
-                  <a:srgbClr val="0D9488"/>
+              <a:t>o</a:t>
+            </a:r>
+            <a:endParaRPr lang="en-US" sz="900" dirty="0"/>
+          </a:p>
+        </p:txBody>
+      </p:sp>
+      <p:sp>
+        <p:nvSpPr>
+          <p:cNvPr id="46" name="Shape 44"/>
+          <p:cNvSpPr/>
+          <p:nvPr/>
+        </p:nvSpPr>
+        <p:spPr>
+          <a:xfrm>
+            <a:off x="7447135" y="4169664"/>
+            <a:ext cx="685800" cy="475488"/>
+          </a:xfrm>
+          <a:prstGeom prst="rect">
+            <a:avLst>
+              <a:gd name="adj" fmla="val 7692"/>
+            </a:avLst>
+          </a:prstGeom>
+          <a:solidFill>
+            <a:srgbClr val="FFFFFF"/>
+          </a:solidFill>
+          <a:ln w="12700">
+            <a:solidFill>
+              <a:srgbClr val="DB2777"/>
+            </a:solidFill>
+            <a:prstDash val="solid"/>
+          </a:ln>
+        </p:spPr>
+      </p:sp>
+      <p:sp>
+        <p:nvSpPr>
+          <p:cNvPr id="47" name="Text 45"/>
+          <p:cNvSpPr/>
+          <p:nvPr/>
+        </p:nvSpPr>
+        <p:spPr>
+          <a:xfrm>
+            <a:off x="7447135" y="4169664"/>
+            <a:ext cx="685800" cy="475488"/>
+          </a:xfrm>
+          <a:prstGeom prst="rect">
+            <a:avLst/>
+          </a:prstGeom>
+          <a:noFill/>
+          <a:ln/>
+        </p:spPr>
+        <p:txBody>
+          <a:bodyPr wrap="square" lIns="0" tIns="0" rIns="0" bIns="0" rtlCol="0" anchor="ctr"/>
+          <a:lstStyle/>
+          <a:p>
+            <a:pPr algn="ctr" indent="0" marL="0">
+              <a:buNone/>
+            </a:pPr>
+            <a:r>
+              <a:rPr lang="en-US" sz="900" b="1" dirty="0">
+                <a:solidFill>
+                  <a:srgbClr val="9D174D"/>
                 </a:solidFill>
                 <a:latin typeface="Trebuchet MS" pitchFamily="34" charset="0"/>
                 <a:ea typeface="Trebuchet MS" pitchFamily="34" charset="-122"/>
                 <a:cs typeface="Trebuchet MS" pitchFamily="34" charset="-120"/>
               </a:rPr>
-              <a:t>·</a:t>
-            </a:r>
-            <a:endParaRPr lang="en-US" sz="1600" dirty="0"/>
-          </a:p>
-        </p:txBody>
-      </p:sp>
-      <p:sp>
-        <p:nvSpPr>
-          <p:cNvPr id="37" name="Shape 35"/>
-          <p:cNvSpPr/>
-          <p:nvPr/>
-        </p:nvSpPr>
-        <p:spPr>
-          <a:xfrm>
-            <a:off x="6858000" y="3364992"/>
-            <a:ext cx="1554480" cy="475488"/>
-          </a:xfrm>
-          <a:prstGeom prst="rect">
-            <a:avLst>
-              <a:gd name="adj" fmla="val 9615"/>
-            </a:avLst>
-          </a:prstGeom>
-          <a:solidFill>
-            <a:srgbClr val="FFFFFF"/>
-          </a:solidFill>
-          <a:ln w="12700">
-            <a:solidFill>
-              <a:srgbClr val="0D9488"/>
-            </a:solidFill>
-            <a:prstDash val="solid"/>
-          </a:ln>
-        </p:spPr>
-      </p:sp>
-      <p:sp>
-        <p:nvSpPr>
-          <p:cNvPr id="38" name="Text 36"/>
-          <p:cNvSpPr/>
-          <p:nvPr/>
-        </p:nvSpPr>
-        <p:spPr>
-          <a:xfrm>
-            <a:off x="6858000" y="3364992"/>
-            <a:ext cx="1554480" cy="475488"/>
-          </a:xfrm>
-          <a:prstGeom prst="rect">
-            <a:avLst/>
-          </a:prstGeom>
-          <a:noFill/>
-          <a:ln/>
-        </p:spPr>
-        <p:txBody>
-          <a:bodyPr wrap="square" lIns="0" tIns="0" rIns="0" bIns="0" rtlCol="0" anchor="ctr"/>
-          <a:lstStyle/>
-          <a:p>
-            <a:pPr algn="ctr" indent="0" marL="0">
-              <a:buNone/>
-            </a:pPr>
-            <a:r>
-              <a:rPr lang="en-US" sz="1400" b="1" dirty="0">
-                <a:solidFill>
-                  <a:srgbClr val="0D9488"/>
-                </a:solidFill>
-                <a:latin typeface="Trebuchet MS" pitchFamily="34" charset="0"/>
-                <a:ea typeface="Trebuchet MS" pitchFamily="34" charset="-122"/>
-                <a:cs typeface="Trebuchet MS" pitchFamily="34" charset="-120"/>
-              </a:rPr>
-              <a:t>sal</a:t>
-            </a:r>
-            <a:endParaRPr lang="en-US" sz="1400" dirty="0"/>
-          </a:p>
-        </p:txBody>
-      </p:sp>
-      <p:sp>
-        <p:nvSpPr>
-          <p:cNvPr id="39" name="Shape 37"/>
-          <p:cNvSpPr/>
-          <p:nvPr/>
-        </p:nvSpPr>
-        <p:spPr>
-          <a:xfrm>
-            <a:off x="365760" y="4096512"/>
-            <a:ext cx="1371600" cy="804672"/>
-          </a:xfrm>
-          <a:prstGeom prst="rect">
-            <a:avLst>
-              <a:gd name="adj" fmla="val 6818"/>
-            </a:avLst>
-          </a:prstGeom>
-          <a:solidFill>
-            <a:srgbClr val="E2E8F0"/>
-          </a:solidFill>
-          <a:ln w="12700">
-            <a:solidFill>
-              <a:srgbClr val="E2E8F0"/>
-            </a:solidFill>
-            <a:prstDash val="solid"/>
-          </a:ln>
-        </p:spPr>
-      </p:sp>
-      <p:sp>
-        <p:nvSpPr>
-          <p:cNvPr id="40" name="Text 38"/>
-          <p:cNvSpPr/>
-          <p:nvPr/>
-        </p:nvSpPr>
-        <p:spPr>
-          <a:xfrm>
-            <a:off x="365760" y="4096512"/>
-            <a:ext cx="1371600" cy="804672"/>
-          </a:xfrm>
-          <a:prstGeom prst="rect">
-            <a:avLst/>
-          </a:prstGeom>
-          <a:noFill/>
-          <a:ln/>
-        </p:spPr>
-        <p:txBody>
-          <a:bodyPr wrap="square" lIns="0" tIns="0" rIns="0" bIns="0" rtlCol="0" anchor="ctr"/>
-          <a:lstStyle/>
-          <a:p>
-            <a:pPr algn="ctr" indent="0" marL="0">
-              <a:buNone/>
-            </a:pPr>
-            <a:r>
-              <a:rPr lang="en-US" sz="1100" b="1" dirty="0">
-                <a:solidFill>
-                  <a:srgbClr val="475569"/>
-                </a:solidFill>
-                <a:latin typeface="Trebuchet MS" pitchFamily="34" charset="0"/>
-                <a:ea typeface="Trebuchet MS" pitchFamily="34" charset="-122"/>
-                <a:cs typeface="Trebuchet MS" pitchFamily="34" charset="-120"/>
-              </a:rPr>
-              <a:t>Phonemes</a:t>
-            </a:r>
-            <a:endParaRPr lang="en-US" sz="1100" dirty="0"/>
-          </a:p>
-        </p:txBody>
-      </p:sp>
-      <p:sp>
-        <p:nvSpPr>
-          <p:cNvPr id="41" name="Shape 39"/>
-          <p:cNvSpPr/>
-          <p:nvPr/>
-        </p:nvSpPr>
-        <p:spPr>
-          <a:xfrm>
-            <a:off x="1874520" y="4096512"/>
-            <a:ext cx="6903720" cy="804672"/>
-          </a:xfrm>
-          <a:prstGeom prst="rect">
-            <a:avLst>
-              <a:gd name="adj" fmla="val 6818"/>
-            </a:avLst>
-          </a:prstGeom>
-          <a:solidFill>
-            <a:srgbClr val="FCE7F3"/>
-          </a:solidFill>
-          <a:ln w="12700">
-            <a:solidFill>
-              <a:srgbClr val="DB2777"/>
-            </a:solidFill>
-            <a:prstDash val="solid"/>
-          </a:ln>
-        </p:spPr>
-      </p:sp>
-      <p:sp>
-        <p:nvSpPr>
-          <p:cNvPr id="42" name="Shape 40"/>
-          <p:cNvSpPr/>
-          <p:nvPr/>
-        </p:nvSpPr>
-        <p:spPr>
-          <a:xfrm>
-            <a:off x="2023872" y="4169664"/>
-            <a:ext cx="685800" cy="384048"/>
-          </a:xfrm>
-          <a:prstGeom prst="rect">
-            <a:avLst>
-              <a:gd name="adj" fmla="val 9524"/>
-            </a:avLst>
-          </a:prstGeom>
-          <a:solidFill>
-            <a:srgbClr val="FFFFFF"/>
-          </a:solidFill>
-          <a:ln w="12700">
-            <a:solidFill>
-              <a:srgbClr val="DB2777"/>
-            </a:solidFill>
-            <a:prstDash val="solid"/>
-          </a:ln>
-        </p:spPr>
-      </p:sp>
-      <p:sp>
-        <p:nvSpPr>
-          <p:cNvPr id="43" name="Text 41"/>
-          <p:cNvSpPr/>
-          <p:nvPr/>
-        </p:nvSpPr>
-        <p:spPr>
-          <a:xfrm>
-            <a:off x="2023872" y="4169664"/>
-            <a:ext cx="685800" cy="384048"/>
-          </a:xfrm>
-          <a:prstGeom prst="rect">
-            <a:avLst/>
-          </a:prstGeom>
-          <a:noFill/>
-          <a:ln/>
-        </p:spPr>
-        <p:txBody>
-          <a:bodyPr wrap="square" lIns="0" tIns="0" rIns="0" bIns="0" rtlCol="0" anchor="ctr"/>
-          <a:lstStyle/>
-          <a:p>
-            <a:pPr algn="ctr" indent="0" marL="0">
-              <a:buNone/>
-            </a:pPr>
-            <a:r>
-              <a:rPr lang="en-US" sz="900" b="1" dirty="0">
-                <a:solidFill>
-                  <a:srgbClr val="9D174D"/>
-                </a:solidFill>
-                <a:latin typeface="Trebuchet MS" pitchFamily="34" charset="0"/>
-                <a:ea typeface="Trebuchet MS" pitchFamily="34" charset="-122"/>
-                <a:cs typeface="Trebuchet MS" pitchFamily="34" charset="-120"/>
-              </a:rPr>
-              <a:t>u</a:t>
-            </a:r>
-            <a:endParaRPr lang="en-US" sz="900" dirty="0"/>
-          </a:p>
-        </p:txBody>
-      </p:sp>
-      <p:sp>
-        <p:nvSpPr>
-          <p:cNvPr id="44" name="Shape 42"/>
-          <p:cNvSpPr/>
-          <p:nvPr/>
-        </p:nvSpPr>
-        <p:spPr>
-          <a:xfrm>
-            <a:off x="2831592" y="4169664"/>
-            <a:ext cx="685800" cy="384048"/>
-          </a:xfrm>
-          <a:prstGeom prst="rect">
-            <a:avLst>
-              <a:gd name="adj" fmla="val 9524"/>
-            </a:avLst>
-          </a:prstGeom>
-          <a:solidFill>
-            <a:srgbClr val="FFFFFF"/>
-          </a:solidFill>
-          <a:ln w="12700">
-            <a:solidFill>
-              <a:srgbClr val="DB2777"/>
-            </a:solidFill>
-            <a:prstDash val="solid"/>
-          </a:ln>
-        </p:spPr>
-      </p:sp>
-      <p:sp>
-        <p:nvSpPr>
-          <p:cNvPr id="45" name="Text 43"/>
-          <p:cNvSpPr/>
-          <p:nvPr/>
-        </p:nvSpPr>
-        <p:spPr>
-          <a:xfrm>
-            <a:off x="2831592" y="4169664"/>
-            <a:ext cx="685800" cy="384048"/>
-          </a:xfrm>
-          <a:prstGeom prst="rect">
-            <a:avLst/>
-          </a:prstGeom>
-          <a:noFill/>
-          <a:ln/>
-        </p:spPr>
-        <p:txBody>
-          <a:bodyPr wrap="square" lIns="0" tIns="0" rIns="0" bIns="0" rtlCol="0" anchor="ctr"/>
-          <a:lstStyle/>
-          <a:p>
-            <a:pPr algn="ctr" indent="0" marL="0">
-              <a:buNone/>
-            </a:pPr>
-            <a:r>
-              <a:rPr lang="en-US" sz="900" b="1" dirty="0">
-                <a:solidFill>
-                  <a:srgbClr val="9D174D"/>
-                </a:solidFill>
-                <a:latin typeface="Trebuchet MS" pitchFamily="34" charset="0"/>
-                <a:ea typeface="Trebuchet MS" pitchFamily="34" charset="-122"/>
-                <a:cs typeface="Trebuchet MS" pitchFamily="34" charset="-120"/>
-              </a:rPr>
               <a:t>n</a:t>
-            </a:r>
-            <a:endParaRPr lang="en-US" sz="900" dirty="0"/>
-          </a:p>
-        </p:txBody>
-      </p:sp>
-      <p:sp>
-        <p:nvSpPr>
-          <p:cNvPr id="46" name="Shape 44"/>
-          <p:cNvSpPr/>
-          <p:nvPr/>
-        </p:nvSpPr>
-        <p:spPr>
-          <a:xfrm>
-            <a:off x="3639312" y="4169664"/>
-            <a:ext cx="685800" cy="384048"/>
-          </a:xfrm>
-          <a:prstGeom prst="rect">
-            <a:avLst>
-              <a:gd name="adj" fmla="val 9524"/>
-            </a:avLst>
-          </a:prstGeom>
-          <a:solidFill>
-            <a:srgbClr val="FFFFFF"/>
-          </a:solidFill>
-          <a:ln w="12700">
-            <a:solidFill>
-              <a:srgbClr val="DB2777"/>
-            </a:solidFill>
-            <a:prstDash val="solid"/>
-          </a:ln>
-        </p:spPr>
-      </p:sp>
-      <p:sp>
-        <p:nvSpPr>
-          <p:cNvPr id="47" name="Text 45"/>
-          <p:cNvSpPr/>
-          <p:nvPr/>
-        </p:nvSpPr>
-        <p:spPr>
-          <a:xfrm>
-            <a:off x="3639312" y="4169664"/>
-            <a:ext cx="685800" cy="384048"/>
-          </a:xfrm>
-          <a:prstGeom prst="rect">
-            <a:avLst/>
-          </a:prstGeom>
-          <a:noFill/>
-          <a:ln/>
-        </p:spPr>
-        <p:txBody>
-          <a:bodyPr wrap="square" lIns="0" tIns="0" rIns="0" bIns="0" rtlCol="0" anchor="ctr"/>
-          <a:lstStyle/>
-          <a:p>
-            <a:pPr algn="ctr" indent="0" marL="0">
-              <a:buNone/>
-            </a:pPr>
-            <a:r>
-              <a:rPr lang="en-US" sz="900" b="1" dirty="0">
-                <a:solidFill>
-                  <a:srgbClr val="9D174D"/>
-                </a:solidFill>
-                <a:latin typeface="Trebuchet MS" pitchFamily="34" charset="0"/>
-                <a:ea typeface="Trebuchet MS" pitchFamily="34" charset="-122"/>
-                <a:cs typeface="Trebuchet MS" pitchFamily="34" charset="-120"/>
-              </a:rPr>
-              <a:t>i</a:t>
-            </a:r>
-            <a:endParaRPr lang="en-US" sz="900" dirty="0"/>
-          </a:p>
-        </p:txBody>
-      </p:sp>
-      <p:sp>
-        <p:nvSpPr>
-          <p:cNvPr id="48" name="Shape 46"/>
-          <p:cNvSpPr/>
-          <p:nvPr/>
-        </p:nvSpPr>
-        <p:spPr>
-          <a:xfrm>
-            <a:off x="4447032" y="4169664"/>
-            <a:ext cx="685800" cy="384048"/>
-          </a:xfrm>
-          <a:prstGeom prst="rect">
-            <a:avLst>
-              <a:gd name="adj" fmla="val 9524"/>
-            </a:avLst>
-          </a:prstGeom>
-          <a:solidFill>
-            <a:srgbClr val="FFFFFF"/>
-          </a:solidFill>
-          <a:ln w="12700">
-            <a:solidFill>
-              <a:srgbClr val="DB2777"/>
-            </a:solidFill>
-            <a:prstDash val="solid"/>
-          </a:ln>
-        </p:spPr>
-      </p:sp>
-      <p:sp>
-        <p:nvSpPr>
-          <p:cNvPr id="49" name="Text 47"/>
-          <p:cNvSpPr/>
-          <p:nvPr/>
-        </p:nvSpPr>
-        <p:spPr>
-          <a:xfrm>
-            <a:off x="4447032" y="4169664"/>
-            <a:ext cx="685800" cy="384048"/>
-          </a:xfrm>
-          <a:prstGeom prst="rect">
-            <a:avLst/>
-          </a:prstGeom>
-          <a:noFill/>
-          <a:ln/>
-        </p:spPr>
-        <p:txBody>
-          <a:bodyPr wrap="square" lIns="0" tIns="0" rIns="0" bIns="0" rtlCol="0" anchor="ctr"/>
-          <a:lstStyle/>
-          <a:p>
-            <a:pPr algn="ctr" indent="0" marL="0">
-              <a:buNone/>
-            </a:pPr>
-            <a:r>
-              <a:rPr lang="en-US" sz="900" b="1" dirty="0">
-                <a:solidFill>
-                  <a:srgbClr val="9D174D"/>
-                </a:solidFill>
-                <a:latin typeface="Trebuchet MS" pitchFamily="34" charset="0"/>
-                <a:ea typeface="Trebuchet MS" pitchFamily="34" charset="-122"/>
-                <a:cs typeface="Trebuchet MS" pitchFamily="34" charset="-120"/>
-              </a:rPr>
-              <a:t>v</a:t>
-            </a:r>
-            <a:endParaRPr lang="en-US" sz="900" dirty="0"/>
-          </a:p>
-        </p:txBody>
-      </p:sp>
-      <p:sp>
-        <p:nvSpPr>
-          <p:cNvPr id="50" name="Shape 48"/>
-          <p:cNvSpPr/>
-          <p:nvPr/>
-        </p:nvSpPr>
-        <p:spPr>
-          <a:xfrm>
-            <a:off x="5254752" y="4169664"/>
-            <a:ext cx="685800" cy="384048"/>
-          </a:xfrm>
-          <a:prstGeom prst="rect">
-            <a:avLst>
-              <a:gd name="adj" fmla="val 9524"/>
-            </a:avLst>
-          </a:prstGeom>
-          <a:solidFill>
-            <a:srgbClr val="FFFFFF"/>
-          </a:solidFill>
-          <a:ln w="12700">
-            <a:solidFill>
-              <a:srgbClr val="DB2777"/>
-            </a:solidFill>
-            <a:prstDash val="solid"/>
-          </a:ln>
-        </p:spPr>
-      </p:sp>
-      <p:sp>
-        <p:nvSpPr>
-          <p:cNvPr id="51" name="Text 49"/>
-          <p:cNvSpPr/>
-          <p:nvPr/>
-        </p:nvSpPr>
-        <p:spPr>
-          <a:xfrm>
-            <a:off x="5254752" y="4169664"/>
-            <a:ext cx="685800" cy="384048"/>
-          </a:xfrm>
-          <a:prstGeom prst="rect">
-            <a:avLst/>
-          </a:prstGeom>
-          <a:noFill/>
-          <a:ln/>
-        </p:spPr>
-        <p:txBody>
-          <a:bodyPr wrap="square" lIns="0" tIns="0" rIns="0" bIns="0" rtlCol="0" anchor="ctr"/>
-          <a:lstStyle/>
-          <a:p>
-            <a:pPr algn="ctr" indent="0" marL="0">
-              <a:buNone/>
-            </a:pPr>
-            <a:r>
-              <a:rPr lang="en-US" sz="900" b="1" dirty="0">
-                <a:solidFill>
-                  <a:srgbClr val="9D174D"/>
-                </a:solidFill>
-                <a:latin typeface="Trebuchet MS" pitchFamily="34" charset="0"/>
-                <a:ea typeface="Trebuchet MS" pitchFamily="34" charset="-122"/>
-                <a:cs typeface="Trebuchet MS" pitchFamily="34" charset="-120"/>
-              </a:rPr>
-              <a:t>er</a:t>
-            </a:r>
-            <a:endParaRPr lang="en-US" sz="900" dirty="0"/>
-          </a:p>
-        </p:txBody>
-      </p:sp>
-      <p:sp>
-        <p:nvSpPr>
-          <p:cNvPr id="52" name="Shape 50"/>
-          <p:cNvSpPr/>
-          <p:nvPr/>
-        </p:nvSpPr>
-        <p:spPr>
-          <a:xfrm>
-            <a:off x="6062472" y="4169664"/>
-            <a:ext cx="685800" cy="384048"/>
-          </a:xfrm>
-          <a:prstGeom prst="rect">
-            <a:avLst>
-              <a:gd name="adj" fmla="val 9524"/>
-            </a:avLst>
-          </a:prstGeom>
-          <a:solidFill>
-            <a:srgbClr val="FFFFFF"/>
-          </a:solidFill>
-          <a:ln w="12700">
-            <a:solidFill>
-              <a:srgbClr val="DB2777"/>
-            </a:solidFill>
-            <a:prstDash val="solid"/>
-          </a:ln>
-        </p:spPr>
-      </p:sp>
-      <p:sp>
-        <p:nvSpPr>
-          <p:cNvPr id="53" name="Text 51"/>
-          <p:cNvSpPr/>
-          <p:nvPr/>
-        </p:nvSpPr>
-        <p:spPr>
-          <a:xfrm>
-            <a:off x="6062472" y="4169664"/>
-            <a:ext cx="685800" cy="384048"/>
-          </a:xfrm>
-          <a:prstGeom prst="rect">
-            <a:avLst/>
-          </a:prstGeom>
-          <a:noFill/>
-          <a:ln/>
-        </p:spPr>
-        <p:txBody>
-          <a:bodyPr wrap="square" lIns="0" tIns="0" rIns="0" bIns="0" rtlCol="0" anchor="ctr"/>
-          <a:lstStyle/>
-          <a:p>
-            <a:pPr algn="ctr" indent="0" marL="0">
-              <a:buNone/>
-            </a:pPr>
-            <a:r>
-              <a:rPr lang="en-US" sz="900" b="1" dirty="0">
-                <a:solidFill>
-                  <a:srgbClr val="9D174D"/>
-                </a:solidFill>
-                <a:latin typeface="Trebuchet MS" pitchFamily="34" charset="0"/>
-                <a:ea typeface="Trebuchet MS" pitchFamily="34" charset="-122"/>
-                <a:cs typeface="Trebuchet MS" pitchFamily="34" charset="-120"/>
-              </a:rPr>
-              <a:t>s</a:t>
-            </a:r>
-            <a:endParaRPr lang="en-US" sz="900" dirty="0"/>
-          </a:p>
-        </p:txBody>
-      </p:sp>
-      <p:sp>
-        <p:nvSpPr>
-          <p:cNvPr id="54" name="Text 52"/>
-          <p:cNvSpPr/>
-          <p:nvPr/>
-        </p:nvSpPr>
-        <p:spPr>
-          <a:xfrm>
-            <a:off x="6062472" y="4572000"/>
-            <a:ext cx="685800" cy="219456"/>
-          </a:xfrm>
-          <a:prstGeom prst="rect">
-            <a:avLst/>
-          </a:prstGeom>
-          <a:noFill/>
-          <a:ln/>
-        </p:spPr>
-        <p:txBody>
-          <a:bodyPr wrap="square" lIns="0" tIns="0" rIns="0" bIns="0" rtlCol="0" anchor="t"/>
-          <a:lstStyle/>
-          <a:p>
-            <a:pPr algn="ctr" indent="0" marL="0">
-              <a:buNone/>
-            </a:pPr>
-            <a:r>
-              <a:rPr lang="en-US" sz="750" i="1" dirty="0">
-                <a:solidFill>
-                  <a:srgbClr val="94A3B8"/>
-                </a:solidFill>
-                <a:latin typeface="Calibri" pitchFamily="34" charset="0"/>
-                <a:ea typeface="Calibri" pitchFamily="34" charset="-122"/>
-                <a:cs typeface="Calibri" pitchFamily="34" charset="-120"/>
-              </a:rPr>
-              <a:t>/s/</a:t>
-            </a:r>
-            <a:endParaRPr lang="en-US" sz="750" dirty="0"/>
-          </a:p>
-        </p:txBody>
-      </p:sp>
-      <p:sp>
-        <p:nvSpPr>
-          <p:cNvPr id="55" name="Shape 53"/>
-          <p:cNvSpPr/>
-          <p:nvPr/>
-        </p:nvSpPr>
-        <p:spPr>
-          <a:xfrm>
-            <a:off x="6870192" y="4169664"/>
-            <a:ext cx="685800" cy="384048"/>
-          </a:xfrm>
-          <a:prstGeom prst="rect">
-            <a:avLst>
-              <a:gd name="adj" fmla="val 9524"/>
-            </a:avLst>
-          </a:prstGeom>
-          <a:solidFill>
-            <a:srgbClr val="FFFFFF"/>
-          </a:solidFill>
-          <a:ln w="12700">
-            <a:solidFill>
-              <a:srgbClr val="DB2777"/>
-            </a:solidFill>
-            <a:prstDash val="solid"/>
-          </a:ln>
-        </p:spPr>
-      </p:sp>
-      <p:sp>
-        <p:nvSpPr>
-          <p:cNvPr id="56" name="Text 54"/>
-          <p:cNvSpPr/>
-          <p:nvPr/>
-        </p:nvSpPr>
-        <p:spPr>
-          <a:xfrm>
-            <a:off x="6870192" y="4169664"/>
-            <a:ext cx="685800" cy="384048"/>
-          </a:xfrm>
-          <a:prstGeom prst="rect">
-            <a:avLst/>
-          </a:prstGeom>
-          <a:noFill/>
-          <a:ln/>
-        </p:spPr>
-        <p:txBody>
-          <a:bodyPr wrap="square" lIns="0" tIns="0" rIns="0" bIns="0" rtlCol="0" anchor="ctr"/>
-          <a:lstStyle/>
-          <a:p>
-            <a:pPr algn="ctr" indent="0" marL="0">
-              <a:buNone/>
-            </a:pPr>
-            <a:r>
-              <a:rPr lang="en-US" sz="900" b="1" dirty="0">
-                <a:solidFill>
-                  <a:srgbClr val="9D174D"/>
-                </a:solidFill>
-                <a:latin typeface="Trebuchet MS" pitchFamily="34" charset="0"/>
-                <a:ea typeface="Trebuchet MS" pitchFamily="34" charset="-122"/>
-                <a:cs typeface="Trebuchet MS" pitchFamily="34" charset="-120"/>
-              </a:rPr>
-              <a:t>a</a:t>
-            </a:r>
-            <a:endParaRPr lang="en-US" sz="900" dirty="0"/>
-          </a:p>
-        </p:txBody>
-      </p:sp>
-      <p:sp>
-        <p:nvSpPr>
-          <p:cNvPr id="57" name="Shape 55"/>
-          <p:cNvSpPr/>
-          <p:nvPr/>
-        </p:nvSpPr>
-        <p:spPr>
-          <a:xfrm>
-            <a:off x="7677912" y="4169664"/>
-            <a:ext cx="685800" cy="384048"/>
-          </a:xfrm>
-          <a:prstGeom prst="rect">
-            <a:avLst>
-              <a:gd name="adj" fmla="val 9524"/>
-            </a:avLst>
-          </a:prstGeom>
-          <a:solidFill>
-            <a:srgbClr val="FFFFFF"/>
-          </a:solidFill>
-          <a:ln w="12700">
-            <a:solidFill>
-              <a:srgbClr val="DB2777"/>
-            </a:solidFill>
-            <a:prstDash val="solid"/>
-          </a:ln>
-        </p:spPr>
-      </p:sp>
-      <p:sp>
-        <p:nvSpPr>
-          <p:cNvPr id="58" name="Text 56"/>
-          <p:cNvSpPr/>
-          <p:nvPr/>
-        </p:nvSpPr>
-        <p:spPr>
-          <a:xfrm>
-            <a:off x="7677912" y="4169664"/>
-            <a:ext cx="685800" cy="384048"/>
-          </a:xfrm>
-          <a:prstGeom prst="rect">
-            <a:avLst/>
-          </a:prstGeom>
-          <a:noFill/>
-          <a:ln/>
-        </p:spPr>
-        <p:txBody>
-          <a:bodyPr wrap="square" lIns="0" tIns="0" rIns="0" bIns="0" rtlCol="0" anchor="ctr"/>
-          <a:lstStyle/>
-          <a:p>
-            <a:pPr algn="ctr" indent="0" marL="0">
-              <a:buNone/>
-            </a:pPr>
-            <a:r>
-              <a:rPr lang="en-US" sz="900" b="1" dirty="0">
-                <a:solidFill>
-                  <a:srgbClr val="9D174D"/>
-                </a:solidFill>
-                <a:latin typeface="Trebuchet MS" pitchFamily="34" charset="0"/>
-                <a:ea typeface="Trebuchet MS" pitchFamily="34" charset="-122"/>
-                <a:cs typeface="Trebuchet MS" pitchFamily="34" charset="-120"/>
-              </a:rPr>
-              <a:t>l</a:t>
             </a:r>
             <a:endParaRPr lang="en-US" sz="900" dirty="0"/>
           </a:p>
@@ -17958,7 +17210,7 @@
                 <a:ea typeface="Calibri" pitchFamily="34" charset="-122"/>
                 <a:cs typeface="Calibri" pitchFamily="34" charset="-120"/>
               </a:rPr>
-              <a:t>It is truly </a:t>
+              <a:t>It is a </a:t>
             </a:r>
             <a:pPr algn="l" indent="0" marL="0">
               <a:buNone/>
@@ -17975,7 +17227,7 @@
                 <a:ea typeface="Calibri" pitchFamily="34" charset="-122"/>
                 <a:cs typeface="Calibri" pitchFamily="34" charset="-120"/>
               </a:rPr>
-              <a:t>unique</a:t>
+              <a:t>universal</a:t>
             </a:r>
             <a:pPr algn="l" indent="0" marL="0">
               <a:buNone/>
@@ -17989,7 +17241,7 @@
                 <a:ea typeface="Calibri" pitchFamily="34" charset="-122"/>
                 <a:cs typeface="Calibri" pitchFamily="34" charset="-120"/>
               </a:rPr>
-              <a:t> that our school can </a:t>
+              <a:t> truth that the </a:t>
             </a:r>
             <a:pPr algn="l" indent="0" marL="0">
               <a:buNone/>
@@ -18006,7 +17258,7 @@
                 <a:ea typeface="Calibri" pitchFamily="34" charset="-122"/>
                 <a:cs typeface="Calibri" pitchFamily="34" charset="-120"/>
               </a:rPr>
-              <a:t>unify</a:t>
+              <a:t>universe</a:t>
             </a:r>
             <a:pPr algn="l" indent="0" marL="0">
               <a:buNone/>
@@ -18020,7 +17272,7 @@
                 <a:ea typeface="Calibri" pitchFamily="34" charset="-122"/>
                 <a:cs typeface="Calibri" pitchFamily="34" charset="-120"/>
               </a:rPr>
-              <a:t> so many students, creating a sense of </a:t>
+              <a:t> is </a:t>
             </a:r>
             <a:pPr algn="l" indent="0" marL="0">
               <a:buNone/>
@@ -18037,7 +17289,7 @@
                 <a:ea typeface="Calibri" pitchFamily="34" charset="-122"/>
                 <a:cs typeface="Calibri" pitchFamily="34" charset="-120"/>
               </a:rPr>
-              <a:t>unity</a:t>
+              <a:t>unique</a:t>
             </a:r>
             <a:pPr algn="l" indent="0" marL="0">
               <a:buNone/>
@@ -18051,118 +17303,343 @@
                 <a:ea typeface="Calibri" pitchFamily="34" charset="-122"/>
                 <a:cs typeface="Calibri" pitchFamily="34" charset="-120"/>
               </a:rPr>
-              <a:t> across the whole comm</a:t>
-            </a:r>
+              <a:t>, and no two planets are exactly the same.</a:t>
+            </a:r>
+            <a:endParaRPr lang="en-US" sz="1800" dirty="0"/>
+          </a:p>
+        </p:txBody>
+      </p:sp>
+      <p:sp>
+        <p:nvSpPr>
+          <p:cNvPr id="13" name="Shape 11"/>
+          <p:cNvSpPr/>
+          <p:nvPr/>
+        </p:nvSpPr>
+        <p:spPr>
+          <a:xfrm>
+            <a:off x="365760" y="2852928"/>
+            <a:ext cx="8412480" cy="475488"/>
+          </a:xfrm>
+          <a:prstGeom prst="rect">
+            <a:avLst>
+              <a:gd name="adj" fmla="val 15385"/>
+            </a:avLst>
+          </a:prstGeom>
+          <a:solidFill>
+            <a:srgbClr val="CCFBF1"/>
+          </a:solidFill>
+          <a:ln w="12700">
+            <a:solidFill>
+              <a:srgbClr val="0D9488"/>
+            </a:solidFill>
+            <a:prstDash val="solid"/>
+          </a:ln>
+        </p:spPr>
+      </p:sp>
+      <p:sp>
+        <p:nvSpPr>
+          <p:cNvPr id="14" name="Text 12"/>
+          <p:cNvSpPr/>
+          <p:nvPr/>
+        </p:nvSpPr>
+        <p:spPr>
+          <a:xfrm>
+            <a:off x="502920" y="2852928"/>
+            <a:ext cx="8229600" cy="475488"/>
+          </a:xfrm>
+          <a:prstGeom prst="rect">
+            <a:avLst/>
+          </a:prstGeom>
+          <a:noFill/>
+          <a:ln/>
+        </p:spPr>
+        <p:txBody>
+          <a:bodyPr wrap="square" rtlCol="0" anchor="ctr"/>
+          <a:lstStyle/>
+          <a:p>
             <a:pPr algn="l" indent="0" marL="0">
               <a:buNone/>
             </a:pPr>
             <a:r>
-              <a:rPr lang="en-US" sz="1800" b="1" dirty="0">
-                <a:solidFill>
-                  <a:srgbClr val="0D9488"/>
-                </a:solidFill>
-                <a:highlight>
-                  <a:srgbClr val="CCFBF1"/>
-                </a:highlight>
+              <a:rPr lang="en-US" sz="1200" b="1" dirty="0">
+                <a:solidFill>
+                  <a:srgbClr val="0F766E"/>
+                </a:solidFill>
                 <a:latin typeface="Calibri" pitchFamily="34" charset="0"/>
                 <a:ea typeface="Calibri" pitchFamily="34" charset="-122"/>
                 <a:cs typeface="Calibri" pitchFamily="34" charset="-120"/>
               </a:rPr>
-              <a:t>unity</a:t>
-            </a:r>
-            <a:pPr algn="l" indent="0" marL="0">
-              <a:buNone/>
-            </a:pPr>
-            <a:r>
-              <a:rPr lang="en-US" sz="1800" dirty="0">
-                <a:solidFill>
-                  <a:srgbClr val="0F172A"/>
+              <a:t>Now rewrite each focus word below with space between letters — leave room for your breakdown.</a:t>
+            </a:r>
+            <a:endParaRPr lang="en-US" sz="1200" dirty="0"/>
+          </a:p>
+        </p:txBody>
+      </p:sp>
+      <p:sp>
+        <p:nvSpPr>
+          <p:cNvPr id="15" name="Shape 13"/>
+          <p:cNvSpPr/>
+          <p:nvPr/>
+        </p:nvSpPr>
+        <p:spPr>
+          <a:xfrm>
+            <a:off x="411480" y="3456432"/>
+            <a:ext cx="2499360" cy="1005840"/>
+          </a:xfrm>
+          <a:prstGeom prst="rect">
+            <a:avLst>
+              <a:gd name="adj" fmla="val 7273"/>
+            </a:avLst>
+          </a:prstGeom>
+          <a:solidFill>
+            <a:srgbClr val="F8FAFC"/>
+          </a:solidFill>
+          <a:ln w="12700">
+            <a:solidFill>
+              <a:srgbClr val="E2E8F0"/>
+            </a:solidFill>
+            <a:prstDash val="solid"/>
+          </a:ln>
+        </p:spPr>
+      </p:sp>
+      <p:sp>
+        <p:nvSpPr>
+          <p:cNvPr id="16" name="Shape 14"/>
+          <p:cNvSpPr/>
+          <p:nvPr/>
+        </p:nvSpPr>
+        <p:spPr>
+          <a:xfrm>
+            <a:off x="411480" y="3977640"/>
+            <a:ext cx="2499360" cy="0"/>
+          </a:xfrm>
+          <a:prstGeom prst="line">
+            <a:avLst/>
+          </a:prstGeom>
+          <a:noFill/>
+          <a:ln w="12700">
+            <a:solidFill>
+              <a:srgbClr val="E2E8F0"/>
+            </a:solidFill>
+            <a:prstDash val="dash"/>
+          </a:ln>
+        </p:spPr>
+      </p:sp>
+      <p:sp>
+        <p:nvSpPr>
+          <p:cNvPr id="17" name="Text 15"/>
+          <p:cNvSpPr/>
+          <p:nvPr/>
+        </p:nvSpPr>
+        <p:spPr>
+          <a:xfrm>
+            <a:off x="411480" y="3456432"/>
+            <a:ext cx="2499360" cy="502920"/>
+          </a:xfrm>
+          <a:prstGeom prst="rect">
+            <a:avLst/>
+          </a:prstGeom>
+          <a:noFill/>
+          <a:ln/>
+        </p:spPr>
+        <p:txBody>
+          <a:bodyPr wrap="square" lIns="0" tIns="0" rIns="0" bIns="0" rtlCol="0" anchor="ctr"/>
+          <a:lstStyle/>
+          <a:p>
+            <a:pPr algn="ctr" indent="0" marL="0">
+              <a:buNone/>
+            </a:pPr>
+            <a:r>
+              <a:rPr lang="en-US" sz="1400" b="1" dirty="0">
+                <a:solidFill>
+                  <a:srgbClr val="0D9488"/>
+                </a:solidFill>
+                <a:latin typeface="Trebuchet MS" pitchFamily="34" charset="0"/>
+                <a:ea typeface="Trebuchet MS" pitchFamily="34" charset="-122"/>
+                <a:cs typeface="Trebuchet MS" pitchFamily="34" charset="-120"/>
+              </a:rPr>
+              <a:t>universal</a:t>
+            </a:r>
+            <a:endParaRPr lang="en-US" sz="1400" dirty="0"/>
+          </a:p>
+        </p:txBody>
+      </p:sp>
+      <p:sp>
+        <p:nvSpPr>
+          <p:cNvPr id="18" name="Text 16"/>
+          <p:cNvSpPr/>
+          <p:nvPr/>
+        </p:nvSpPr>
+        <p:spPr>
+          <a:xfrm>
+            <a:off x="411480" y="4005072"/>
+            <a:ext cx="2499360" cy="457200"/>
+          </a:xfrm>
+          <a:prstGeom prst="rect">
+            <a:avLst/>
+          </a:prstGeom>
+          <a:noFill/>
+          <a:ln/>
+        </p:spPr>
+        <p:txBody>
+          <a:bodyPr wrap="square" lIns="0" tIns="0" rIns="0" bIns="0" rtlCol="0" anchor="ctr"/>
+          <a:lstStyle/>
+          <a:p>
+            <a:pPr algn="ctr" indent="0" marL="0">
+              <a:buNone/>
+            </a:pPr>
+            <a:r>
+              <a:rPr lang="en-US" sz="900" i="1" dirty="0">
+                <a:solidFill>
+                  <a:srgbClr val="475569"/>
                 </a:solidFill>
                 <a:latin typeface="Calibri" pitchFamily="34" charset="0"/>
                 <a:ea typeface="Calibri" pitchFamily="34" charset="-122"/>
                 <a:cs typeface="Calibri" pitchFamily="34" charset="-120"/>
               </a:rPr>
-              <a:t>.</a:t>
-            </a:r>
-            <a:endParaRPr lang="en-US" sz="1800" dirty="0"/>
-          </a:p>
-        </p:txBody>
-      </p:sp>
-      <p:sp>
-        <p:nvSpPr>
-          <p:cNvPr id="13" name="Shape 11"/>
-          <p:cNvSpPr/>
-          <p:nvPr/>
-        </p:nvSpPr>
-        <p:spPr>
-          <a:xfrm>
-            <a:off x="365760" y="2852928"/>
-            <a:ext cx="8412480" cy="475488"/>
+              <a:t>write your breakdown below</a:t>
+            </a:r>
+            <a:endParaRPr lang="en-US" sz="900" dirty="0"/>
+          </a:p>
+        </p:txBody>
+      </p:sp>
+      <p:sp>
+        <p:nvSpPr>
+          <p:cNvPr id="19" name="Shape 17"/>
+          <p:cNvSpPr/>
+          <p:nvPr/>
+        </p:nvSpPr>
+        <p:spPr>
+          <a:xfrm>
+            <a:off x="3185160" y="3456432"/>
+            <a:ext cx="2499360" cy="1005840"/>
           </a:xfrm>
           <a:prstGeom prst="rect">
             <a:avLst>
-              <a:gd name="adj" fmla="val 15385"/>
+              <a:gd name="adj" fmla="val 7273"/>
             </a:avLst>
           </a:prstGeom>
           <a:solidFill>
-            <a:srgbClr val="CCFBF1"/>
-          </a:solidFill>
-          <a:ln w="12700">
-            <a:solidFill>
-              <a:srgbClr val="0D9488"/>
-            </a:solidFill>
-            <a:prstDash val="solid"/>
-          </a:ln>
-        </p:spPr>
-      </p:sp>
-      <p:sp>
-        <p:nvSpPr>
-          <p:cNvPr id="14" name="Text 12"/>
-          <p:cNvSpPr/>
-          <p:nvPr/>
-        </p:nvSpPr>
-        <p:spPr>
-          <a:xfrm>
-            <a:off x="502920" y="2852928"/>
-            <a:ext cx="8229600" cy="475488"/>
-          </a:xfrm>
-          <a:prstGeom prst="rect">
-            <a:avLst/>
-          </a:prstGeom>
-          <a:noFill/>
-          <a:ln/>
-        </p:spPr>
-        <p:txBody>
-          <a:bodyPr wrap="square" rtlCol="0" anchor="ctr"/>
-          <a:lstStyle/>
-          <a:p>
-            <a:pPr algn="l" indent="0" marL="0">
-              <a:buNone/>
-            </a:pPr>
-            <a:r>
-              <a:rPr lang="en-US" sz="1200" b="1" dirty="0">
-                <a:solidFill>
-                  <a:srgbClr val="0F766E"/>
+            <a:srgbClr val="F8FAFC"/>
+          </a:solidFill>
+          <a:ln w="12700">
+            <a:solidFill>
+              <a:srgbClr val="E2E8F0"/>
+            </a:solidFill>
+            <a:prstDash val="solid"/>
+          </a:ln>
+        </p:spPr>
+      </p:sp>
+      <p:sp>
+        <p:nvSpPr>
+          <p:cNvPr id="20" name="Shape 18"/>
+          <p:cNvSpPr/>
+          <p:nvPr/>
+        </p:nvSpPr>
+        <p:spPr>
+          <a:xfrm>
+            <a:off x="3185160" y="3977640"/>
+            <a:ext cx="2499360" cy="0"/>
+          </a:xfrm>
+          <a:prstGeom prst="line">
+            <a:avLst/>
+          </a:prstGeom>
+          <a:noFill/>
+          <a:ln w="12700">
+            <a:solidFill>
+              <a:srgbClr val="E2E8F0"/>
+            </a:solidFill>
+            <a:prstDash val="dash"/>
+          </a:ln>
+        </p:spPr>
+      </p:sp>
+      <p:sp>
+        <p:nvSpPr>
+          <p:cNvPr id="21" name="Text 19"/>
+          <p:cNvSpPr/>
+          <p:nvPr/>
+        </p:nvSpPr>
+        <p:spPr>
+          <a:xfrm>
+            <a:off x="3185160" y="3456432"/>
+            <a:ext cx="2499360" cy="502920"/>
+          </a:xfrm>
+          <a:prstGeom prst="rect">
+            <a:avLst/>
+          </a:prstGeom>
+          <a:noFill/>
+          <a:ln/>
+        </p:spPr>
+        <p:txBody>
+          <a:bodyPr wrap="square" lIns="0" tIns="0" rIns="0" bIns="0" rtlCol="0" anchor="ctr"/>
+          <a:lstStyle/>
+          <a:p>
+            <a:pPr algn="ctr" indent="0" marL="0">
+              <a:buNone/>
+            </a:pPr>
+            <a:r>
+              <a:rPr lang="en-US" sz="1400" b="1" dirty="0">
+                <a:solidFill>
+                  <a:srgbClr val="0D9488"/>
+                </a:solidFill>
+                <a:latin typeface="Trebuchet MS" pitchFamily="34" charset="0"/>
+                <a:ea typeface="Trebuchet MS" pitchFamily="34" charset="-122"/>
+                <a:cs typeface="Trebuchet MS" pitchFamily="34" charset="-120"/>
+              </a:rPr>
+              <a:t>universe</a:t>
+            </a:r>
+            <a:endParaRPr lang="en-US" sz="1400" dirty="0"/>
+          </a:p>
+        </p:txBody>
+      </p:sp>
+      <p:sp>
+        <p:nvSpPr>
+          <p:cNvPr id="22" name="Text 20"/>
+          <p:cNvSpPr/>
+          <p:nvPr/>
+        </p:nvSpPr>
+        <p:spPr>
+          <a:xfrm>
+            <a:off x="3185160" y="4005072"/>
+            <a:ext cx="2499360" cy="457200"/>
+          </a:xfrm>
+          <a:prstGeom prst="rect">
+            <a:avLst/>
+          </a:prstGeom>
+          <a:noFill/>
+          <a:ln/>
+        </p:spPr>
+        <p:txBody>
+          <a:bodyPr wrap="square" lIns="0" tIns="0" rIns="0" bIns="0" rtlCol="0" anchor="ctr"/>
+          <a:lstStyle/>
+          <a:p>
+            <a:pPr algn="ctr" indent="0" marL="0">
+              <a:buNone/>
+            </a:pPr>
+            <a:r>
+              <a:rPr lang="en-US" sz="900" i="1" dirty="0">
+                <a:solidFill>
+                  <a:srgbClr val="475569"/>
                 </a:solidFill>
                 <a:latin typeface="Calibri" pitchFamily="34" charset="0"/>
                 <a:ea typeface="Calibri" pitchFamily="34" charset="-122"/>
                 <a:cs typeface="Calibri" pitchFamily="34" charset="-120"/>
               </a:rPr>
-              <a:t>Now rewrite each focus word below with space between letters — leave room for your breakdown.</a:t>
-            </a:r>
-            <a:endParaRPr lang="en-US" sz="1200" dirty="0"/>
-          </a:p>
-        </p:txBody>
-      </p:sp>
-      <p:sp>
-        <p:nvSpPr>
-          <p:cNvPr id="15" name="Shape 13"/>
-          <p:cNvSpPr/>
-          <p:nvPr/>
-        </p:nvSpPr>
-        <p:spPr>
-          <a:xfrm>
-            <a:off x="411480" y="3456432"/>
+              <a:t>write your breakdown below</a:t>
+            </a:r>
+            <a:endParaRPr lang="en-US" sz="900" dirty="0"/>
+          </a:p>
+        </p:txBody>
+      </p:sp>
+      <p:sp>
+        <p:nvSpPr>
+          <p:cNvPr id="23" name="Shape 21"/>
+          <p:cNvSpPr/>
+          <p:nvPr/>
+        </p:nvSpPr>
+        <p:spPr>
+          <a:xfrm>
+            <a:off x="5958840" y="3456432"/>
             <a:ext cx="2499360" cy="1005840"/>
           </a:xfrm>
           <a:prstGeom prst="rect">
@@ -18183,13 +17660,13 @@
       </p:sp>
       <p:sp>
         <p:nvSpPr>
-          <p:cNvPr id="16" name="Shape 14"/>
-          <p:cNvSpPr/>
-          <p:nvPr/>
-        </p:nvSpPr>
-        <p:spPr>
-          <a:xfrm>
-            <a:off x="411480" y="3977640"/>
+          <p:cNvPr id="24" name="Shape 22"/>
+          <p:cNvSpPr/>
+          <p:nvPr/>
+        </p:nvSpPr>
+        <p:spPr>
+          <a:xfrm>
+            <a:off x="5958840" y="3977640"/>
             <a:ext cx="2499360" cy="0"/>
           </a:xfrm>
           <a:prstGeom prst="line">
@@ -18206,13 +17683,13 @@
       </p:sp>
       <p:sp>
         <p:nvSpPr>
-          <p:cNvPr id="17" name="Text 15"/>
-          <p:cNvSpPr/>
-          <p:nvPr/>
-        </p:nvSpPr>
-        <p:spPr>
-          <a:xfrm>
-            <a:off x="411480" y="3456432"/>
+          <p:cNvPr id="25" name="Text 23"/>
+          <p:cNvSpPr/>
+          <p:nvPr/>
+        </p:nvSpPr>
+        <p:spPr>
+          <a:xfrm>
+            <a:off x="5958840" y="3456432"/>
             <a:ext cx="2499360" cy="502920"/>
           </a:xfrm>
           <a:prstGeom prst="rect">
@@ -18238,262 +17715,6 @@
                 <a:cs typeface="Trebuchet MS" pitchFamily="34" charset="-120"/>
               </a:rPr>
               <a:t>unique</a:t>
-            </a:r>
-            <a:endParaRPr lang="en-US" sz="1400" dirty="0"/>
-          </a:p>
-        </p:txBody>
-      </p:sp>
-      <p:sp>
-        <p:nvSpPr>
-          <p:cNvPr id="18" name="Text 16"/>
-          <p:cNvSpPr/>
-          <p:nvPr/>
-        </p:nvSpPr>
-        <p:spPr>
-          <a:xfrm>
-            <a:off x="411480" y="4005072"/>
-            <a:ext cx="2499360" cy="457200"/>
-          </a:xfrm>
-          <a:prstGeom prst="rect">
-            <a:avLst/>
-          </a:prstGeom>
-          <a:noFill/>
-          <a:ln/>
-        </p:spPr>
-        <p:txBody>
-          <a:bodyPr wrap="square" lIns="0" tIns="0" rIns="0" bIns="0" rtlCol="0" anchor="ctr"/>
-          <a:lstStyle/>
-          <a:p>
-            <a:pPr algn="ctr" indent="0" marL="0">
-              <a:buNone/>
-            </a:pPr>
-            <a:r>
-              <a:rPr lang="en-US" sz="900" i="1" dirty="0">
-                <a:solidFill>
-                  <a:srgbClr val="475569"/>
-                </a:solidFill>
-                <a:latin typeface="Calibri" pitchFamily="34" charset="0"/>
-                <a:ea typeface="Calibri" pitchFamily="34" charset="-122"/>
-                <a:cs typeface="Calibri" pitchFamily="34" charset="-120"/>
-              </a:rPr>
-              <a:t>write your breakdown below</a:t>
-            </a:r>
-            <a:endParaRPr lang="en-US" sz="900" dirty="0"/>
-          </a:p>
-        </p:txBody>
-      </p:sp>
-      <p:sp>
-        <p:nvSpPr>
-          <p:cNvPr id="19" name="Shape 17"/>
-          <p:cNvSpPr/>
-          <p:nvPr/>
-        </p:nvSpPr>
-        <p:spPr>
-          <a:xfrm>
-            <a:off x="3185160" y="3456432"/>
-            <a:ext cx="2499360" cy="1005840"/>
-          </a:xfrm>
-          <a:prstGeom prst="rect">
-            <a:avLst>
-              <a:gd name="adj" fmla="val 7273"/>
-            </a:avLst>
-          </a:prstGeom>
-          <a:solidFill>
-            <a:srgbClr val="F8FAFC"/>
-          </a:solidFill>
-          <a:ln w="12700">
-            <a:solidFill>
-              <a:srgbClr val="E2E8F0"/>
-            </a:solidFill>
-            <a:prstDash val="solid"/>
-          </a:ln>
-        </p:spPr>
-      </p:sp>
-      <p:sp>
-        <p:nvSpPr>
-          <p:cNvPr id="20" name="Shape 18"/>
-          <p:cNvSpPr/>
-          <p:nvPr/>
-        </p:nvSpPr>
-        <p:spPr>
-          <a:xfrm>
-            <a:off x="3185160" y="3977640"/>
-            <a:ext cx="2499360" cy="0"/>
-          </a:xfrm>
-          <a:prstGeom prst="line">
-            <a:avLst/>
-          </a:prstGeom>
-          <a:noFill/>
-          <a:ln w="12700">
-            <a:solidFill>
-              <a:srgbClr val="E2E8F0"/>
-            </a:solidFill>
-            <a:prstDash val="dash"/>
-          </a:ln>
-        </p:spPr>
-      </p:sp>
-      <p:sp>
-        <p:nvSpPr>
-          <p:cNvPr id="21" name="Text 19"/>
-          <p:cNvSpPr/>
-          <p:nvPr/>
-        </p:nvSpPr>
-        <p:spPr>
-          <a:xfrm>
-            <a:off x="3185160" y="3456432"/>
-            <a:ext cx="2499360" cy="502920"/>
-          </a:xfrm>
-          <a:prstGeom prst="rect">
-            <a:avLst/>
-          </a:prstGeom>
-          <a:noFill/>
-          <a:ln/>
-        </p:spPr>
-        <p:txBody>
-          <a:bodyPr wrap="square" lIns="0" tIns="0" rIns="0" bIns="0" rtlCol="0" anchor="ctr"/>
-          <a:lstStyle/>
-          <a:p>
-            <a:pPr algn="ctr" indent="0" marL="0">
-              <a:buNone/>
-            </a:pPr>
-            <a:r>
-              <a:rPr lang="en-US" sz="1400" b="1" dirty="0">
-                <a:solidFill>
-                  <a:srgbClr val="0D9488"/>
-                </a:solidFill>
-                <a:latin typeface="Trebuchet MS" pitchFamily="34" charset="0"/>
-                <a:ea typeface="Trebuchet MS" pitchFamily="34" charset="-122"/>
-                <a:cs typeface="Trebuchet MS" pitchFamily="34" charset="-120"/>
-              </a:rPr>
-              <a:t>unify</a:t>
-            </a:r>
-            <a:endParaRPr lang="en-US" sz="1400" dirty="0"/>
-          </a:p>
-        </p:txBody>
-      </p:sp>
-      <p:sp>
-        <p:nvSpPr>
-          <p:cNvPr id="22" name="Text 20"/>
-          <p:cNvSpPr/>
-          <p:nvPr/>
-        </p:nvSpPr>
-        <p:spPr>
-          <a:xfrm>
-            <a:off x="3185160" y="4005072"/>
-            <a:ext cx="2499360" cy="457200"/>
-          </a:xfrm>
-          <a:prstGeom prst="rect">
-            <a:avLst/>
-          </a:prstGeom>
-          <a:noFill/>
-          <a:ln/>
-        </p:spPr>
-        <p:txBody>
-          <a:bodyPr wrap="square" lIns="0" tIns="0" rIns="0" bIns="0" rtlCol="0" anchor="ctr"/>
-          <a:lstStyle/>
-          <a:p>
-            <a:pPr algn="ctr" indent="0" marL="0">
-              <a:buNone/>
-            </a:pPr>
-            <a:r>
-              <a:rPr lang="en-US" sz="900" i="1" dirty="0">
-                <a:solidFill>
-                  <a:srgbClr val="475569"/>
-                </a:solidFill>
-                <a:latin typeface="Calibri" pitchFamily="34" charset="0"/>
-                <a:ea typeface="Calibri" pitchFamily="34" charset="-122"/>
-                <a:cs typeface="Calibri" pitchFamily="34" charset="-120"/>
-              </a:rPr>
-              <a:t>write your breakdown below</a:t>
-            </a:r>
-            <a:endParaRPr lang="en-US" sz="900" dirty="0"/>
-          </a:p>
-        </p:txBody>
-      </p:sp>
-      <p:sp>
-        <p:nvSpPr>
-          <p:cNvPr id="23" name="Shape 21"/>
-          <p:cNvSpPr/>
-          <p:nvPr/>
-        </p:nvSpPr>
-        <p:spPr>
-          <a:xfrm>
-            <a:off x="5958840" y="3456432"/>
-            <a:ext cx="2499360" cy="1005840"/>
-          </a:xfrm>
-          <a:prstGeom prst="rect">
-            <a:avLst>
-              <a:gd name="adj" fmla="val 7273"/>
-            </a:avLst>
-          </a:prstGeom>
-          <a:solidFill>
-            <a:srgbClr val="F8FAFC"/>
-          </a:solidFill>
-          <a:ln w="12700">
-            <a:solidFill>
-              <a:srgbClr val="E2E8F0"/>
-            </a:solidFill>
-            <a:prstDash val="solid"/>
-          </a:ln>
-        </p:spPr>
-      </p:sp>
-      <p:sp>
-        <p:nvSpPr>
-          <p:cNvPr id="24" name="Shape 22"/>
-          <p:cNvSpPr/>
-          <p:nvPr/>
-        </p:nvSpPr>
-        <p:spPr>
-          <a:xfrm>
-            <a:off x="5958840" y="3977640"/>
-            <a:ext cx="2499360" cy="0"/>
-          </a:xfrm>
-          <a:prstGeom prst="line">
-            <a:avLst/>
-          </a:prstGeom>
-          <a:noFill/>
-          <a:ln w="12700">
-            <a:solidFill>
-              <a:srgbClr val="E2E8F0"/>
-            </a:solidFill>
-            <a:prstDash val="dash"/>
-          </a:ln>
-        </p:spPr>
-      </p:sp>
-      <p:sp>
-        <p:nvSpPr>
-          <p:cNvPr id="25" name="Text 23"/>
-          <p:cNvSpPr/>
-          <p:nvPr/>
-        </p:nvSpPr>
-        <p:spPr>
-          <a:xfrm>
-            <a:off x="5958840" y="3456432"/>
-            <a:ext cx="2499360" cy="502920"/>
-          </a:xfrm>
-          <a:prstGeom prst="rect">
-            <a:avLst/>
-          </a:prstGeom>
-          <a:noFill/>
-          <a:ln/>
-        </p:spPr>
-        <p:txBody>
-          <a:bodyPr wrap="square" lIns="0" tIns="0" rIns="0" bIns="0" rtlCol="0" anchor="ctr"/>
-          <a:lstStyle/>
-          <a:p>
-            <a:pPr algn="ctr" indent="0" marL="0">
-              <a:buNone/>
-            </a:pPr>
-            <a:r>
-              <a:rPr lang="en-US" sz="1400" b="1" dirty="0">
-                <a:solidFill>
-                  <a:srgbClr val="0D9488"/>
-                </a:solidFill>
-                <a:latin typeface="Trebuchet MS" pitchFamily="34" charset="0"/>
-                <a:ea typeface="Trebuchet MS" pitchFamily="34" charset="-122"/>
-                <a:cs typeface="Trebuchet MS" pitchFamily="34" charset="-120"/>
-              </a:rPr>
-              <a:t>unity</a:t>
             </a:r>
             <a:endParaRPr lang="en-US" sz="1400" dirty="0"/>
           </a:p>
@@ -18963,7 +18184,7 @@
                 <a:ea typeface="Trebuchet MS" pitchFamily="34" charset="-122"/>
                 <a:cs typeface="Trebuchet MS" pitchFamily="34" charset="-120"/>
               </a:rPr>
-              <a:t>unique</a:t>
+              <a:t>universal</a:t>
             </a:r>
             <a:endParaRPr lang="en-US" sz="2800" dirty="0"/>
           </a:p>
@@ -19790,7 +19011,7 @@
                 <a:ea typeface="Trebuchet MS" pitchFamily="34" charset="-122"/>
                 <a:cs typeface="Trebuchet MS" pitchFamily="34" charset="-120"/>
               </a:rPr>
-              <a:t>unique</a:t>
+              <a:t>universal</a:t>
             </a:r>
             <a:endParaRPr lang="en-US" sz="2800" dirty="0"/>
           </a:p>
@@ -19870,7 +19091,7 @@
         </p:nvSpPr>
         <p:spPr>
           <a:xfrm>
-            <a:off x="2938272" y="2258568"/>
+            <a:off x="2221992" y="2258568"/>
             <a:ext cx="1828800" cy="292608"/>
           </a:xfrm>
           <a:prstGeom prst="rect">
@@ -19904,7 +19125,7 @@
         </p:nvSpPr>
         <p:spPr>
           <a:xfrm>
-            <a:off x="2938272" y="2258568"/>
+            <a:off x="2221992" y="2258568"/>
             <a:ext cx="1828800" cy="292608"/>
           </a:xfrm>
           <a:prstGeom prst="rect">
@@ -19943,7 +19164,7 @@
         </p:nvSpPr>
         <p:spPr>
           <a:xfrm>
-            <a:off x="2938272" y="2569464"/>
+            <a:off x="2221992" y="2569464"/>
             <a:ext cx="1828800" cy="201168"/>
           </a:xfrm>
           <a:prstGeom prst="rect">
@@ -19982,7 +19203,7 @@
         </p:nvSpPr>
         <p:spPr>
           <a:xfrm>
-            <a:off x="5803392" y="2258568"/>
+            <a:off x="4370832" y="2258568"/>
             <a:ext cx="1828800" cy="292608"/>
           </a:xfrm>
           <a:prstGeom prst="rect">
@@ -20016,7 +19237,7 @@
         </p:nvSpPr>
         <p:spPr>
           <a:xfrm>
-            <a:off x="5803392" y="2258568"/>
+            <a:off x="4370832" y="2258568"/>
             <a:ext cx="1828800" cy="292608"/>
           </a:xfrm>
           <a:prstGeom prst="rect">
@@ -20041,7 +19262,7 @@
                 <a:ea typeface="Trebuchet MS" pitchFamily="34" charset="-122"/>
                 <a:cs typeface="Trebuchet MS" pitchFamily="34" charset="-120"/>
               </a:rPr>
-              <a:t>que</a:t>
+              <a:t>vers</a:t>
             </a:r>
             <a:endParaRPr lang="en-US" sz="1300" dirty="0"/>
           </a:p>
@@ -20055,7 +19276,7 @@
         </p:nvSpPr>
         <p:spPr>
           <a:xfrm>
-            <a:off x="5803392" y="2569464"/>
+            <a:off x="4370832" y="2569464"/>
             <a:ext cx="1828800" cy="201168"/>
           </a:xfrm>
           <a:prstGeom prst="rect">
@@ -20080,7 +19301,7 @@
                 <a:ea typeface="Calibri" pitchFamily="34" charset="-122"/>
                 <a:cs typeface="Calibri" pitchFamily="34" charset="-120"/>
               </a:rPr>
-              <a:t>kind or type</a:t>
+              <a:t>to turn</a:t>
             </a:r>
             <a:endParaRPr lang="en-US" sz="850" dirty="0"/>
           </a:p>
@@ -20089,6 +19310,118 @@
       <p:sp>
         <p:nvSpPr>
           <p:cNvPr id="22" name="Shape 20"/>
+          <p:cNvSpPr/>
+          <p:nvPr/>
+        </p:nvSpPr>
+        <p:spPr>
+          <a:xfrm>
+            <a:off x="6519672" y="2258568"/>
+            <a:ext cx="1828800" cy="292608"/>
+          </a:xfrm>
+          <a:prstGeom prst="rect">
+            <a:avLst>
+              <a:gd name="adj" fmla="val 25000"/>
+            </a:avLst>
+          </a:prstGeom>
+          <a:solidFill>
+            <a:srgbClr val="FCE7F3"/>
+          </a:solidFill>
+          <a:ln w="19050">
+            <a:solidFill>
+              <a:srgbClr val="DB2777"/>
+            </a:solidFill>
+            <a:prstDash val="solid"/>
+          </a:ln>
+          <a:effectLst>
+            <a:outerShdw sx="100000" sy="100000" kx="0" ky="0" algn="bl" rotWithShape="0" blurRad="101600" dist="38100" dir="8100000">
+              <a:srgbClr val="000000">
+                <a:alpha val="12000"/>
+              </a:srgbClr>
+            </a:outerShdw>
+          </a:effectLst>
+        </p:spPr>
+      </p:sp>
+      <p:sp>
+        <p:nvSpPr>
+          <p:cNvPr id="23" name="Text 21"/>
+          <p:cNvSpPr/>
+          <p:nvPr/>
+        </p:nvSpPr>
+        <p:spPr>
+          <a:xfrm>
+            <a:off x="6519672" y="2258568"/>
+            <a:ext cx="1828800" cy="292608"/>
+          </a:xfrm>
+          <a:prstGeom prst="rect">
+            <a:avLst/>
+          </a:prstGeom>
+          <a:noFill/>
+          <a:ln/>
+        </p:spPr>
+        <p:txBody>
+          <a:bodyPr wrap="square" lIns="0" tIns="0" rIns="0" bIns="0" rtlCol="0" anchor="ctr"/>
+          <a:lstStyle/>
+          <a:p>
+            <a:pPr algn="ctr" indent="0" marL="0">
+              <a:buNone/>
+            </a:pPr>
+            <a:r>
+              <a:rPr lang="en-US" sz="1300" b="1" dirty="0">
+                <a:solidFill>
+                  <a:srgbClr val="9D174D"/>
+                </a:solidFill>
+                <a:latin typeface="Trebuchet MS" pitchFamily="34" charset="0"/>
+                <a:ea typeface="Trebuchet MS" pitchFamily="34" charset="-122"/>
+                <a:cs typeface="Trebuchet MS" pitchFamily="34" charset="-120"/>
+              </a:rPr>
+              <a:t>al</a:t>
+            </a:r>
+            <a:endParaRPr lang="en-US" sz="1300" dirty="0"/>
+          </a:p>
+        </p:txBody>
+      </p:sp>
+      <p:sp>
+        <p:nvSpPr>
+          <p:cNvPr id="24" name="Text 22"/>
+          <p:cNvSpPr/>
+          <p:nvPr/>
+        </p:nvSpPr>
+        <p:spPr>
+          <a:xfrm>
+            <a:off x="6519672" y="2569464"/>
+            <a:ext cx="1828800" cy="201168"/>
+          </a:xfrm>
+          <a:prstGeom prst="rect">
+            <a:avLst/>
+          </a:prstGeom>
+          <a:noFill/>
+          <a:ln/>
+        </p:spPr>
+        <p:txBody>
+          <a:bodyPr wrap="square" lIns="0" tIns="0" rIns="0" bIns="0" rtlCol="0" anchor="t"/>
+          <a:lstStyle/>
+          <a:p>
+            <a:pPr algn="ctr" indent="0" marL="0">
+              <a:buNone/>
+            </a:pPr>
+            <a:r>
+              <a:rPr lang="en-US" sz="850" dirty="0">
+                <a:solidFill>
+                  <a:srgbClr val="475569"/>
+                </a:solidFill>
+                <a:latin typeface="Calibri" pitchFamily="34" charset="0"/>
+                <a:ea typeface="Calibri" pitchFamily="34" charset="-122"/>
+                <a:cs typeface="Calibri" pitchFamily="34" charset="-120"/>
+              </a:rPr>
+              <a:t>relating to</a:t>
+            </a:r>
+            <a:endParaRPr lang="en-US" sz="850" dirty="0"/>
+          </a:p>
+        </p:txBody>
+      </p:sp>
+      <p:sp>
+        <p:nvSpPr>
+          <p:cNvPr id="25" name="Shape 23"/>
           <p:cNvSpPr/>
           <p:nvPr/>
         </p:nvSpPr>
@@ -20115,7 +19448,7 @@
       </p:sp>
       <p:sp>
         <p:nvSpPr>
-          <p:cNvPr id="23" name="Text 21"/>
+          <p:cNvPr id="26" name="Text 24"/>
           <p:cNvSpPr/>
           <p:nvPr/>
         </p:nvSpPr>
@@ -20154,7 +19487,7 @@
       </p:sp>
       <p:sp>
         <p:nvSpPr>
-          <p:cNvPr id="24" name="Shape 22"/>
+          <p:cNvPr id="27" name="Shape 25"/>
           <p:cNvSpPr/>
           <p:nvPr/>
         </p:nvSpPr>
@@ -20181,7 +19514,7 @@
       </p:sp>
       <p:sp>
         <p:nvSpPr>
-          <p:cNvPr id="25" name="Text 23"/>
+          <p:cNvPr id="28" name="Text 26"/>
           <p:cNvSpPr/>
           <p:nvPr/>
         </p:nvSpPr>
@@ -20220,7 +19553,7 @@
       </p:sp>
       <p:sp>
         <p:nvSpPr>
-          <p:cNvPr id="26" name="Shape 24"/>
+          <p:cNvPr id="29" name="Shape 27"/>
           <p:cNvSpPr/>
           <p:nvPr/>
         </p:nvSpPr>
@@ -20247,7 +19580,7 @@
       </p:sp>
       <p:sp>
         <p:nvSpPr>
-          <p:cNvPr id="27" name="Text 25"/>
+          <p:cNvPr id="30" name="Text 28"/>
           <p:cNvSpPr/>
           <p:nvPr/>
         </p:nvSpPr>
@@ -20286,7 +19619,7 @@
       </p:sp>
       <p:sp>
         <p:nvSpPr>
-          <p:cNvPr id="28" name="Shape 26"/>
+          <p:cNvPr id="31" name="Shape 29"/>
           <p:cNvSpPr/>
           <p:nvPr/>
         </p:nvSpPr>
@@ -20313,7 +19646,7 @@
       </p:sp>
       <p:sp>
         <p:nvSpPr>
-          <p:cNvPr id="29" name="Text 27"/>
+          <p:cNvPr id="32" name="Text 30"/>
           <p:cNvSpPr/>
           <p:nvPr/>
         </p:nvSpPr>
@@ -20775,7 +20108,7 @@
                 <a:ea typeface="Trebuchet MS" pitchFamily="34" charset="-122"/>
                 <a:cs typeface="Trebuchet MS" pitchFamily="34" charset="-120"/>
               </a:rPr>
-              <a:t>unique</a:t>
+              <a:t>universal</a:t>
             </a:r>
             <a:endParaRPr lang="en-US" sz="2800" dirty="0"/>
           </a:p>
@@ -20855,7 +20188,7 @@
         </p:nvSpPr>
         <p:spPr>
           <a:xfrm>
-            <a:off x="2938272" y="2258568"/>
+            <a:off x="2221992" y="2258568"/>
             <a:ext cx="1828800" cy="292608"/>
           </a:xfrm>
           <a:prstGeom prst="rect">
@@ -20889,7 +20222,7 @@
         </p:nvSpPr>
         <p:spPr>
           <a:xfrm>
-            <a:off x="2938272" y="2258568"/>
+            <a:off x="2221992" y="2258568"/>
             <a:ext cx="1828800" cy="292608"/>
           </a:xfrm>
           <a:prstGeom prst="rect">
@@ -20928,7 +20261,7 @@
         </p:nvSpPr>
         <p:spPr>
           <a:xfrm>
-            <a:off x="2938272" y="2569464"/>
+            <a:off x="2221992" y="2569464"/>
             <a:ext cx="1828800" cy="201168"/>
           </a:xfrm>
           <a:prstGeom prst="rect">
@@ -20967,7 +20300,7 @@
         </p:nvSpPr>
         <p:spPr>
           <a:xfrm>
-            <a:off x="5803392" y="2258568"/>
+            <a:off x="4370832" y="2258568"/>
             <a:ext cx="1828800" cy="292608"/>
           </a:xfrm>
           <a:prstGeom prst="rect">
@@ -21001,7 +20334,7 @@
         </p:nvSpPr>
         <p:spPr>
           <a:xfrm>
-            <a:off x="5803392" y="2258568"/>
+            <a:off x="4370832" y="2258568"/>
             <a:ext cx="1828800" cy="292608"/>
           </a:xfrm>
           <a:prstGeom prst="rect">
@@ -21026,7 +20359,7 @@
                 <a:ea typeface="Trebuchet MS" pitchFamily="34" charset="-122"/>
                 <a:cs typeface="Trebuchet MS" pitchFamily="34" charset="-120"/>
               </a:rPr>
-              <a:t>que</a:t>
+              <a:t>vers</a:t>
             </a:r>
             <a:endParaRPr lang="en-US" sz="1300" dirty="0"/>
           </a:p>
@@ -21040,7 +20373,7 @@
         </p:nvSpPr>
         <p:spPr>
           <a:xfrm>
-            <a:off x="5803392" y="2569464"/>
+            <a:off x="4370832" y="2569464"/>
             <a:ext cx="1828800" cy="201168"/>
           </a:xfrm>
           <a:prstGeom prst="rect">
@@ -21065,7 +20398,7 @@
                 <a:ea typeface="Calibri" pitchFamily="34" charset="-122"/>
                 <a:cs typeface="Calibri" pitchFamily="34" charset="-120"/>
               </a:rPr>
-              <a:t>kind or type</a:t>
+              <a:t>to turn</a:t>
             </a:r>
             <a:endParaRPr lang="en-US" sz="850" dirty="0"/>
           </a:p>
@@ -21074,6 +20407,118 @@
       <p:sp>
         <p:nvSpPr>
           <p:cNvPr id="22" name="Shape 20"/>
+          <p:cNvSpPr/>
+          <p:nvPr/>
+        </p:nvSpPr>
+        <p:spPr>
+          <a:xfrm>
+            <a:off x="6519672" y="2258568"/>
+            <a:ext cx="1828800" cy="292608"/>
+          </a:xfrm>
+          <a:prstGeom prst="rect">
+            <a:avLst>
+              <a:gd name="adj" fmla="val 25000"/>
+            </a:avLst>
+          </a:prstGeom>
+          <a:solidFill>
+            <a:srgbClr val="FCE7F3"/>
+          </a:solidFill>
+          <a:ln w="19050">
+            <a:solidFill>
+              <a:srgbClr val="DB2777"/>
+            </a:solidFill>
+            <a:prstDash val="solid"/>
+          </a:ln>
+          <a:effectLst>
+            <a:outerShdw sx="100000" sy="100000" kx="0" ky="0" algn="bl" rotWithShape="0" blurRad="101600" dist="38100" dir="8100000">
+              <a:srgbClr val="000000">
+                <a:alpha val="12000"/>
+              </a:srgbClr>
+            </a:outerShdw>
+          </a:effectLst>
+        </p:spPr>
+      </p:sp>
+      <p:sp>
+        <p:nvSpPr>
+          <p:cNvPr id="23" name="Text 21"/>
+          <p:cNvSpPr/>
+          <p:nvPr/>
+        </p:nvSpPr>
+        <p:spPr>
+          <a:xfrm>
+            <a:off x="6519672" y="2258568"/>
+            <a:ext cx="1828800" cy="292608"/>
+          </a:xfrm>
+          <a:prstGeom prst="rect">
+            <a:avLst/>
+          </a:prstGeom>
+          <a:noFill/>
+          <a:ln/>
+        </p:spPr>
+        <p:txBody>
+          <a:bodyPr wrap="square" lIns="0" tIns="0" rIns="0" bIns="0" rtlCol="0" anchor="ctr"/>
+          <a:lstStyle/>
+          <a:p>
+            <a:pPr algn="ctr" indent="0" marL="0">
+              <a:buNone/>
+            </a:pPr>
+            <a:r>
+              <a:rPr lang="en-US" sz="1300" b="1" dirty="0">
+                <a:solidFill>
+                  <a:srgbClr val="9D174D"/>
+                </a:solidFill>
+                <a:latin typeface="Trebuchet MS" pitchFamily="34" charset="0"/>
+                <a:ea typeface="Trebuchet MS" pitchFamily="34" charset="-122"/>
+                <a:cs typeface="Trebuchet MS" pitchFamily="34" charset="-120"/>
+              </a:rPr>
+              <a:t>al</a:t>
+            </a:r>
+            <a:endParaRPr lang="en-US" sz="1300" dirty="0"/>
+          </a:p>
+        </p:txBody>
+      </p:sp>
+      <p:sp>
+        <p:nvSpPr>
+          <p:cNvPr id="24" name="Text 22"/>
+          <p:cNvSpPr/>
+          <p:nvPr/>
+        </p:nvSpPr>
+        <p:spPr>
+          <a:xfrm>
+            <a:off x="6519672" y="2569464"/>
+            <a:ext cx="1828800" cy="201168"/>
+          </a:xfrm>
+          <a:prstGeom prst="rect">
+            <a:avLst/>
+          </a:prstGeom>
+          <a:noFill/>
+          <a:ln/>
+        </p:spPr>
+        <p:txBody>
+          <a:bodyPr wrap="square" lIns="0" tIns="0" rIns="0" bIns="0" rtlCol="0" anchor="t"/>
+          <a:lstStyle/>
+          <a:p>
+            <a:pPr algn="ctr" indent="0" marL="0">
+              <a:buNone/>
+            </a:pPr>
+            <a:r>
+              <a:rPr lang="en-US" sz="850" dirty="0">
+                <a:solidFill>
+                  <a:srgbClr val="475569"/>
+                </a:solidFill>
+                <a:latin typeface="Calibri" pitchFamily="34" charset="0"/>
+                <a:ea typeface="Calibri" pitchFamily="34" charset="-122"/>
+                <a:cs typeface="Calibri" pitchFamily="34" charset="-120"/>
+              </a:rPr>
+              <a:t>relating to</a:t>
+            </a:r>
+            <a:endParaRPr lang="en-US" sz="850" dirty="0"/>
+          </a:p>
+        </p:txBody>
+      </p:sp>
+      <p:sp>
+        <p:nvSpPr>
+          <p:cNvPr id="25" name="Shape 23"/>
           <p:cNvSpPr/>
           <p:nvPr/>
         </p:nvSpPr>
@@ -21100,7 +20545,7 @@
       </p:sp>
       <p:sp>
         <p:nvSpPr>
-          <p:cNvPr id="23" name="Text 21"/>
+          <p:cNvPr id="26" name="Text 24"/>
           <p:cNvSpPr/>
           <p:nvPr/>
         </p:nvSpPr>
@@ -21139,7 +20584,7 @@
       </p:sp>
       <p:sp>
         <p:nvSpPr>
-          <p:cNvPr id="24" name="Shape 22"/>
+          <p:cNvPr id="27" name="Shape 25"/>
           <p:cNvSpPr/>
           <p:nvPr/>
         </p:nvSpPr>
@@ -21166,14 +20611,14 @@
       </p:sp>
       <p:sp>
         <p:nvSpPr>
-          <p:cNvPr id="25" name="Shape 23"/>
-          <p:cNvSpPr/>
-          <p:nvPr/>
-        </p:nvSpPr>
-        <p:spPr>
-          <a:xfrm>
-            <a:off x="2999232" y="3364992"/>
-            <a:ext cx="1645920" cy="475488"/>
+          <p:cNvPr id="28" name="Shape 26"/>
+          <p:cNvSpPr/>
+          <p:nvPr/>
+        </p:nvSpPr>
+        <p:spPr>
+          <a:xfrm>
+            <a:off x="1975104" y="3364992"/>
+            <a:ext cx="1554480" cy="475488"/>
           </a:xfrm>
           <a:prstGeom prst="rect">
             <a:avLst>
@@ -21193,14 +20638,14 @@
       </p:sp>
       <p:sp>
         <p:nvSpPr>
-          <p:cNvPr id="26" name="Text 24"/>
-          <p:cNvSpPr/>
-          <p:nvPr/>
-        </p:nvSpPr>
-        <p:spPr>
-          <a:xfrm>
-            <a:off x="2999232" y="3364992"/>
-            <a:ext cx="1645920" cy="475488"/>
+          <p:cNvPr id="29" name="Text 27"/>
+          <p:cNvSpPr/>
+          <p:nvPr/>
+        </p:nvSpPr>
+        <p:spPr>
+          <a:xfrm>
+            <a:off x="1975104" y="3364992"/>
+            <a:ext cx="1554480" cy="475488"/>
           </a:xfrm>
           <a:prstGeom prst="rect">
             <a:avLst/>
@@ -21232,14 +20677,14 @@
       </p:sp>
       <p:sp>
         <p:nvSpPr>
-          <p:cNvPr id="27" name="Text 25"/>
-          <p:cNvSpPr/>
-          <p:nvPr/>
-        </p:nvSpPr>
-        <p:spPr>
-          <a:xfrm>
-            <a:off x="4645152" y="3364992"/>
-            <a:ext cx="1097280" cy="475488"/>
+          <p:cNvPr id="30" name="Text 28"/>
+          <p:cNvSpPr/>
+          <p:nvPr/>
+        </p:nvSpPr>
+        <p:spPr>
+          <a:xfrm>
+            <a:off x="3529584" y="3364992"/>
+            <a:ext cx="73152" cy="475488"/>
           </a:xfrm>
           <a:prstGeom prst="rect">
             <a:avLst/>
@@ -21271,14 +20716,14 @@
       </p:sp>
       <p:sp>
         <p:nvSpPr>
-          <p:cNvPr id="28" name="Shape 26"/>
-          <p:cNvSpPr/>
-          <p:nvPr/>
-        </p:nvSpPr>
-        <p:spPr>
-          <a:xfrm>
-            <a:off x="5742432" y="3364992"/>
-            <a:ext cx="1645920" cy="475488"/>
+          <p:cNvPr id="31" name="Shape 29"/>
+          <p:cNvSpPr/>
+          <p:nvPr/>
+        </p:nvSpPr>
+        <p:spPr>
+          <a:xfrm>
+            <a:off x="3602736" y="3364992"/>
+            <a:ext cx="1554480" cy="475488"/>
           </a:xfrm>
           <a:prstGeom prst="rect">
             <a:avLst>
@@ -21298,14 +20743,14 @@
       </p:sp>
       <p:sp>
         <p:nvSpPr>
-          <p:cNvPr id="29" name="Text 27"/>
-          <p:cNvSpPr/>
-          <p:nvPr/>
-        </p:nvSpPr>
-        <p:spPr>
-          <a:xfrm>
-            <a:off x="5742432" y="3364992"/>
-            <a:ext cx="1645920" cy="475488"/>
+          <p:cNvPr id="32" name="Text 30"/>
+          <p:cNvSpPr/>
+          <p:nvPr/>
+        </p:nvSpPr>
+        <p:spPr>
+          <a:xfrm>
+            <a:off x="3602736" y="3364992"/>
+            <a:ext cx="1554480" cy="475488"/>
           </a:xfrm>
           <a:prstGeom prst="rect">
             <a:avLst/>
@@ -21329,7 +20774,7 @@
                 <a:ea typeface="Trebuchet MS" pitchFamily="34" charset="-122"/>
                 <a:cs typeface="Trebuchet MS" pitchFamily="34" charset="-120"/>
               </a:rPr>
-              <a:t>nique</a:t>
+              <a:t>ni</a:t>
             </a:r>
             <a:endParaRPr lang="en-US" sz="1400" dirty="0"/>
           </a:p>
@@ -21337,7 +20782,217 @@
       </p:sp>
       <p:sp>
         <p:nvSpPr>
-          <p:cNvPr id="30" name="Shape 28"/>
+          <p:cNvPr id="33" name="Text 31"/>
+          <p:cNvSpPr/>
+          <p:nvPr/>
+        </p:nvSpPr>
+        <p:spPr>
+          <a:xfrm>
+            <a:off x="5157216" y="3364992"/>
+            <a:ext cx="73152" cy="475488"/>
+          </a:xfrm>
+          <a:prstGeom prst="rect">
+            <a:avLst/>
+          </a:prstGeom>
+          <a:noFill/>
+          <a:ln/>
+        </p:spPr>
+        <p:txBody>
+          <a:bodyPr wrap="square" lIns="0" tIns="0" rIns="0" bIns="0" rtlCol="0" anchor="ctr"/>
+          <a:lstStyle/>
+          <a:p>
+            <a:pPr algn="ctr" indent="0" marL="0">
+              <a:buNone/>
+            </a:pPr>
+            <a:r>
+              <a:rPr lang="en-US" sz="1600" b="1" dirty="0">
+                <a:solidFill>
+                  <a:srgbClr val="0D9488"/>
+                </a:solidFill>
+                <a:latin typeface="Trebuchet MS" pitchFamily="34" charset="0"/>
+                <a:ea typeface="Trebuchet MS" pitchFamily="34" charset="-122"/>
+                <a:cs typeface="Trebuchet MS" pitchFamily="34" charset="-120"/>
+              </a:rPr>
+              <a:t>·</a:t>
+            </a:r>
+            <a:endParaRPr lang="en-US" sz="1600" dirty="0"/>
+          </a:p>
+        </p:txBody>
+      </p:sp>
+      <p:sp>
+        <p:nvSpPr>
+          <p:cNvPr id="34" name="Shape 32"/>
+          <p:cNvSpPr/>
+          <p:nvPr/>
+        </p:nvSpPr>
+        <p:spPr>
+          <a:xfrm>
+            <a:off x="5230368" y="3364992"/>
+            <a:ext cx="1554480" cy="475488"/>
+          </a:xfrm>
+          <a:prstGeom prst="rect">
+            <a:avLst>
+              <a:gd name="adj" fmla="val 9615"/>
+            </a:avLst>
+          </a:prstGeom>
+          <a:solidFill>
+            <a:srgbClr val="FFFFFF"/>
+          </a:solidFill>
+          <a:ln w="12700">
+            <a:solidFill>
+              <a:srgbClr val="0D9488"/>
+            </a:solidFill>
+            <a:prstDash val="solid"/>
+          </a:ln>
+        </p:spPr>
+      </p:sp>
+      <p:sp>
+        <p:nvSpPr>
+          <p:cNvPr id="35" name="Text 33"/>
+          <p:cNvSpPr/>
+          <p:nvPr/>
+        </p:nvSpPr>
+        <p:spPr>
+          <a:xfrm>
+            <a:off x="5230368" y="3364992"/>
+            <a:ext cx="1554480" cy="475488"/>
+          </a:xfrm>
+          <a:prstGeom prst="rect">
+            <a:avLst/>
+          </a:prstGeom>
+          <a:noFill/>
+          <a:ln/>
+        </p:spPr>
+        <p:txBody>
+          <a:bodyPr wrap="square" lIns="0" tIns="0" rIns="0" bIns="0" rtlCol="0" anchor="ctr"/>
+          <a:lstStyle/>
+          <a:p>
+            <a:pPr algn="ctr" indent="0" marL="0">
+              <a:buNone/>
+            </a:pPr>
+            <a:r>
+              <a:rPr lang="en-US" sz="1400" b="1" dirty="0">
+                <a:solidFill>
+                  <a:srgbClr val="0D9488"/>
+                </a:solidFill>
+                <a:latin typeface="Trebuchet MS" pitchFamily="34" charset="0"/>
+                <a:ea typeface="Trebuchet MS" pitchFamily="34" charset="-122"/>
+                <a:cs typeface="Trebuchet MS" pitchFamily="34" charset="-120"/>
+              </a:rPr>
+              <a:t>ver</a:t>
+            </a:r>
+            <a:endParaRPr lang="en-US" sz="1400" dirty="0"/>
+          </a:p>
+        </p:txBody>
+      </p:sp>
+      <p:sp>
+        <p:nvSpPr>
+          <p:cNvPr id="36" name="Text 34"/>
+          <p:cNvSpPr/>
+          <p:nvPr/>
+        </p:nvSpPr>
+        <p:spPr>
+          <a:xfrm>
+            <a:off x="6784848" y="3364992"/>
+            <a:ext cx="73152" cy="475488"/>
+          </a:xfrm>
+          <a:prstGeom prst="rect">
+            <a:avLst/>
+          </a:prstGeom>
+          <a:noFill/>
+          <a:ln/>
+        </p:spPr>
+        <p:txBody>
+          <a:bodyPr wrap="square" lIns="0" tIns="0" rIns="0" bIns="0" rtlCol="0" anchor="ctr"/>
+          <a:lstStyle/>
+          <a:p>
+            <a:pPr algn="ctr" indent="0" marL="0">
+              <a:buNone/>
+            </a:pPr>
+            <a:r>
+              <a:rPr lang="en-US" sz="1600" b="1" dirty="0">
+                <a:solidFill>
+                  <a:srgbClr val="0D9488"/>
+                </a:solidFill>
+                <a:latin typeface="Trebuchet MS" pitchFamily="34" charset="0"/>
+                <a:ea typeface="Trebuchet MS" pitchFamily="34" charset="-122"/>
+                <a:cs typeface="Trebuchet MS" pitchFamily="34" charset="-120"/>
+              </a:rPr>
+              <a:t>·</a:t>
+            </a:r>
+            <a:endParaRPr lang="en-US" sz="1600" dirty="0"/>
+          </a:p>
+        </p:txBody>
+      </p:sp>
+      <p:sp>
+        <p:nvSpPr>
+          <p:cNvPr id="37" name="Shape 35"/>
+          <p:cNvSpPr/>
+          <p:nvPr/>
+        </p:nvSpPr>
+        <p:spPr>
+          <a:xfrm>
+            <a:off x="6858000" y="3364992"/>
+            <a:ext cx="1554480" cy="475488"/>
+          </a:xfrm>
+          <a:prstGeom prst="rect">
+            <a:avLst>
+              <a:gd name="adj" fmla="val 9615"/>
+            </a:avLst>
+          </a:prstGeom>
+          <a:solidFill>
+            <a:srgbClr val="FFFFFF"/>
+          </a:solidFill>
+          <a:ln w="12700">
+            <a:solidFill>
+              <a:srgbClr val="0D9488"/>
+            </a:solidFill>
+            <a:prstDash val="solid"/>
+          </a:ln>
+        </p:spPr>
+      </p:sp>
+      <p:sp>
+        <p:nvSpPr>
+          <p:cNvPr id="38" name="Text 36"/>
+          <p:cNvSpPr/>
+          <p:nvPr/>
+        </p:nvSpPr>
+        <p:spPr>
+          <a:xfrm>
+            <a:off x="6858000" y="3364992"/>
+            <a:ext cx="1554480" cy="475488"/>
+          </a:xfrm>
+          <a:prstGeom prst="rect">
+            <a:avLst/>
+          </a:prstGeom>
+          <a:noFill/>
+          <a:ln/>
+        </p:spPr>
+        <p:txBody>
+          <a:bodyPr wrap="square" lIns="0" tIns="0" rIns="0" bIns="0" rtlCol="0" anchor="ctr"/>
+          <a:lstStyle/>
+          <a:p>
+            <a:pPr algn="ctr" indent="0" marL="0">
+              <a:buNone/>
+            </a:pPr>
+            <a:r>
+              <a:rPr lang="en-US" sz="1400" b="1" dirty="0">
+                <a:solidFill>
+                  <a:srgbClr val="0D9488"/>
+                </a:solidFill>
+                <a:latin typeface="Trebuchet MS" pitchFamily="34" charset="0"/>
+                <a:ea typeface="Trebuchet MS" pitchFamily="34" charset="-122"/>
+                <a:cs typeface="Trebuchet MS" pitchFamily="34" charset="-120"/>
+              </a:rPr>
+              <a:t>sal</a:t>
+            </a:r>
+            <a:endParaRPr lang="en-US" sz="1400" dirty="0"/>
+          </a:p>
+        </p:txBody>
+      </p:sp>
+      <p:sp>
+        <p:nvSpPr>
+          <p:cNvPr id="39" name="Shape 37"/>
           <p:cNvSpPr/>
           <p:nvPr/>
         </p:nvSpPr>
@@ -21364,7 +21019,7 @@
       </p:sp>
       <p:sp>
         <p:nvSpPr>
-          <p:cNvPr id="31" name="Text 29"/>
+          <p:cNvPr id="40" name="Text 38"/>
           <p:cNvSpPr/>
           <p:nvPr/>
         </p:nvSpPr>
@@ -21403,7 +21058,7 @@
       </p:sp>
       <p:sp>
         <p:nvSpPr>
-          <p:cNvPr id="32" name="Shape 30"/>
+          <p:cNvPr id="41" name="Shape 39"/>
           <p:cNvSpPr/>
           <p:nvPr/>
         </p:nvSpPr>
@@ -21430,7 +21085,7 @@
       </p:sp>
       <p:sp>
         <p:nvSpPr>
-          <p:cNvPr id="33" name="Text 31"/>
+          <p:cNvPr id="42" name="Text 40"/>
           <p:cNvSpPr/>
           <p:nvPr/>
         </p:nvSpPr>
@@ -21892,7 +21547,7 @@
                 <a:ea typeface="Trebuchet MS" pitchFamily="34" charset="-122"/>
                 <a:cs typeface="Trebuchet MS" pitchFamily="34" charset="-120"/>
               </a:rPr>
-              <a:t>unique</a:t>
+              <a:t>universal</a:t>
             </a:r>
             <a:endParaRPr lang="en-US" sz="2800" dirty="0"/>
           </a:p>
@@ -21972,7 +21627,7 @@
         </p:nvSpPr>
         <p:spPr>
           <a:xfrm>
-            <a:off x="2938272" y="2258568"/>
+            <a:off x="2221992" y="2258568"/>
             <a:ext cx="1828800" cy="292608"/>
           </a:xfrm>
           <a:prstGeom prst="rect">
@@ -22006,7 +21661,7 @@
         </p:nvSpPr>
         <p:spPr>
           <a:xfrm>
-            <a:off x="2938272" y="2258568"/>
+            <a:off x="2221992" y="2258568"/>
             <a:ext cx="1828800" cy="292608"/>
           </a:xfrm>
           <a:prstGeom prst="rect">
@@ -22045,7 +21700,7 @@
         </p:nvSpPr>
         <p:spPr>
           <a:xfrm>
-            <a:off x="2938272" y="2569464"/>
+            <a:off x="2221992" y="2569464"/>
             <a:ext cx="1828800" cy="201168"/>
           </a:xfrm>
           <a:prstGeom prst="rect">
@@ -22084,7 +21739,7 @@
         </p:nvSpPr>
         <p:spPr>
           <a:xfrm>
-            <a:off x="5803392" y="2258568"/>
+            <a:off x="4370832" y="2258568"/>
             <a:ext cx="1828800" cy="292608"/>
           </a:xfrm>
           <a:prstGeom prst="rect">
@@ -22118,7 +21773,7 @@
         </p:nvSpPr>
         <p:spPr>
           <a:xfrm>
-            <a:off x="5803392" y="2258568"/>
+            <a:off x="4370832" y="2258568"/>
             <a:ext cx="1828800" cy="292608"/>
           </a:xfrm>
           <a:prstGeom prst="rect">
@@ -22143,7 +21798,7 @@
                 <a:ea typeface="Trebuchet MS" pitchFamily="34" charset="-122"/>
                 <a:cs typeface="Trebuchet MS" pitchFamily="34" charset="-120"/>
               </a:rPr>
-              <a:t>que</a:t>
+              <a:t>vers</a:t>
             </a:r>
             <a:endParaRPr lang="en-US" sz="1300" dirty="0"/>
           </a:p>
@@ -22157,7 +21812,7 @@
         </p:nvSpPr>
         <p:spPr>
           <a:xfrm>
-            <a:off x="5803392" y="2569464"/>
+            <a:off x="4370832" y="2569464"/>
             <a:ext cx="1828800" cy="201168"/>
           </a:xfrm>
           <a:prstGeom prst="rect">
@@ -22182,7 +21837,7 @@
                 <a:ea typeface="Calibri" pitchFamily="34" charset="-122"/>
                 <a:cs typeface="Calibri" pitchFamily="34" charset="-120"/>
               </a:rPr>
-              <a:t>kind or type</a:t>
+              <a:t>to turn</a:t>
             </a:r>
             <a:endParaRPr lang="en-US" sz="850" dirty="0"/>
           </a:p>
@@ -22191,6 +21846,118 @@
       <p:sp>
         <p:nvSpPr>
           <p:cNvPr id="22" name="Shape 20"/>
+          <p:cNvSpPr/>
+          <p:nvPr/>
+        </p:nvSpPr>
+        <p:spPr>
+          <a:xfrm>
+            <a:off x="6519672" y="2258568"/>
+            <a:ext cx="1828800" cy="292608"/>
+          </a:xfrm>
+          <a:prstGeom prst="rect">
+            <a:avLst>
+              <a:gd name="adj" fmla="val 25000"/>
+            </a:avLst>
+          </a:prstGeom>
+          <a:solidFill>
+            <a:srgbClr val="FCE7F3"/>
+          </a:solidFill>
+          <a:ln w="19050">
+            <a:solidFill>
+              <a:srgbClr val="DB2777"/>
+            </a:solidFill>
+            <a:prstDash val="solid"/>
+          </a:ln>
+          <a:effectLst>
+            <a:outerShdw sx="100000" sy="100000" kx="0" ky="0" algn="bl" rotWithShape="0" blurRad="101600" dist="38100" dir="8100000">
+              <a:srgbClr val="000000">
+                <a:alpha val="12000"/>
+              </a:srgbClr>
+            </a:outerShdw>
+          </a:effectLst>
+        </p:spPr>
+      </p:sp>
+      <p:sp>
+        <p:nvSpPr>
+          <p:cNvPr id="23" name="Text 21"/>
+          <p:cNvSpPr/>
+          <p:nvPr/>
+        </p:nvSpPr>
+        <p:spPr>
+          <a:xfrm>
+            <a:off x="6519672" y="2258568"/>
+            <a:ext cx="1828800" cy="292608"/>
+          </a:xfrm>
+          <a:prstGeom prst="rect">
+            <a:avLst/>
+          </a:prstGeom>
+          <a:noFill/>
+          <a:ln/>
+        </p:spPr>
+        <p:txBody>
+          <a:bodyPr wrap="square" lIns="0" tIns="0" rIns="0" bIns="0" rtlCol="0" anchor="ctr"/>
+          <a:lstStyle/>
+          <a:p>
+            <a:pPr algn="ctr" indent="0" marL="0">
+              <a:buNone/>
+            </a:pPr>
+            <a:r>
+              <a:rPr lang="en-US" sz="1300" b="1" dirty="0">
+                <a:solidFill>
+                  <a:srgbClr val="9D174D"/>
+                </a:solidFill>
+                <a:latin typeface="Trebuchet MS" pitchFamily="34" charset="0"/>
+                <a:ea typeface="Trebuchet MS" pitchFamily="34" charset="-122"/>
+                <a:cs typeface="Trebuchet MS" pitchFamily="34" charset="-120"/>
+              </a:rPr>
+              <a:t>al</a:t>
+            </a:r>
+            <a:endParaRPr lang="en-US" sz="1300" dirty="0"/>
+          </a:p>
+        </p:txBody>
+      </p:sp>
+      <p:sp>
+        <p:nvSpPr>
+          <p:cNvPr id="24" name="Text 22"/>
+          <p:cNvSpPr/>
+          <p:nvPr/>
+        </p:nvSpPr>
+        <p:spPr>
+          <a:xfrm>
+            <a:off x="6519672" y="2569464"/>
+            <a:ext cx="1828800" cy="201168"/>
+          </a:xfrm>
+          <a:prstGeom prst="rect">
+            <a:avLst/>
+          </a:prstGeom>
+          <a:noFill/>
+          <a:ln/>
+        </p:spPr>
+        <p:txBody>
+          <a:bodyPr wrap="square" lIns="0" tIns="0" rIns="0" bIns="0" rtlCol="0" anchor="t"/>
+          <a:lstStyle/>
+          <a:p>
+            <a:pPr algn="ctr" indent="0" marL="0">
+              <a:buNone/>
+            </a:pPr>
+            <a:r>
+              <a:rPr lang="en-US" sz="850" dirty="0">
+                <a:solidFill>
+                  <a:srgbClr val="475569"/>
+                </a:solidFill>
+                <a:latin typeface="Calibri" pitchFamily="34" charset="0"/>
+                <a:ea typeface="Calibri" pitchFamily="34" charset="-122"/>
+                <a:cs typeface="Calibri" pitchFamily="34" charset="-120"/>
+              </a:rPr>
+              <a:t>relating to</a:t>
+            </a:r>
+            <a:endParaRPr lang="en-US" sz="850" dirty="0"/>
+          </a:p>
+        </p:txBody>
+      </p:sp>
+      <p:sp>
+        <p:nvSpPr>
+          <p:cNvPr id="25" name="Shape 23"/>
           <p:cNvSpPr/>
           <p:nvPr/>
         </p:nvSpPr>
@@ -22217,7 +21984,7 @@
       </p:sp>
       <p:sp>
         <p:nvSpPr>
-          <p:cNvPr id="23" name="Text 21"/>
+          <p:cNvPr id="26" name="Text 24"/>
           <p:cNvSpPr/>
           <p:nvPr/>
         </p:nvSpPr>
@@ -22256,7 +22023,7 @@
       </p:sp>
       <p:sp>
         <p:nvSpPr>
-          <p:cNvPr id="24" name="Shape 22"/>
+          <p:cNvPr id="27" name="Shape 25"/>
           <p:cNvSpPr/>
           <p:nvPr/>
         </p:nvSpPr>
@@ -22283,14 +22050,14 @@
       </p:sp>
       <p:sp>
         <p:nvSpPr>
-          <p:cNvPr id="25" name="Shape 23"/>
-          <p:cNvSpPr/>
-          <p:nvPr/>
-        </p:nvSpPr>
-        <p:spPr>
-          <a:xfrm>
-            <a:off x="2999232" y="3364992"/>
-            <a:ext cx="1645920" cy="475488"/>
+          <p:cNvPr id="28" name="Shape 26"/>
+          <p:cNvSpPr/>
+          <p:nvPr/>
+        </p:nvSpPr>
+        <p:spPr>
+          <a:xfrm>
+            <a:off x="1975104" y="3364992"/>
+            <a:ext cx="1554480" cy="475488"/>
           </a:xfrm>
           <a:prstGeom prst="rect">
             <a:avLst>
@@ -22310,14 +22077,14 @@
       </p:sp>
       <p:sp>
         <p:nvSpPr>
-          <p:cNvPr id="26" name="Text 24"/>
-          <p:cNvSpPr/>
-          <p:nvPr/>
-        </p:nvSpPr>
-        <p:spPr>
-          <a:xfrm>
-            <a:off x="2999232" y="3364992"/>
-            <a:ext cx="1645920" cy="475488"/>
+          <p:cNvPr id="29" name="Text 27"/>
+          <p:cNvSpPr/>
+          <p:nvPr/>
+        </p:nvSpPr>
+        <p:spPr>
+          <a:xfrm>
+            <a:off x="1975104" y="3364992"/>
+            <a:ext cx="1554480" cy="475488"/>
           </a:xfrm>
           <a:prstGeom prst="rect">
             <a:avLst/>
@@ -22349,14 +22116,14 @@
       </p:sp>
       <p:sp>
         <p:nvSpPr>
-          <p:cNvPr id="27" name="Text 25"/>
-          <p:cNvSpPr/>
-          <p:nvPr/>
-        </p:nvSpPr>
-        <p:spPr>
-          <a:xfrm>
-            <a:off x="4645152" y="3364992"/>
-            <a:ext cx="1097280" cy="475488"/>
+          <p:cNvPr id="30" name="Text 28"/>
+          <p:cNvSpPr/>
+          <p:nvPr/>
+        </p:nvSpPr>
+        <p:spPr>
+          <a:xfrm>
+            <a:off x="3529584" y="3364992"/>
+            <a:ext cx="73152" cy="475488"/>
           </a:xfrm>
           <a:prstGeom prst="rect">
             <a:avLst/>
@@ -22388,14 +22155,14 @@
       </p:sp>
       <p:sp>
         <p:nvSpPr>
-          <p:cNvPr id="28" name="Shape 26"/>
-          <p:cNvSpPr/>
-          <p:nvPr/>
-        </p:nvSpPr>
-        <p:spPr>
-          <a:xfrm>
-            <a:off x="5742432" y="3364992"/>
-            <a:ext cx="1645920" cy="475488"/>
+          <p:cNvPr id="31" name="Shape 29"/>
+          <p:cNvSpPr/>
+          <p:nvPr/>
+        </p:nvSpPr>
+        <p:spPr>
+          <a:xfrm>
+            <a:off x="3602736" y="3364992"/>
+            <a:ext cx="1554480" cy="475488"/>
           </a:xfrm>
           <a:prstGeom prst="rect">
             <a:avLst>
@@ -22415,14 +22182,14 @@
       </p:sp>
       <p:sp>
         <p:nvSpPr>
-          <p:cNvPr id="29" name="Text 27"/>
-          <p:cNvSpPr/>
-          <p:nvPr/>
-        </p:nvSpPr>
-        <p:spPr>
-          <a:xfrm>
-            <a:off x="5742432" y="3364992"/>
-            <a:ext cx="1645920" cy="475488"/>
+          <p:cNvPr id="32" name="Text 30"/>
+          <p:cNvSpPr/>
+          <p:nvPr/>
+        </p:nvSpPr>
+        <p:spPr>
+          <a:xfrm>
+            <a:off x="3602736" y="3364992"/>
+            <a:ext cx="1554480" cy="475488"/>
           </a:xfrm>
           <a:prstGeom prst="rect">
             <a:avLst/>
@@ -22446,7 +22213,7 @@
                 <a:ea typeface="Trebuchet MS" pitchFamily="34" charset="-122"/>
                 <a:cs typeface="Trebuchet MS" pitchFamily="34" charset="-120"/>
               </a:rPr>
-              <a:t>nique</a:t>
+              <a:t>ni</a:t>
             </a:r>
             <a:endParaRPr lang="en-US" sz="1400" dirty="0"/>
           </a:p>
@@ -22454,7 +22221,217 @@
       </p:sp>
       <p:sp>
         <p:nvSpPr>
-          <p:cNvPr id="30" name="Shape 28"/>
+          <p:cNvPr id="33" name="Text 31"/>
+          <p:cNvSpPr/>
+          <p:nvPr/>
+        </p:nvSpPr>
+        <p:spPr>
+          <a:xfrm>
+            <a:off x="5157216" y="3364992"/>
+            <a:ext cx="73152" cy="475488"/>
+          </a:xfrm>
+          <a:prstGeom prst="rect">
+            <a:avLst/>
+          </a:prstGeom>
+          <a:noFill/>
+          <a:ln/>
+        </p:spPr>
+        <p:txBody>
+          <a:bodyPr wrap="square" lIns="0" tIns="0" rIns="0" bIns="0" rtlCol="0" anchor="ctr"/>
+          <a:lstStyle/>
+          <a:p>
+            <a:pPr algn="ctr" indent="0" marL="0">
+              <a:buNone/>
+            </a:pPr>
+            <a:r>
+              <a:rPr lang="en-US" sz="1600" b="1" dirty="0">
+                <a:solidFill>
+                  <a:srgbClr val="0D9488"/>
+                </a:solidFill>
+                <a:latin typeface="Trebuchet MS" pitchFamily="34" charset="0"/>
+                <a:ea typeface="Trebuchet MS" pitchFamily="34" charset="-122"/>
+                <a:cs typeface="Trebuchet MS" pitchFamily="34" charset="-120"/>
+              </a:rPr>
+              <a:t>·</a:t>
+            </a:r>
+            <a:endParaRPr lang="en-US" sz="1600" dirty="0"/>
+          </a:p>
+        </p:txBody>
+      </p:sp>
+      <p:sp>
+        <p:nvSpPr>
+          <p:cNvPr id="34" name="Shape 32"/>
+          <p:cNvSpPr/>
+          <p:nvPr/>
+        </p:nvSpPr>
+        <p:spPr>
+          <a:xfrm>
+            <a:off x="5230368" y="3364992"/>
+            <a:ext cx="1554480" cy="475488"/>
+          </a:xfrm>
+          <a:prstGeom prst="rect">
+            <a:avLst>
+              <a:gd name="adj" fmla="val 9615"/>
+            </a:avLst>
+          </a:prstGeom>
+          <a:solidFill>
+            <a:srgbClr val="FFFFFF"/>
+          </a:solidFill>
+          <a:ln w="12700">
+            <a:solidFill>
+              <a:srgbClr val="0D9488"/>
+            </a:solidFill>
+            <a:prstDash val="solid"/>
+          </a:ln>
+        </p:spPr>
+      </p:sp>
+      <p:sp>
+        <p:nvSpPr>
+          <p:cNvPr id="35" name="Text 33"/>
+          <p:cNvSpPr/>
+          <p:nvPr/>
+        </p:nvSpPr>
+        <p:spPr>
+          <a:xfrm>
+            <a:off x="5230368" y="3364992"/>
+            <a:ext cx="1554480" cy="475488"/>
+          </a:xfrm>
+          <a:prstGeom prst="rect">
+            <a:avLst/>
+          </a:prstGeom>
+          <a:noFill/>
+          <a:ln/>
+        </p:spPr>
+        <p:txBody>
+          <a:bodyPr wrap="square" lIns="0" tIns="0" rIns="0" bIns="0" rtlCol="0" anchor="ctr"/>
+          <a:lstStyle/>
+          <a:p>
+            <a:pPr algn="ctr" indent="0" marL="0">
+              <a:buNone/>
+            </a:pPr>
+            <a:r>
+              <a:rPr lang="en-US" sz="1400" b="1" dirty="0">
+                <a:solidFill>
+                  <a:srgbClr val="0D9488"/>
+                </a:solidFill>
+                <a:latin typeface="Trebuchet MS" pitchFamily="34" charset="0"/>
+                <a:ea typeface="Trebuchet MS" pitchFamily="34" charset="-122"/>
+                <a:cs typeface="Trebuchet MS" pitchFamily="34" charset="-120"/>
+              </a:rPr>
+              <a:t>ver</a:t>
+            </a:r>
+            <a:endParaRPr lang="en-US" sz="1400" dirty="0"/>
+          </a:p>
+        </p:txBody>
+      </p:sp>
+      <p:sp>
+        <p:nvSpPr>
+          <p:cNvPr id="36" name="Text 34"/>
+          <p:cNvSpPr/>
+          <p:nvPr/>
+        </p:nvSpPr>
+        <p:spPr>
+          <a:xfrm>
+            <a:off x="6784848" y="3364992"/>
+            <a:ext cx="73152" cy="475488"/>
+          </a:xfrm>
+          <a:prstGeom prst="rect">
+            <a:avLst/>
+          </a:prstGeom>
+          <a:noFill/>
+          <a:ln/>
+        </p:spPr>
+        <p:txBody>
+          <a:bodyPr wrap="square" lIns="0" tIns="0" rIns="0" bIns="0" rtlCol="0" anchor="ctr"/>
+          <a:lstStyle/>
+          <a:p>
+            <a:pPr algn="ctr" indent="0" marL="0">
+              <a:buNone/>
+            </a:pPr>
+            <a:r>
+              <a:rPr lang="en-US" sz="1600" b="1" dirty="0">
+                <a:solidFill>
+                  <a:srgbClr val="0D9488"/>
+                </a:solidFill>
+                <a:latin typeface="Trebuchet MS" pitchFamily="34" charset="0"/>
+                <a:ea typeface="Trebuchet MS" pitchFamily="34" charset="-122"/>
+                <a:cs typeface="Trebuchet MS" pitchFamily="34" charset="-120"/>
+              </a:rPr>
+              <a:t>·</a:t>
+            </a:r>
+            <a:endParaRPr lang="en-US" sz="1600" dirty="0"/>
+          </a:p>
+        </p:txBody>
+      </p:sp>
+      <p:sp>
+        <p:nvSpPr>
+          <p:cNvPr id="37" name="Shape 35"/>
+          <p:cNvSpPr/>
+          <p:nvPr/>
+        </p:nvSpPr>
+        <p:spPr>
+          <a:xfrm>
+            <a:off x="6858000" y="3364992"/>
+            <a:ext cx="1554480" cy="475488"/>
+          </a:xfrm>
+          <a:prstGeom prst="rect">
+            <a:avLst>
+              <a:gd name="adj" fmla="val 9615"/>
+            </a:avLst>
+          </a:prstGeom>
+          <a:solidFill>
+            <a:srgbClr val="FFFFFF"/>
+          </a:solidFill>
+          <a:ln w="12700">
+            <a:solidFill>
+              <a:srgbClr val="0D9488"/>
+            </a:solidFill>
+            <a:prstDash val="solid"/>
+          </a:ln>
+        </p:spPr>
+      </p:sp>
+      <p:sp>
+        <p:nvSpPr>
+          <p:cNvPr id="38" name="Text 36"/>
+          <p:cNvSpPr/>
+          <p:nvPr/>
+        </p:nvSpPr>
+        <p:spPr>
+          <a:xfrm>
+            <a:off x="6858000" y="3364992"/>
+            <a:ext cx="1554480" cy="475488"/>
+          </a:xfrm>
+          <a:prstGeom prst="rect">
+            <a:avLst/>
+          </a:prstGeom>
+          <a:noFill/>
+          <a:ln/>
+        </p:spPr>
+        <p:txBody>
+          <a:bodyPr wrap="square" lIns="0" tIns="0" rIns="0" bIns="0" rtlCol="0" anchor="ctr"/>
+          <a:lstStyle/>
+          <a:p>
+            <a:pPr algn="ctr" indent="0" marL="0">
+              <a:buNone/>
+            </a:pPr>
+            <a:r>
+              <a:rPr lang="en-US" sz="1400" b="1" dirty="0">
+                <a:solidFill>
+                  <a:srgbClr val="0D9488"/>
+                </a:solidFill>
+                <a:latin typeface="Trebuchet MS" pitchFamily="34" charset="0"/>
+                <a:ea typeface="Trebuchet MS" pitchFamily="34" charset="-122"/>
+                <a:cs typeface="Trebuchet MS" pitchFamily="34" charset="-120"/>
+              </a:rPr>
+              <a:t>sal</a:t>
+            </a:r>
+            <a:endParaRPr lang="en-US" sz="1400" dirty="0"/>
+          </a:p>
+        </p:txBody>
+      </p:sp>
+      <p:sp>
+        <p:nvSpPr>
+          <p:cNvPr id="39" name="Shape 37"/>
           <p:cNvSpPr/>
           <p:nvPr/>
         </p:nvSpPr>
@@ -22481,7 +22458,7 @@
       </p:sp>
       <p:sp>
         <p:nvSpPr>
-          <p:cNvPr id="31" name="Text 29"/>
+          <p:cNvPr id="40" name="Text 38"/>
           <p:cNvSpPr/>
           <p:nvPr/>
         </p:nvSpPr>
@@ -22520,18 +22497,18 @@
       </p:sp>
       <p:sp>
         <p:nvSpPr>
-          <p:cNvPr id="32" name="Shape 30"/>
+          <p:cNvPr id="41" name="Shape 39"/>
           <p:cNvSpPr/>
           <p:nvPr/>
         </p:nvSpPr>
         <p:spPr>
           <a:xfrm>
             <a:off x="1874520" y="4096512"/>
-            <a:ext cx="6903720" cy="804672"/>
+            <a:ext cx="6903720" cy="658368"/>
           </a:xfrm>
           <a:prstGeom prst="rect">
             <a:avLst>
-              <a:gd name="adj" fmla="val 6818"/>
+              <a:gd name="adj" fmla="val 8333"/>
             </a:avLst>
           </a:prstGeom>
           <a:solidFill>
@@ -22547,18 +22524,18 @@
       </p:sp>
       <p:sp>
         <p:nvSpPr>
-          <p:cNvPr id="33" name="Shape 31"/>
-          <p:cNvSpPr/>
-          <p:nvPr/>
-        </p:nvSpPr>
-        <p:spPr>
-          <a:xfrm>
-            <a:off x="2670048" y="4169664"/>
-            <a:ext cx="685800" cy="384048"/>
+          <p:cNvPr id="42" name="Shape 40"/>
+          <p:cNvSpPr/>
+          <p:nvPr/>
+        </p:nvSpPr>
+        <p:spPr>
+          <a:xfrm>
+            <a:off x="2124837" y="4169664"/>
+            <a:ext cx="685800" cy="475488"/>
           </a:xfrm>
           <a:prstGeom prst="rect">
             <a:avLst>
-              <a:gd name="adj" fmla="val 9524"/>
+              <a:gd name="adj" fmla="val 7692"/>
             </a:avLst>
           </a:prstGeom>
           <a:solidFill>
@@ -22574,14 +22551,14 @@
       </p:sp>
       <p:sp>
         <p:nvSpPr>
-          <p:cNvPr id="34" name="Text 32"/>
-          <p:cNvSpPr/>
-          <p:nvPr/>
-        </p:nvSpPr>
-        <p:spPr>
-          <a:xfrm>
-            <a:off x="2670048" y="4169664"/>
-            <a:ext cx="685800" cy="384048"/>
+          <p:cNvPr id="43" name="Text 41"/>
+          <p:cNvSpPr/>
+          <p:nvPr/>
+        </p:nvSpPr>
+        <p:spPr>
+          <a:xfrm>
+            <a:off x="2124837" y="4169664"/>
+            <a:ext cx="685800" cy="475488"/>
           </a:xfrm>
           <a:prstGeom prst="rect">
             <a:avLst/>
@@ -22613,18 +22590,18 @@
       </p:sp>
       <p:sp>
         <p:nvSpPr>
-          <p:cNvPr id="35" name="Shape 33"/>
-          <p:cNvSpPr/>
-          <p:nvPr/>
-        </p:nvSpPr>
-        <p:spPr>
-          <a:xfrm>
-            <a:off x="4123944" y="4169664"/>
-            <a:ext cx="685800" cy="384048"/>
+          <p:cNvPr id="44" name="Shape 42"/>
+          <p:cNvSpPr/>
+          <p:nvPr/>
+        </p:nvSpPr>
+        <p:spPr>
+          <a:xfrm>
+            <a:off x="3033522" y="4169664"/>
+            <a:ext cx="685800" cy="475488"/>
           </a:xfrm>
           <a:prstGeom prst="rect">
             <a:avLst>
-              <a:gd name="adj" fmla="val 9524"/>
+              <a:gd name="adj" fmla="val 7692"/>
             </a:avLst>
           </a:prstGeom>
           <a:solidFill>
@@ -22640,14 +22617,14 @@
       </p:sp>
       <p:sp>
         <p:nvSpPr>
-          <p:cNvPr id="36" name="Text 34"/>
-          <p:cNvSpPr/>
-          <p:nvPr/>
-        </p:nvSpPr>
-        <p:spPr>
-          <a:xfrm>
-            <a:off x="4123944" y="4169664"/>
-            <a:ext cx="685800" cy="384048"/>
+          <p:cNvPr id="45" name="Text 43"/>
+          <p:cNvSpPr/>
+          <p:nvPr/>
+        </p:nvSpPr>
+        <p:spPr>
+          <a:xfrm>
+            <a:off x="3033522" y="4169664"/>
+            <a:ext cx="685800" cy="475488"/>
           </a:xfrm>
           <a:prstGeom prst="rect">
             <a:avLst/>
@@ -22679,18 +22656,18 @@
       </p:sp>
       <p:sp>
         <p:nvSpPr>
-          <p:cNvPr id="37" name="Shape 35"/>
-          <p:cNvSpPr/>
-          <p:nvPr/>
-        </p:nvSpPr>
-        <p:spPr>
-          <a:xfrm>
-            <a:off x="5577840" y="4169664"/>
-            <a:ext cx="685800" cy="384048"/>
+          <p:cNvPr id="46" name="Shape 44"/>
+          <p:cNvSpPr/>
+          <p:nvPr/>
+        </p:nvSpPr>
+        <p:spPr>
+          <a:xfrm>
+            <a:off x="3942207" y="4169664"/>
+            <a:ext cx="685800" cy="475488"/>
           </a:xfrm>
           <a:prstGeom prst="rect">
             <a:avLst>
-              <a:gd name="adj" fmla="val 9524"/>
+              <a:gd name="adj" fmla="val 7692"/>
             </a:avLst>
           </a:prstGeom>
           <a:solidFill>
@@ -22706,14 +22683,14 @@
       </p:sp>
       <p:sp>
         <p:nvSpPr>
-          <p:cNvPr id="38" name="Text 36"/>
-          <p:cNvSpPr/>
-          <p:nvPr/>
-        </p:nvSpPr>
-        <p:spPr>
-          <a:xfrm>
-            <a:off x="5577840" y="4169664"/>
-            <a:ext cx="685800" cy="384048"/>
+          <p:cNvPr id="47" name="Text 45"/>
+          <p:cNvSpPr/>
+          <p:nvPr/>
+        </p:nvSpPr>
+        <p:spPr>
+          <a:xfrm>
+            <a:off x="3942207" y="4169664"/>
+            <a:ext cx="685800" cy="475488"/>
           </a:xfrm>
           <a:prstGeom prst="rect">
             <a:avLst/>
@@ -22745,18 +22722,18 @@
       </p:sp>
       <p:sp>
         <p:nvSpPr>
-          <p:cNvPr id="39" name="Shape 37"/>
-          <p:cNvSpPr/>
-          <p:nvPr/>
-        </p:nvSpPr>
-        <p:spPr>
-          <a:xfrm>
-            <a:off x="7031736" y="4169664"/>
-            <a:ext cx="685800" cy="384048"/>
+          <p:cNvPr id="48" name="Shape 46"/>
+          <p:cNvSpPr/>
+          <p:nvPr/>
+        </p:nvSpPr>
+        <p:spPr>
+          <a:xfrm>
+            <a:off x="4850892" y="4169664"/>
+            <a:ext cx="685800" cy="475488"/>
           </a:xfrm>
           <a:prstGeom prst="rect">
             <a:avLst>
-              <a:gd name="adj" fmla="val 9524"/>
+              <a:gd name="adj" fmla="val 7692"/>
             </a:avLst>
           </a:prstGeom>
           <a:solidFill>
@@ -22772,14 +22749,14 @@
       </p:sp>
       <p:sp>
         <p:nvSpPr>
-          <p:cNvPr id="40" name="Text 38"/>
-          <p:cNvSpPr/>
-          <p:nvPr/>
-        </p:nvSpPr>
-        <p:spPr>
-          <a:xfrm>
-            <a:off x="7031736" y="4169664"/>
-            <a:ext cx="685800" cy="384048"/>
+          <p:cNvPr id="49" name="Text 47"/>
+          <p:cNvSpPr/>
+          <p:nvPr/>
+        </p:nvSpPr>
+        <p:spPr>
+          <a:xfrm>
+            <a:off x="4850892" y="4169664"/>
+            <a:ext cx="685800" cy="475488"/>
           </a:xfrm>
           <a:prstGeom prst="rect">
             <a:avLst/>
@@ -22803,7 +22780,7 @@
                 <a:ea typeface="Trebuchet MS" pitchFamily="34" charset="-122"/>
                 <a:cs typeface="Trebuchet MS" pitchFamily="34" charset="-120"/>
               </a:rPr>
-              <a:t>que</a:t>
+              <a:t>v</a:t>
             </a:r>
             <a:endParaRPr lang="en-US" sz="900" dirty="0"/>
           </a:p>
@@ -22811,40 +22788,199 @@
       </p:sp>
       <p:sp>
         <p:nvSpPr>
-          <p:cNvPr id="41" name="Text 39"/>
-          <p:cNvSpPr/>
-          <p:nvPr/>
-        </p:nvSpPr>
-        <p:spPr>
-          <a:xfrm>
-            <a:off x="7031736" y="4572000"/>
-            <a:ext cx="685800" cy="219456"/>
-          </a:xfrm>
-          <a:prstGeom prst="rect">
-            <a:avLst/>
-          </a:prstGeom>
-          <a:noFill/>
-          <a:ln/>
-        </p:spPr>
-        <p:txBody>
-          <a:bodyPr wrap="square" lIns="0" tIns="0" rIns="0" bIns="0" rtlCol="0" anchor="t"/>
-          <a:lstStyle/>
-          <a:p>
-            <a:pPr algn="ctr" indent="0" marL="0">
-              <a:buNone/>
-            </a:pPr>
-            <a:r>
-              <a:rPr lang="en-US" sz="750" i="1" dirty="0">
-                <a:solidFill>
-                  <a:srgbClr val="94A3B8"/>
-                </a:solidFill>
-                <a:latin typeface="Calibri" pitchFamily="34" charset="0"/>
-                <a:ea typeface="Calibri" pitchFamily="34" charset="-122"/>
-                <a:cs typeface="Calibri" pitchFamily="34" charset="-120"/>
-              </a:rPr>
-              <a:t>/k/</a:t>
-            </a:r>
-            <a:endParaRPr lang="en-US" sz="750" dirty="0"/>
+          <p:cNvPr id="50" name="Shape 48"/>
+          <p:cNvSpPr/>
+          <p:nvPr/>
+        </p:nvSpPr>
+        <p:spPr>
+          <a:xfrm>
+            <a:off x="5759577" y="4169664"/>
+            <a:ext cx="685800" cy="475488"/>
+          </a:xfrm>
+          <a:prstGeom prst="rect">
+            <a:avLst>
+              <a:gd name="adj" fmla="val 7692"/>
+            </a:avLst>
+          </a:prstGeom>
+          <a:solidFill>
+            <a:srgbClr val="FFFFFF"/>
+          </a:solidFill>
+          <a:ln w="12700">
+            <a:solidFill>
+              <a:srgbClr val="DB2777"/>
+            </a:solidFill>
+            <a:prstDash val="solid"/>
+          </a:ln>
+        </p:spPr>
+      </p:sp>
+      <p:sp>
+        <p:nvSpPr>
+          <p:cNvPr id="51" name="Text 49"/>
+          <p:cNvSpPr/>
+          <p:nvPr/>
+        </p:nvSpPr>
+        <p:spPr>
+          <a:xfrm>
+            <a:off x="5759577" y="4169664"/>
+            <a:ext cx="685800" cy="475488"/>
+          </a:xfrm>
+          <a:prstGeom prst="rect">
+            <a:avLst/>
+          </a:prstGeom>
+          <a:noFill/>
+          <a:ln/>
+        </p:spPr>
+        <p:txBody>
+          <a:bodyPr wrap="square" lIns="0" tIns="0" rIns="0" bIns="0" rtlCol="0" anchor="ctr"/>
+          <a:lstStyle/>
+          <a:p>
+            <a:pPr algn="ctr" indent="0" marL="0">
+              <a:buNone/>
+            </a:pPr>
+            <a:r>
+              <a:rPr lang="en-US" sz="900" b="1" dirty="0">
+                <a:solidFill>
+                  <a:srgbClr val="9D174D"/>
+                </a:solidFill>
+                <a:latin typeface="Trebuchet MS" pitchFamily="34" charset="0"/>
+                <a:ea typeface="Trebuchet MS" pitchFamily="34" charset="-122"/>
+                <a:cs typeface="Trebuchet MS" pitchFamily="34" charset="-120"/>
+              </a:rPr>
+              <a:t>er</a:t>
+            </a:r>
+            <a:endParaRPr lang="en-US" sz="900" dirty="0"/>
+          </a:p>
+        </p:txBody>
+      </p:sp>
+      <p:sp>
+        <p:nvSpPr>
+          <p:cNvPr id="52" name="Shape 50"/>
+          <p:cNvSpPr/>
+          <p:nvPr/>
+        </p:nvSpPr>
+        <p:spPr>
+          <a:xfrm>
+            <a:off x="6668262" y="4169664"/>
+            <a:ext cx="685800" cy="475488"/>
+          </a:xfrm>
+          <a:prstGeom prst="rect">
+            <a:avLst>
+              <a:gd name="adj" fmla="val 7692"/>
+            </a:avLst>
+          </a:prstGeom>
+          <a:solidFill>
+            <a:srgbClr val="FFFFFF"/>
+          </a:solidFill>
+          <a:ln w="12700">
+            <a:solidFill>
+              <a:srgbClr val="DB2777"/>
+            </a:solidFill>
+            <a:prstDash val="solid"/>
+          </a:ln>
+        </p:spPr>
+      </p:sp>
+      <p:sp>
+        <p:nvSpPr>
+          <p:cNvPr id="53" name="Text 51"/>
+          <p:cNvSpPr/>
+          <p:nvPr/>
+        </p:nvSpPr>
+        <p:spPr>
+          <a:xfrm>
+            <a:off x="6668262" y="4169664"/>
+            <a:ext cx="685800" cy="475488"/>
+          </a:xfrm>
+          <a:prstGeom prst="rect">
+            <a:avLst/>
+          </a:prstGeom>
+          <a:noFill/>
+          <a:ln/>
+        </p:spPr>
+        <p:txBody>
+          <a:bodyPr wrap="square" lIns="0" tIns="0" rIns="0" bIns="0" rtlCol="0" anchor="ctr"/>
+          <a:lstStyle/>
+          <a:p>
+            <a:pPr algn="ctr" indent="0" marL="0">
+              <a:buNone/>
+            </a:pPr>
+            <a:r>
+              <a:rPr lang="en-US" sz="900" b="1" dirty="0">
+                <a:solidFill>
+                  <a:srgbClr val="9D174D"/>
+                </a:solidFill>
+                <a:latin typeface="Trebuchet MS" pitchFamily="34" charset="0"/>
+                <a:ea typeface="Trebuchet MS" pitchFamily="34" charset="-122"/>
+                <a:cs typeface="Trebuchet MS" pitchFamily="34" charset="-120"/>
+              </a:rPr>
+              <a:t>s</a:t>
+            </a:r>
+            <a:endParaRPr lang="en-US" sz="900" dirty="0"/>
+          </a:p>
+        </p:txBody>
+      </p:sp>
+      <p:sp>
+        <p:nvSpPr>
+          <p:cNvPr id="54" name="Shape 52"/>
+          <p:cNvSpPr/>
+          <p:nvPr/>
+        </p:nvSpPr>
+        <p:spPr>
+          <a:xfrm>
+            <a:off x="7576947" y="4169664"/>
+            <a:ext cx="685800" cy="475488"/>
+          </a:xfrm>
+          <a:prstGeom prst="rect">
+            <a:avLst>
+              <a:gd name="adj" fmla="val 7692"/>
+            </a:avLst>
+          </a:prstGeom>
+          <a:solidFill>
+            <a:srgbClr val="FFFFFF"/>
+          </a:solidFill>
+          <a:ln w="12700">
+            <a:solidFill>
+              <a:srgbClr val="DB2777"/>
+            </a:solidFill>
+            <a:prstDash val="solid"/>
+          </a:ln>
+        </p:spPr>
+      </p:sp>
+      <p:sp>
+        <p:nvSpPr>
+          <p:cNvPr id="55" name="Text 53"/>
+          <p:cNvSpPr/>
+          <p:nvPr/>
+        </p:nvSpPr>
+        <p:spPr>
+          <a:xfrm>
+            <a:off x="7576947" y="4169664"/>
+            <a:ext cx="685800" cy="475488"/>
+          </a:xfrm>
+          <a:prstGeom prst="rect">
+            <a:avLst/>
+          </a:prstGeom>
+          <a:noFill/>
+          <a:ln/>
+        </p:spPr>
+        <p:txBody>
+          <a:bodyPr wrap="square" lIns="0" tIns="0" rIns="0" bIns="0" rtlCol="0" anchor="ctr"/>
+          <a:lstStyle/>
+          <a:p>
+            <a:pPr algn="ctr" indent="0" marL="0">
+              <a:buNone/>
+            </a:pPr>
+            <a:r>
+              <a:rPr lang="en-US" sz="900" b="1" dirty="0">
+                <a:solidFill>
+                  <a:srgbClr val="9D174D"/>
+                </a:solidFill>
+                <a:latin typeface="Trebuchet MS" pitchFamily="34" charset="0"/>
+                <a:ea typeface="Trebuchet MS" pitchFamily="34" charset="-122"/>
+                <a:cs typeface="Trebuchet MS" pitchFamily="34" charset="-120"/>
+              </a:rPr>
+              <a:t>al</a:t>
+            </a:r>
+            <a:endParaRPr lang="en-US" sz="900" dirty="0"/>
           </a:p>
         </p:txBody>
       </p:sp>
@@ -23273,7 +23409,7 @@
                 <a:ea typeface="Trebuchet MS" pitchFamily="34" charset="-122"/>
                 <a:cs typeface="Trebuchet MS" pitchFamily="34" charset="-120"/>
               </a:rPr>
-              <a:t>unify</a:t>
+              <a:t>universe</a:t>
             </a:r>
             <a:endParaRPr lang="en-US" sz="2800" dirty="0"/>
           </a:p>
@@ -24100,7 +24236,7 @@
                 <a:ea typeface="Trebuchet MS" pitchFamily="34" charset="-122"/>
                 <a:cs typeface="Trebuchet MS" pitchFamily="34" charset="-120"/>
               </a:rPr>
-              <a:t>unify</a:t>
+              <a:t>universe</a:t>
             </a:r>
             <a:endParaRPr lang="en-US" sz="2800" dirty="0"/>
           </a:p>
@@ -24351,7 +24487,7 @@
                 <a:ea typeface="Trebuchet MS" pitchFamily="34" charset="-122"/>
                 <a:cs typeface="Trebuchet MS" pitchFamily="34" charset="-120"/>
               </a:rPr>
-              <a:t>fy</a:t>
+              <a:t>verse</a:t>
             </a:r>
             <a:endParaRPr lang="en-US" sz="1300" dirty="0"/>
           </a:p>
@@ -24390,7 +24526,7 @@
                 <a:ea typeface="Calibri" pitchFamily="34" charset="-122"/>
                 <a:cs typeface="Calibri" pitchFamily="34" charset="-120"/>
               </a:rPr>
-              <a:t>to make</a:t>
+              <a:t>to turn</a:t>
             </a:r>
             <a:endParaRPr lang="en-US" sz="850" dirty="0"/>
           </a:p>
@@ -25804,7 +25940,7 @@
                 <a:ea typeface="Trebuchet MS" pitchFamily="34" charset="-122"/>
                 <a:cs typeface="Trebuchet MS" pitchFamily="34" charset="-120"/>
               </a:rPr>
-              <a:t>unify</a:t>
+              <a:t>universe</a:t>
             </a:r>
             <a:endParaRPr lang="en-US" sz="2800" dirty="0"/>
           </a:p>
@@ -26055,7 +26191,7 @@
                 <a:ea typeface="Trebuchet MS" pitchFamily="34" charset="-122"/>
                 <a:cs typeface="Trebuchet MS" pitchFamily="34" charset="-120"/>
               </a:rPr>
-              <a:t>fy</a:t>
+              <a:t>verse</a:t>
             </a:r>
             <a:endParaRPr lang="en-US" sz="1300" dirty="0"/>
           </a:p>
@@ -26094,7 +26230,7 @@
                 <a:ea typeface="Calibri" pitchFamily="34" charset="-122"/>
                 <a:cs typeface="Calibri" pitchFamily="34" charset="-120"/>
               </a:rPr>
-              <a:t>to make</a:t>
+              <a:t>to turn</a:t>
             </a:r>
             <a:endParaRPr lang="en-US" sz="850" dirty="0"/>
           </a:p>
@@ -26463,7 +26599,7 @@
                 <a:ea typeface="Trebuchet MS" pitchFamily="34" charset="-122"/>
                 <a:cs typeface="Trebuchet MS" pitchFamily="34" charset="-120"/>
               </a:rPr>
-              <a:t>fy</a:t>
+              <a:t>verse</a:t>
             </a:r>
             <a:endParaRPr lang="en-US" sz="1400" dirty="0"/>
           </a:p>
@@ -27026,7 +27162,7 @@
                 <a:ea typeface="Trebuchet MS" pitchFamily="34" charset="-122"/>
                 <a:cs typeface="Trebuchet MS" pitchFamily="34" charset="-120"/>
               </a:rPr>
-              <a:t>unify</a:t>
+              <a:t>universe</a:t>
             </a:r>
             <a:endParaRPr lang="en-US" sz="2800" dirty="0"/>
           </a:p>
@@ -27277,7 +27413,7 @@
                 <a:ea typeface="Trebuchet MS" pitchFamily="34" charset="-122"/>
                 <a:cs typeface="Trebuchet MS" pitchFamily="34" charset="-120"/>
               </a:rPr>
-              <a:t>fy</a:t>
+              <a:t>verse</a:t>
             </a:r>
             <a:endParaRPr lang="en-US" sz="1300" dirty="0"/>
           </a:p>
@@ -27316,7 +27452,7 @@
                 <a:ea typeface="Calibri" pitchFamily="34" charset="-122"/>
                 <a:cs typeface="Calibri" pitchFamily="34" charset="-120"/>
               </a:rPr>
-              <a:t>to make</a:t>
+              <a:t>to turn</a:t>
             </a:r>
             <a:endParaRPr lang="en-US" sz="850" dirty="0"/>
           </a:p>
@@ -27685,7 +27821,7 @@
                 <a:ea typeface="Trebuchet MS" pitchFamily="34" charset="-122"/>
                 <a:cs typeface="Trebuchet MS" pitchFamily="34" charset="-120"/>
               </a:rPr>
-              <a:t>fy</a:t>
+              <a:t>verse</a:t>
             </a:r>
             <a:endParaRPr lang="en-US" sz="1400" dirty="0"/>
           </a:p>
@@ -27792,7 +27928,7 @@
         </p:nvSpPr>
         <p:spPr>
           <a:xfrm>
-            <a:off x="2427732" y="4169664"/>
+            <a:off x="2254649" y="4169664"/>
             <a:ext cx="685800" cy="384048"/>
           </a:xfrm>
           <a:prstGeom prst="rect">
@@ -27819,7 +27955,7 @@
         </p:nvSpPr>
         <p:spPr>
           <a:xfrm>
-            <a:off x="2427732" y="4169664"/>
+            <a:off x="2254649" y="4169664"/>
             <a:ext cx="685800" cy="384048"/>
           </a:xfrm>
           <a:prstGeom prst="rect">
@@ -27858,7 +27994,7 @@
         </p:nvSpPr>
         <p:spPr>
           <a:xfrm>
-            <a:off x="3639312" y="4169664"/>
+            <a:off x="3293146" y="4169664"/>
             <a:ext cx="685800" cy="384048"/>
           </a:xfrm>
           <a:prstGeom prst="rect">
@@ -27885,7 +28021,7 @@
         </p:nvSpPr>
         <p:spPr>
           <a:xfrm>
-            <a:off x="3639312" y="4169664"/>
+            <a:off x="3293146" y="4169664"/>
             <a:ext cx="685800" cy="384048"/>
           </a:xfrm>
           <a:prstGeom prst="rect">
@@ -27924,7 +28060,7 @@
         </p:nvSpPr>
         <p:spPr>
           <a:xfrm>
-            <a:off x="4850892" y="4169664"/>
+            <a:off x="4331643" y="4169664"/>
             <a:ext cx="685800" cy="384048"/>
           </a:xfrm>
           <a:prstGeom prst="rect">
@@ -27951,7 +28087,7 @@
         </p:nvSpPr>
         <p:spPr>
           <a:xfrm>
-            <a:off x="4850892" y="4169664"/>
+            <a:off x="4331643" y="4169664"/>
             <a:ext cx="685800" cy="384048"/>
           </a:xfrm>
           <a:prstGeom prst="rect">
@@ -27990,7 +28126,7 @@
         </p:nvSpPr>
         <p:spPr>
           <a:xfrm>
-            <a:off x="6062472" y="4169664"/>
+            <a:off x="5370141" y="4169664"/>
             <a:ext cx="685800" cy="384048"/>
           </a:xfrm>
           <a:prstGeom prst="rect">
@@ -28017,7 +28153,7 @@
         </p:nvSpPr>
         <p:spPr>
           <a:xfrm>
-            <a:off x="6062472" y="4169664"/>
+            <a:off x="5370141" y="4169664"/>
             <a:ext cx="685800" cy="384048"/>
           </a:xfrm>
           <a:prstGeom prst="rect">
@@ -28042,7 +28178,7 @@
                 <a:ea typeface="Trebuchet MS" pitchFamily="34" charset="-122"/>
                 <a:cs typeface="Trebuchet MS" pitchFamily="34" charset="-120"/>
               </a:rPr>
-              <a:t>f</a:t>
+              <a:t>v</a:t>
             </a:r>
             <a:endParaRPr lang="en-US" sz="900" dirty="0"/>
           </a:p>
@@ -28056,7 +28192,7 @@
         </p:nvSpPr>
         <p:spPr>
           <a:xfrm>
-            <a:off x="7274052" y="4169664"/>
+            <a:off x="6408638" y="4169664"/>
             <a:ext cx="685800" cy="384048"/>
           </a:xfrm>
           <a:prstGeom prst="rect">
@@ -28083,7 +28219,7 @@
         </p:nvSpPr>
         <p:spPr>
           <a:xfrm>
-            <a:off x="7274052" y="4169664"/>
+            <a:off x="6408638" y="4169664"/>
             <a:ext cx="685800" cy="384048"/>
           </a:xfrm>
           <a:prstGeom prst="rect">
@@ -28108,7 +28244,7 @@
                 <a:ea typeface="Trebuchet MS" pitchFamily="34" charset="-122"/>
                 <a:cs typeface="Trebuchet MS" pitchFamily="34" charset="-120"/>
               </a:rPr>
-              <a:t>y</a:t>
+              <a:t>er</a:t>
             </a:r>
             <a:endParaRPr lang="en-US" sz="900" dirty="0"/>
           </a:p>
@@ -28116,13 +28252,79 @@
       </p:sp>
       <p:sp>
         <p:nvSpPr>
-          <p:cNvPr id="46" name="Text 44"/>
-          <p:cNvSpPr/>
-          <p:nvPr/>
-        </p:nvSpPr>
-        <p:spPr>
-          <a:xfrm>
-            <a:off x="7274052" y="4572000"/>
+          <p:cNvPr id="46" name="Shape 44"/>
+          <p:cNvSpPr/>
+          <p:nvPr/>
+        </p:nvSpPr>
+        <p:spPr>
+          <a:xfrm>
+            <a:off x="7447135" y="4169664"/>
+            <a:ext cx="685800" cy="384048"/>
+          </a:xfrm>
+          <a:prstGeom prst="rect">
+            <a:avLst>
+              <a:gd name="adj" fmla="val 9524"/>
+            </a:avLst>
+          </a:prstGeom>
+          <a:solidFill>
+            <a:srgbClr val="FFFFFF"/>
+          </a:solidFill>
+          <a:ln w="12700">
+            <a:solidFill>
+              <a:srgbClr val="DB2777"/>
+            </a:solidFill>
+            <a:prstDash val="solid"/>
+          </a:ln>
+        </p:spPr>
+      </p:sp>
+      <p:sp>
+        <p:nvSpPr>
+          <p:cNvPr id="47" name="Text 45"/>
+          <p:cNvSpPr/>
+          <p:nvPr/>
+        </p:nvSpPr>
+        <p:spPr>
+          <a:xfrm>
+            <a:off x="7447135" y="4169664"/>
+            <a:ext cx="685800" cy="384048"/>
+          </a:xfrm>
+          <a:prstGeom prst="rect">
+            <a:avLst/>
+          </a:prstGeom>
+          <a:noFill/>
+          <a:ln/>
+        </p:spPr>
+        <p:txBody>
+          <a:bodyPr wrap="square" lIns="0" tIns="0" rIns="0" bIns="0" rtlCol="0" anchor="ctr"/>
+          <a:lstStyle/>
+          <a:p>
+            <a:pPr algn="ctr" indent="0" marL="0">
+              <a:buNone/>
+            </a:pPr>
+            <a:r>
+              <a:rPr lang="en-US" sz="900" b="1" dirty="0">
+                <a:solidFill>
+                  <a:srgbClr val="9D174D"/>
+                </a:solidFill>
+                <a:latin typeface="Trebuchet MS" pitchFamily="34" charset="0"/>
+                <a:ea typeface="Trebuchet MS" pitchFamily="34" charset="-122"/>
+                <a:cs typeface="Trebuchet MS" pitchFamily="34" charset="-120"/>
+              </a:rPr>
+              <a:t>se</a:t>
+            </a:r>
+            <a:endParaRPr lang="en-US" sz="900" dirty="0"/>
+          </a:p>
+        </p:txBody>
+      </p:sp>
+      <p:sp>
+        <p:nvSpPr>
+          <p:cNvPr id="48" name="Text 46"/>
+          <p:cNvSpPr/>
+          <p:nvPr/>
+        </p:nvSpPr>
+        <p:spPr>
+          <a:xfrm>
+            <a:off x="7447135" y="4572000"/>
             <a:ext cx="685800" cy="219456"/>
           </a:xfrm>
           <a:prstGeom prst="rect">
@@ -28147,7 +28349,7 @@
                 <a:ea typeface="Calibri" pitchFamily="34" charset="-122"/>
                 <a:cs typeface="Calibri" pitchFamily="34" charset="-120"/>
               </a:rPr>
-              <a:t>/ee/</a:t>
+              <a:t>/s/</a:t>
             </a:r>
             <a:endParaRPr lang="en-US" sz="750" dirty="0"/>
           </a:p>
@@ -28578,7 +28780,7 @@
                 <a:ea typeface="Trebuchet MS" pitchFamily="34" charset="-122"/>
                 <a:cs typeface="Trebuchet MS" pitchFamily="34" charset="-120"/>
               </a:rPr>
-              <a:t>unity</a:t>
+              <a:t>unique</a:t>
             </a:r>
             <a:endParaRPr lang="en-US" sz="2800" dirty="0"/>
           </a:p>
@@ -29405,7 +29607,7 @@
                 <a:ea typeface="Trebuchet MS" pitchFamily="34" charset="-122"/>
                 <a:cs typeface="Trebuchet MS" pitchFamily="34" charset="-120"/>
               </a:rPr>
-              <a:t>unity</a:t>
+              <a:t>unique</a:t>
             </a:r>
             <a:endParaRPr lang="en-US" sz="2800" dirty="0"/>
           </a:p>
@@ -29656,7 +29858,7 @@
                 <a:ea typeface="Trebuchet MS" pitchFamily="34" charset="-122"/>
                 <a:cs typeface="Trebuchet MS" pitchFamily="34" charset="-120"/>
               </a:rPr>
-              <a:t>ty</a:t>
+              <a:t>que</a:t>
             </a:r>
             <a:endParaRPr lang="en-US" sz="1300" dirty="0"/>
           </a:p>
@@ -29695,7 +29897,7 @@
                 <a:ea typeface="Calibri" pitchFamily="34" charset="-122"/>
                 <a:cs typeface="Calibri" pitchFamily="34" charset="-120"/>
               </a:rPr>
-              <a:t>state or condition</a:t>
+              <a:t>kind or type</a:t>
             </a:r>
             <a:endParaRPr lang="en-US" sz="850" dirty="0"/>
           </a:p>
@@ -29703,7 +29905,46 @@
       </p:sp>
       <p:sp>
         <p:nvSpPr>
-          <p:cNvPr id="22" name="Shape 20"/>
+          <p:cNvPr id="22" name="Text 20"/>
+          <p:cNvSpPr/>
+          <p:nvPr/>
+        </p:nvSpPr>
+        <p:spPr>
+          <a:xfrm>
+            <a:off x="5803392" y="2752344"/>
+            <a:ext cx="1828800" cy="182880"/>
+          </a:xfrm>
+          <a:prstGeom prst="rect">
+            <a:avLst/>
+          </a:prstGeom>
+          <a:noFill/>
+          <a:ln/>
+        </p:spPr>
+        <p:txBody>
+          <a:bodyPr wrap="square" lIns="0" tIns="0" rIns="0" bIns="0" rtlCol="0" anchor="t"/>
+          <a:lstStyle/>
+          <a:p>
+            <a:pPr algn="ctr" indent="0" marL="0">
+              <a:buNone/>
+            </a:pPr>
+            <a:r>
+              <a:rPr lang="en-US" sz="700" i="1" dirty="0">
+                <a:solidFill>
+                  <a:srgbClr val="94A3B8"/>
+                </a:solidFill>
+                <a:latin typeface="Calibri" pitchFamily="34" charset="0"/>
+                <a:ea typeface="Calibri" pitchFamily="34" charset="-122"/>
+                <a:cs typeface="Calibri" pitchFamily="34" charset="-120"/>
+              </a:rPr>
+              <a:t>from Latin 'unicus'; 'que' makes the /k/ sound</a:t>
+            </a:r>
+            <a:endParaRPr lang="en-US" sz="700" dirty="0"/>
+          </a:p>
+        </p:txBody>
+      </p:sp>
+      <p:sp>
+        <p:nvSpPr>
+          <p:cNvPr id="23" name="Shape 21"/>
           <p:cNvSpPr/>
           <p:nvPr/>
         </p:nvSpPr>
@@ -29730,7 +29971,7 @@
       </p:sp>
       <p:sp>
         <p:nvSpPr>
-          <p:cNvPr id="23" name="Text 21"/>
+          <p:cNvPr id="24" name="Text 22"/>
           <p:cNvSpPr/>
           <p:nvPr/>
         </p:nvSpPr>
@@ -29769,7 +30010,7 @@
       </p:sp>
       <p:sp>
         <p:nvSpPr>
-          <p:cNvPr id="24" name="Shape 22"/>
+          <p:cNvPr id="25" name="Shape 23"/>
           <p:cNvSpPr/>
           <p:nvPr/>
         </p:nvSpPr>
@@ -29796,7 +30037,7 @@
       </p:sp>
       <p:sp>
         <p:nvSpPr>
-          <p:cNvPr id="25" name="Text 23"/>
+          <p:cNvPr id="26" name="Text 24"/>
           <p:cNvSpPr/>
           <p:nvPr/>
         </p:nvSpPr>
@@ -29835,7 +30076,7 @@
       </p:sp>
       <p:sp>
         <p:nvSpPr>
-          <p:cNvPr id="26" name="Shape 24"/>
+          <p:cNvPr id="27" name="Shape 25"/>
           <p:cNvSpPr/>
           <p:nvPr/>
         </p:nvSpPr>
@@ -29862,7 +30103,7 @@
       </p:sp>
       <p:sp>
         <p:nvSpPr>
-          <p:cNvPr id="27" name="Text 25"/>
+          <p:cNvPr id="28" name="Text 26"/>
           <p:cNvSpPr/>
           <p:nvPr/>
         </p:nvSpPr>
@@ -29901,7 +30142,7 @@
       </p:sp>
       <p:sp>
         <p:nvSpPr>
-          <p:cNvPr id="28" name="Shape 26"/>
+          <p:cNvPr id="29" name="Shape 27"/>
           <p:cNvSpPr/>
           <p:nvPr/>
         </p:nvSpPr>
@@ -29928,7 +30169,7 @@
       </p:sp>
       <p:sp>
         <p:nvSpPr>
-          <p:cNvPr id="29" name="Text 27"/>
+          <p:cNvPr id="30" name="Text 28"/>
           <p:cNvSpPr/>
           <p:nvPr/>
         </p:nvSpPr>
@@ -30390,7 +30631,7 @@
                 <a:ea typeface="Trebuchet MS" pitchFamily="34" charset="-122"/>
                 <a:cs typeface="Trebuchet MS" pitchFamily="34" charset="-120"/>
               </a:rPr>
-              <a:t>unity</a:t>
+              <a:t>unique</a:t>
             </a:r>
             <a:endParaRPr lang="en-US" sz="2800" dirty="0"/>
           </a:p>
@@ -30641,7 +30882,7 @@
                 <a:ea typeface="Trebuchet MS" pitchFamily="34" charset="-122"/>
                 <a:cs typeface="Trebuchet MS" pitchFamily="34" charset="-120"/>
               </a:rPr>
-              <a:t>ty</a:t>
+              <a:t>que</a:t>
             </a:r>
             <a:endParaRPr lang="en-US" sz="1300" dirty="0"/>
           </a:p>
@@ -30680,7 +30921,7 @@
                 <a:ea typeface="Calibri" pitchFamily="34" charset="-122"/>
                 <a:cs typeface="Calibri" pitchFamily="34" charset="-120"/>
               </a:rPr>
-              <a:t>state or condition</a:t>
+              <a:t>kind or type</a:t>
             </a:r>
             <a:endParaRPr lang="en-US" sz="850" dirty="0"/>
           </a:p>
@@ -30688,7 +30929,46 @@
       </p:sp>
       <p:sp>
         <p:nvSpPr>
-          <p:cNvPr id="22" name="Shape 20"/>
+          <p:cNvPr id="22" name="Text 20"/>
+          <p:cNvSpPr/>
+          <p:nvPr/>
+        </p:nvSpPr>
+        <p:spPr>
+          <a:xfrm>
+            <a:off x="5803392" y="2752344"/>
+            <a:ext cx="1828800" cy="182880"/>
+          </a:xfrm>
+          <a:prstGeom prst="rect">
+            <a:avLst/>
+          </a:prstGeom>
+          <a:noFill/>
+          <a:ln/>
+        </p:spPr>
+        <p:txBody>
+          <a:bodyPr wrap="square" lIns="0" tIns="0" rIns="0" bIns="0" rtlCol="0" anchor="t"/>
+          <a:lstStyle/>
+          <a:p>
+            <a:pPr algn="ctr" indent="0" marL="0">
+              <a:buNone/>
+            </a:pPr>
+            <a:r>
+              <a:rPr lang="en-US" sz="700" i="1" dirty="0">
+                <a:solidFill>
+                  <a:srgbClr val="94A3B8"/>
+                </a:solidFill>
+                <a:latin typeface="Calibri" pitchFamily="34" charset="0"/>
+                <a:ea typeface="Calibri" pitchFamily="34" charset="-122"/>
+                <a:cs typeface="Calibri" pitchFamily="34" charset="-120"/>
+              </a:rPr>
+              <a:t>from Latin 'unicus'; 'que' makes the /k/ sound</a:t>
+            </a:r>
+            <a:endParaRPr lang="en-US" sz="700" dirty="0"/>
+          </a:p>
+        </p:txBody>
+      </p:sp>
+      <p:sp>
+        <p:nvSpPr>
+          <p:cNvPr id="23" name="Shape 21"/>
           <p:cNvSpPr/>
           <p:nvPr/>
         </p:nvSpPr>
@@ -30715,7 +30995,7 @@
       </p:sp>
       <p:sp>
         <p:nvSpPr>
-          <p:cNvPr id="23" name="Text 21"/>
+          <p:cNvPr id="24" name="Text 22"/>
           <p:cNvSpPr/>
           <p:nvPr/>
         </p:nvSpPr>
@@ -30754,7 +31034,7 @@
       </p:sp>
       <p:sp>
         <p:nvSpPr>
-          <p:cNvPr id="24" name="Shape 22"/>
+          <p:cNvPr id="25" name="Shape 23"/>
           <p:cNvSpPr/>
           <p:nvPr/>
         </p:nvSpPr>
@@ -30781,13 +31061,13 @@
       </p:sp>
       <p:sp>
         <p:nvSpPr>
-          <p:cNvPr id="25" name="Shape 23"/>
-          <p:cNvSpPr/>
-          <p:nvPr/>
-        </p:nvSpPr>
-        <p:spPr>
-          <a:xfrm>
-            <a:off x="2313432" y="3364992"/>
+          <p:cNvPr id="26" name="Shape 24"/>
+          <p:cNvSpPr/>
+          <p:nvPr/>
+        </p:nvSpPr>
+        <p:spPr>
+          <a:xfrm>
+            <a:off x="2999232" y="3364992"/>
             <a:ext cx="1645920" cy="475488"/>
           </a:xfrm>
           <a:prstGeom prst="rect">
@@ -30808,13 +31088,13 @@
       </p:sp>
       <p:sp>
         <p:nvSpPr>
-          <p:cNvPr id="26" name="Text 24"/>
-          <p:cNvSpPr/>
-          <p:nvPr/>
-        </p:nvSpPr>
-        <p:spPr>
-          <a:xfrm>
-            <a:off x="2313432" y="3364992"/>
+          <p:cNvPr id="27" name="Text 25"/>
+          <p:cNvSpPr/>
+          <p:nvPr/>
+        </p:nvSpPr>
+        <p:spPr>
+          <a:xfrm>
+            <a:off x="2999232" y="3364992"/>
             <a:ext cx="1645920" cy="475488"/>
           </a:xfrm>
           <a:prstGeom prst="rect">
@@ -30847,14 +31127,14 @@
       </p:sp>
       <p:sp>
         <p:nvSpPr>
-          <p:cNvPr id="27" name="Text 25"/>
-          <p:cNvSpPr/>
-          <p:nvPr/>
-        </p:nvSpPr>
-        <p:spPr>
-          <a:xfrm>
-            <a:off x="3959352" y="3364992"/>
-            <a:ext cx="411480" cy="475488"/>
+          <p:cNvPr id="28" name="Text 26"/>
+          <p:cNvSpPr/>
+          <p:nvPr/>
+        </p:nvSpPr>
+        <p:spPr>
+          <a:xfrm>
+            <a:off x="4645152" y="3364992"/>
+            <a:ext cx="1097280" cy="475488"/>
           </a:xfrm>
           <a:prstGeom prst="rect">
             <a:avLst/>
@@ -30886,13 +31166,13 @@
       </p:sp>
       <p:sp>
         <p:nvSpPr>
-          <p:cNvPr id="28" name="Shape 26"/>
-          <p:cNvSpPr/>
-          <p:nvPr/>
-        </p:nvSpPr>
-        <p:spPr>
-          <a:xfrm>
-            <a:off x="4370832" y="3364992"/>
+          <p:cNvPr id="29" name="Shape 27"/>
+          <p:cNvSpPr/>
+          <p:nvPr/>
+        </p:nvSpPr>
+        <p:spPr>
+          <a:xfrm>
+            <a:off x="5742432" y="3364992"/>
             <a:ext cx="1645920" cy="475488"/>
           </a:xfrm>
           <a:prstGeom prst="rect">
@@ -30913,13 +31193,13 @@
       </p:sp>
       <p:sp>
         <p:nvSpPr>
-          <p:cNvPr id="29" name="Text 27"/>
-          <p:cNvSpPr/>
-          <p:nvPr/>
-        </p:nvSpPr>
-        <p:spPr>
-          <a:xfrm>
-            <a:off x="4370832" y="3364992"/>
+          <p:cNvPr id="30" name="Text 28"/>
+          <p:cNvSpPr/>
+          <p:nvPr/>
+        </p:nvSpPr>
+        <p:spPr>
+          <a:xfrm>
+            <a:off x="5742432" y="3364992"/>
             <a:ext cx="1645920" cy="475488"/>
           </a:xfrm>
           <a:prstGeom prst="rect">
@@ -30944,7 +31224,7 @@
                 <a:ea typeface="Trebuchet MS" pitchFamily="34" charset="-122"/>
                 <a:cs typeface="Trebuchet MS" pitchFamily="34" charset="-120"/>
               </a:rPr>
-              <a:t>ni</a:t>
+              <a:t>nique</a:t>
             </a:r>
             <a:endParaRPr lang="en-US" sz="1400" dirty="0"/>
           </a:p>
@@ -30952,106 +31232,67 @@
       </p:sp>
       <p:sp>
         <p:nvSpPr>
-          <p:cNvPr id="30" name="Text 28"/>
-          <p:cNvSpPr/>
-          <p:nvPr/>
-        </p:nvSpPr>
-        <p:spPr>
-          <a:xfrm>
-            <a:off x="6016752" y="3364992"/>
-            <a:ext cx="411480" cy="475488"/>
-          </a:xfrm>
-          <a:prstGeom prst="rect">
-            <a:avLst/>
-          </a:prstGeom>
-          <a:noFill/>
-          <a:ln/>
-        </p:spPr>
-        <p:txBody>
-          <a:bodyPr wrap="square" lIns="0" tIns="0" rIns="0" bIns="0" rtlCol="0" anchor="ctr"/>
-          <a:lstStyle/>
-          <a:p>
-            <a:pPr algn="ctr" indent="0" marL="0">
-              <a:buNone/>
-            </a:pPr>
-            <a:r>
-              <a:rPr lang="en-US" sz="1600" b="1" dirty="0">
-                <a:solidFill>
-                  <a:srgbClr val="0D9488"/>
+          <p:cNvPr id="31" name="Shape 29"/>
+          <p:cNvSpPr/>
+          <p:nvPr/>
+        </p:nvSpPr>
+        <p:spPr>
+          <a:xfrm>
+            <a:off x="365760" y="4096512"/>
+            <a:ext cx="1371600" cy="804672"/>
+          </a:xfrm>
+          <a:prstGeom prst="rect">
+            <a:avLst>
+              <a:gd name="adj" fmla="val 6818"/>
+            </a:avLst>
+          </a:prstGeom>
+          <a:solidFill>
+            <a:srgbClr val="E2E8F0"/>
+          </a:solidFill>
+          <a:ln w="12700">
+            <a:solidFill>
+              <a:srgbClr val="E2E8F0"/>
+            </a:solidFill>
+            <a:prstDash val="solid"/>
+          </a:ln>
+        </p:spPr>
+      </p:sp>
+      <p:sp>
+        <p:nvSpPr>
+          <p:cNvPr id="32" name="Text 30"/>
+          <p:cNvSpPr/>
+          <p:nvPr/>
+        </p:nvSpPr>
+        <p:spPr>
+          <a:xfrm>
+            <a:off x="365760" y="4096512"/>
+            <a:ext cx="1371600" cy="804672"/>
+          </a:xfrm>
+          <a:prstGeom prst="rect">
+            <a:avLst/>
+          </a:prstGeom>
+          <a:noFill/>
+          <a:ln/>
+        </p:spPr>
+        <p:txBody>
+          <a:bodyPr wrap="square" lIns="0" tIns="0" rIns="0" bIns="0" rtlCol="0" anchor="ctr"/>
+          <a:lstStyle/>
+          <a:p>
+            <a:pPr algn="ctr" indent="0" marL="0">
+              <a:buNone/>
+            </a:pPr>
+            <a:r>
+              <a:rPr lang="en-US" sz="1100" b="1" dirty="0">
+                <a:solidFill>
+                  <a:srgbClr val="475569"/>
                 </a:solidFill>
                 <a:latin typeface="Trebuchet MS" pitchFamily="34" charset="0"/>
                 <a:ea typeface="Trebuchet MS" pitchFamily="34" charset="-122"/>
                 <a:cs typeface="Trebuchet MS" pitchFamily="34" charset="-120"/>
               </a:rPr>
-              <a:t>·</a:t>
-            </a:r>
-            <a:endParaRPr lang="en-US" sz="1600" dirty="0"/>
-          </a:p>
-        </p:txBody>
-      </p:sp>
-      <p:sp>
-        <p:nvSpPr>
-          <p:cNvPr id="31" name="Shape 29"/>
-          <p:cNvSpPr/>
-          <p:nvPr/>
-        </p:nvSpPr>
-        <p:spPr>
-          <a:xfrm>
-            <a:off x="6428232" y="3364992"/>
-            <a:ext cx="1645920" cy="475488"/>
-          </a:xfrm>
-          <a:prstGeom prst="rect">
-            <a:avLst>
-              <a:gd name="adj" fmla="val 9615"/>
-            </a:avLst>
-          </a:prstGeom>
-          <a:solidFill>
-            <a:srgbClr val="FFFFFF"/>
-          </a:solidFill>
-          <a:ln w="12700">
-            <a:solidFill>
-              <a:srgbClr val="0D9488"/>
-            </a:solidFill>
-            <a:prstDash val="solid"/>
-          </a:ln>
-        </p:spPr>
-      </p:sp>
-      <p:sp>
-        <p:nvSpPr>
-          <p:cNvPr id="32" name="Text 30"/>
-          <p:cNvSpPr/>
-          <p:nvPr/>
-        </p:nvSpPr>
-        <p:spPr>
-          <a:xfrm>
-            <a:off x="6428232" y="3364992"/>
-            <a:ext cx="1645920" cy="475488"/>
-          </a:xfrm>
-          <a:prstGeom prst="rect">
-            <a:avLst/>
-          </a:prstGeom>
-          <a:noFill/>
-          <a:ln/>
-        </p:spPr>
-        <p:txBody>
-          <a:bodyPr wrap="square" lIns="0" tIns="0" rIns="0" bIns="0" rtlCol="0" anchor="ctr"/>
-          <a:lstStyle/>
-          <a:p>
-            <a:pPr algn="ctr" indent="0" marL="0">
-              <a:buNone/>
-            </a:pPr>
-            <a:r>
-              <a:rPr lang="en-US" sz="1400" b="1" dirty="0">
-                <a:solidFill>
-                  <a:srgbClr val="0D9488"/>
-                </a:solidFill>
-                <a:latin typeface="Trebuchet MS" pitchFamily="34" charset="0"/>
-                <a:ea typeface="Trebuchet MS" pitchFamily="34" charset="-122"/>
-                <a:cs typeface="Trebuchet MS" pitchFamily="34" charset="-120"/>
-              </a:rPr>
-              <a:t>ty</a:t>
-            </a:r>
-            <a:endParaRPr lang="en-US" sz="1400" dirty="0"/>
+              <a:t>Phonemes</a:t>
+            </a:r>
+            <a:endParaRPr lang="en-US" sz="1100" dirty="0"/>
           </a:p>
         </p:txBody>
       </p:sp>
@@ -31063,8 +31304,8 @@
         </p:nvSpPr>
         <p:spPr>
           <a:xfrm>
-            <a:off x="365760" y="4096512"/>
-            <a:ext cx="1371600" cy="804672"/>
+            <a:off x="1874520" y="4096512"/>
+            <a:ext cx="6903720" cy="804672"/>
           </a:xfrm>
           <a:prstGeom prst="rect">
             <a:avLst>
@@ -31072,85 +31313,19 @@
             </a:avLst>
           </a:prstGeom>
           <a:solidFill>
-            <a:srgbClr val="E2E8F0"/>
+            <a:srgbClr val="F8FAFC"/>
           </a:solidFill>
           <a:ln w="12700">
             <a:solidFill>
               <a:srgbClr val="E2E8F0"/>
             </a:solidFill>
-            <a:prstDash val="solid"/>
+            <a:prstDash val="dash"/>
           </a:ln>
         </p:spPr>
       </p:sp>
       <p:sp>
         <p:nvSpPr>
           <p:cNvPr id="34" name="Text 32"/>
-          <p:cNvSpPr/>
-          <p:nvPr/>
-        </p:nvSpPr>
-        <p:spPr>
-          <a:xfrm>
-            <a:off x="365760" y="4096512"/>
-            <a:ext cx="1371600" cy="804672"/>
-          </a:xfrm>
-          <a:prstGeom prst="rect">
-            <a:avLst/>
-          </a:prstGeom>
-          <a:noFill/>
-          <a:ln/>
-        </p:spPr>
-        <p:txBody>
-          <a:bodyPr wrap="square" lIns="0" tIns="0" rIns="0" bIns="0" rtlCol="0" anchor="ctr"/>
-          <a:lstStyle/>
-          <a:p>
-            <a:pPr algn="ctr" indent="0" marL="0">
-              <a:buNone/>
-            </a:pPr>
-            <a:r>
-              <a:rPr lang="en-US" sz="1100" b="1" dirty="0">
-                <a:solidFill>
-                  <a:srgbClr val="475569"/>
-                </a:solidFill>
-                <a:latin typeface="Trebuchet MS" pitchFamily="34" charset="0"/>
-                <a:ea typeface="Trebuchet MS" pitchFamily="34" charset="-122"/>
-                <a:cs typeface="Trebuchet MS" pitchFamily="34" charset="-120"/>
-              </a:rPr>
-              <a:t>Phonemes</a:t>
-            </a:r>
-            <a:endParaRPr lang="en-US" sz="1100" dirty="0"/>
-          </a:p>
-        </p:txBody>
-      </p:sp>
-      <p:sp>
-        <p:nvSpPr>
-          <p:cNvPr id="35" name="Shape 33"/>
-          <p:cNvSpPr/>
-          <p:nvPr/>
-        </p:nvSpPr>
-        <p:spPr>
-          <a:xfrm>
-            <a:off x="1874520" y="4096512"/>
-            <a:ext cx="6903720" cy="804672"/>
-          </a:xfrm>
-          <a:prstGeom prst="rect">
-            <a:avLst>
-              <a:gd name="adj" fmla="val 6818"/>
-            </a:avLst>
-          </a:prstGeom>
-          <a:solidFill>
-            <a:srgbClr val="F8FAFC"/>
-          </a:solidFill>
-          <a:ln w="12700">
-            <a:solidFill>
-              <a:srgbClr val="E2E8F0"/>
-            </a:solidFill>
-            <a:prstDash val="dash"/>
-          </a:ln>
-        </p:spPr>
-      </p:sp>
-      <p:sp>
-        <p:nvSpPr>
-          <p:cNvPr id="36" name="Text 34"/>
           <p:cNvSpPr/>
           <p:nvPr/>
         </p:nvSpPr>
@@ -31612,7 +31787,7 @@
                 <a:ea typeface="Trebuchet MS" pitchFamily="34" charset="-122"/>
                 <a:cs typeface="Trebuchet MS" pitchFamily="34" charset="-120"/>
               </a:rPr>
-              <a:t>unity</a:t>
+              <a:t>unique</a:t>
             </a:r>
             <a:endParaRPr lang="en-US" sz="2800" dirty="0"/>
           </a:p>
@@ -31863,7 +32038,7 @@
                 <a:ea typeface="Trebuchet MS" pitchFamily="34" charset="-122"/>
                 <a:cs typeface="Trebuchet MS" pitchFamily="34" charset="-120"/>
               </a:rPr>
-              <a:t>ty</a:t>
+              <a:t>que</a:t>
             </a:r>
             <a:endParaRPr lang="en-US" sz="1300" dirty="0"/>
           </a:p>
@@ -31902,7 +32077,7 @@
                 <a:ea typeface="Calibri" pitchFamily="34" charset="-122"/>
                 <a:cs typeface="Calibri" pitchFamily="34" charset="-120"/>
               </a:rPr>
-              <a:t>state or condition</a:t>
+              <a:t>kind or type</a:t>
             </a:r>
             <a:endParaRPr lang="en-US" sz="850" dirty="0"/>
           </a:p>
@@ -31910,7 +32085,46 @@
       </p:sp>
       <p:sp>
         <p:nvSpPr>
-          <p:cNvPr id="22" name="Shape 20"/>
+          <p:cNvPr id="22" name="Text 20"/>
+          <p:cNvSpPr/>
+          <p:nvPr/>
+        </p:nvSpPr>
+        <p:spPr>
+          <a:xfrm>
+            <a:off x="5803392" y="2752344"/>
+            <a:ext cx="1828800" cy="182880"/>
+          </a:xfrm>
+          <a:prstGeom prst="rect">
+            <a:avLst/>
+          </a:prstGeom>
+          <a:noFill/>
+          <a:ln/>
+        </p:spPr>
+        <p:txBody>
+          <a:bodyPr wrap="square" lIns="0" tIns="0" rIns="0" bIns="0" rtlCol="0" anchor="t"/>
+          <a:lstStyle/>
+          <a:p>
+            <a:pPr algn="ctr" indent="0" marL="0">
+              <a:buNone/>
+            </a:pPr>
+            <a:r>
+              <a:rPr lang="en-US" sz="700" i="1" dirty="0">
+                <a:solidFill>
+                  <a:srgbClr val="94A3B8"/>
+                </a:solidFill>
+                <a:latin typeface="Calibri" pitchFamily="34" charset="0"/>
+                <a:ea typeface="Calibri" pitchFamily="34" charset="-122"/>
+                <a:cs typeface="Calibri" pitchFamily="34" charset="-120"/>
+              </a:rPr>
+              <a:t>from Latin 'unicus'; 'que' makes the /k/ sound</a:t>
+            </a:r>
+            <a:endParaRPr lang="en-US" sz="700" dirty="0"/>
+          </a:p>
+        </p:txBody>
+      </p:sp>
+      <p:sp>
+        <p:nvSpPr>
+          <p:cNvPr id="23" name="Shape 21"/>
           <p:cNvSpPr/>
           <p:nvPr/>
         </p:nvSpPr>
@@ -31937,7 +32151,7 @@
       </p:sp>
       <p:sp>
         <p:nvSpPr>
-          <p:cNvPr id="23" name="Text 21"/>
+          <p:cNvPr id="24" name="Text 22"/>
           <p:cNvSpPr/>
           <p:nvPr/>
         </p:nvSpPr>
@@ -31976,7 +32190,7 @@
       </p:sp>
       <p:sp>
         <p:nvSpPr>
-          <p:cNvPr id="24" name="Shape 22"/>
+          <p:cNvPr id="25" name="Shape 23"/>
           <p:cNvSpPr/>
           <p:nvPr/>
         </p:nvSpPr>
@@ -32003,13 +32217,13 @@
       </p:sp>
       <p:sp>
         <p:nvSpPr>
-          <p:cNvPr id="25" name="Shape 23"/>
-          <p:cNvSpPr/>
-          <p:nvPr/>
-        </p:nvSpPr>
-        <p:spPr>
-          <a:xfrm>
-            <a:off x="2313432" y="3364992"/>
+          <p:cNvPr id="26" name="Shape 24"/>
+          <p:cNvSpPr/>
+          <p:nvPr/>
+        </p:nvSpPr>
+        <p:spPr>
+          <a:xfrm>
+            <a:off x="2999232" y="3364992"/>
             <a:ext cx="1645920" cy="475488"/>
           </a:xfrm>
           <a:prstGeom prst="rect">
@@ -32030,13 +32244,13 @@
       </p:sp>
       <p:sp>
         <p:nvSpPr>
-          <p:cNvPr id="26" name="Text 24"/>
-          <p:cNvSpPr/>
-          <p:nvPr/>
-        </p:nvSpPr>
-        <p:spPr>
-          <a:xfrm>
-            <a:off x="2313432" y="3364992"/>
+          <p:cNvPr id="27" name="Text 25"/>
+          <p:cNvSpPr/>
+          <p:nvPr/>
+        </p:nvSpPr>
+        <p:spPr>
+          <a:xfrm>
+            <a:off x="2999232" y="3364992"/>
             <a:ext cx="1645920" cy="475488"/>
           </a:xfrm>
           <a:prstGeom prst="rect">
@@ -32069,14 +32283,14 @@
       </p:sp>
       <p:sp>
         <p:nvSpPr>
-          <p:cNvPr id="27" name="Text 25"/>
-          <p:cNvSpPr/>
-          <p:nvPr/>
-        </p:nvSpPr>
-        <p:spPr>
-          <a:xfrm>
-            <a:off x="3959352" y="3364992"/>
-            <a:ext cx="411480" cy="475488"/>
+          <p:cNvPr id="28" name="Text 26"/>
+          <p:cNvSpPr/>
+          <p:nvPr/>
+        </p:nvSpPr>
+        <p:spPr>
+          <a:xfrm>
+            <a:off x="4645152" y="3364992"/>
+            <a:ext cx="1097280" cy="475488"/>
           </a:xfrm>
           <a:prstGeom prst="rect">
             <a:avLst/>
@@ -32108,13 +32322,13 @@
       </p:sp>
       <p:sp>
         <p:nvSpPr>
-          <p:cNvPr id="28" name="Shape 26"/>
-          <p:cNvSpPr/>
-          <p:nvPr/>
-        </p:nvSpPr>
-        <p:spPr>
-          <a:xfrm>
-            <a:off x="4370832" y="3364992"/>
+          <p:cNvPr id="29" name="Shape 27"/>
+          <p:cNvSpPr/>
+          <p:nvPr/>
+        </p:nvSpPr>
+        <p:spPr>
+          <a:xfrm>
+            <a:off x="5742432" y="3364992"/>
             <a:ext cx="1645920" cy="475488"/>
           </a:xfrm>
           <a:prstGeom prst="rect">
@@ -32135,13 +32349,13 @@
       </p:sp>
       <p:sp>
         <p:nvSpPr>
-          <p:cNvPr id="29" name="Text 27"/>
-          <p:cNvSpPr/>
-          <p:nvPr/>
-        </p:nvSpPr>
-        <p:spPr>
-          <a:xfrm>
-            <a:off x="4370832" y="3364992"/>
+          <p:cNvPr id="30" name="Text 28"/>
+          <p:cNvSpPr/>
+          <p:nvPr/>
+        </p:nvSpPr>
+        <p:spPr>
+          <a:xfrm>
+            <a:off x="5742432" y="3364992"/>
             <a:ext cx="1645920" cy="475488"/>
           </a:xfrm>
           <a:prstGeom prst="rect">
@@ -32166,7 +32380,7 @@
                 <a:ea typeface="Trebuchet MS" pitchFamily="34" charset="-122"/>
                 <a:cs typeface="Trebuchet MS" pitchFamily="34" charset="-120"/>
               </a:rPr>
-              <a:t>ni</a:t>
+              <a:t>nique</a:t>
             </a:r>
             <a:endParaRPr lang="en-US" sz="1400" dirty="0"/>
           </a:p>
@@ -32174,211 +32388,238 @@
       </p:sp>
       <p:sp>
         <p:nvSpPr>
-          <p:cNvPr id="30" name="Text 28"/>
-          <p:cNvSpPr/>
-          <p:nvPr/>
-        </p:nvSpPr>
-        <p:spPr>
-          <a:xfrm>
-            <a:off x="6016752" y="3364992"/>
-            <a:ext cx="411480" cy="475488"/>
-          </a:xfrm>
-          <a:prstGeom prst="rect">
-            <a:avLst/>
-          </a:prstGeom>
-          <a:noFill/>
-          <a:ln/>
-        </p:spPr>
-        <p:txBody>
-          <a:bodyPr wrap="square" lIns="0" tIns="0" rIns="0" bIns="0" rtlCol="0" anchor="ctr"/>
-          <a:lstStyle/>
-          <a:p>
-            <a:pPr algn="ctr" indent="0" marL="0">
-              <a:buNone/>
-            </a:pPr>
-            <a:r>
-              <a:rPr lang="en-US" sz="1600" b="1" dirty="0">
-                <a:solidFill>
-                  <a:srgbClr val="0D9488"/>
+          <p:cNvPr id="31" name="Shape 29"/>
+          <p:cNvSpPr/>
+          <p:nvPr/>
+        </p:nvSpPr>
+        <p:spPr>
+          <a:xfrm>
+            <a:off x="365760" y="4096512"/>
+            <a:ext cx="1371600" cy="804672"/>
+          </a:xfrm>
+          <a:prstGeom prst="rect">
+            <a:avLst>
+              <a:gd name="adj" fmla="val 6818"/>
+            </a:avLst>
+          </a:prstGeom>
+          <a:solidFill>
+            <a:srgbClr val="E2E8F0"/>
+          </a:solidFill>
+          <a:ln w="12700">
+            <a:solidFill>
+              <a:srgbClr val="E2E8F0"/>
+            </a:solidFill>
+            <a:prstDash val="solid"/>
+          </a:ln>
+        </p:spPr>
+      </p:sp>
+      <p:sp>
+        <p:nvSpPr>
+          <p:cNvPr id="32" name="Text 30"/>
+          <p:cNvSpPr/>
+          <p:nvPr/>
+        </p:nvSpPr>
+        <p:spPr>
+          <a:xfrm>
+            <a:off x="365760" y="4096512"/>
+            <a:ext cx="1371600" cy="804672"/>
+          </a:xfrm>
+          <a:prstGeom prst="rect">
+            <a:avLst/>
+          </a:prstGeom>
+          <a:noFill/>
+          <a:ln/>
+        </p:spPr>
+        <p:txBody>
+          <a:bodyPr wrap="square" lIns="0" tIns="0" rIns="0" bIns="0" rtlCol="0" anchor="ctr"/>
+          <a:lstStyle/>
+          <a:p>
+            <a:pPr algn="ctr" indent="0" marL="0">
+              <a:buNone/>
+            </a:pPr>
+            <a:r>
+              <a:rPr lang="en-US" sz="1100" b="1" dirty="0">
+                <a:solidFill>
+                  <a:srgbClr val="475569"/>
                 </a:solidFill>
                 <a:latin typeface="Trebuchet MS" pitchFamily="34" charset="0"/>
                 <a:ea typeface="Trebuchet MS" pitchFamily="34" charset="-122"/>
                 <a:cs typeface="Trebuchet MS" pitchFamily="34" charset="-120"/>
               </a:rPr>
-              <a:t>·</a:t>
-            </a:r>
-            <a:endParaRPr lang="en-US" sz="1600" dirty="0"/>
-          </a:p>
-        </p:txBody>
-      </p:sp>
-      <p:sp>
-        <p:nvSpPr>
-          <p:cNvPr id="31" name="Shape 29"/>
-          <p:cNvSpPr/>
-          <p:nvPr/>
-        </p:nvSpPr>
-        <p:spPr>
-          <a:xfrm>
-            <a:off x="6428232" y="3364992"/>
-            <a:ext cx="1645920" cy="475488"/>
+              <a:t>Phonemes</a:t>
+            </a:r>
+            <a:endParaRPr lang="en-US" sz="1100" dirty="0"/>
+          </a:p>
+        </p:txBody>
+      </p:sp>
+      <p:sp>
+        <p:nvSpPr>
+          <p:cNvPr id="33" name="Shape 31"/>
+          <p:cNvSpPr/>
+          <p:nvPr/>
+        </p:nvSpPr>
+        <p:spPr>
+          <a:xfrm>
+            <a:off x="1874520" y="4096512"/>
+            <a:ext cx="6903720" cy="804672"/>
           </a:xfrm>
           <a:prstGeom prst="rect">
             <a:avLst>
-              <a:gd name="adj" fmla="val 9615"/>
+              <a:gd name="adj" fmla="val 6818"/>
             </a:avLst>
           </a:prstGeom>
           <a:solidFill>
+            <a:srgbClr val="FCE7F3"/>
+          </a:solidFill>
+          <a:ln w="12700">
+            <a:solidFill>
+              <a:srgbClr val="DB2777"/>
+            </a:solidFill>
+            <a:prstDash val="solid"/>
+          </a:ln>
+        </p:spPr>
+      </p:sp>
+      <p:sp>
+        <p:nvSpPr>
+          <p:cNvPr id="34" name="Shape 32"/>
+          <p:cNvSpPr/>
+          <p:nvPr/>
+        </p:nvSpPr>
+        <p:spPr>
+          <a:xfrm>
+            <a:off x="2670048" y="4169664"/>
+            <a:ext cx="685800" cy="384048"/>
+          </a:xfrm>
+          <a:prstGeom prst="rect">
+            <a:avLst>
+              <a:gd name="adj" fmla="val 9524"/>
+            </a:avLst>
+          </a:prstGeom>
+          <a:solidFill>
             <a:srgbClr val="FFFFFF"/>
           </a:solidFill>
           <a:ln w="12700">
             <a:solidFill>
-              <a:srgbClr val="0D9488"/>
-            </a:solidFill>
-            <a:prstDash val="solid"/>
-          </a:ln>
-        </p:spPr>
-      </p:sp>
-      <p:sp>
-        <p:nvSpPr>
-          <p:cNvPr id="32" name="Text 30"/>
-          <p:cNvSpPr/>
-          <p:nvPr/>
-        </p:nvSpPr>
-        <p:spPr>
-          <a:xfrm>
-            <a:off x="6428232" y="3364992"/>
-            <a:ext cx="1645920" cy="475488"/>
-          </a:xfrm>
-          <a:prstGeom prst="rect">
-            <a:avLst/>
-          </a:prstGeom>
-          <a:noFill/>
-          <a:ln/>
-        </p:spPr>
-        <p:txBody>
-          <a:bodyPr wrap="square" lIns="0" tIns="0" rIns="0" bIns="0" rtlCol="0" anchor="ctr"/>
-          <a:lstStyle/>
-          <a:p>
-            <a:pPr algn="ctr" indent="0" marL="0">
-              <a:buNone/>
-            </a:pPr>
-            <a:r>
-              <a:rPr lang="en-US" sz="1400" b="1" dirty="0">
-                <a:solidFill>
-                  <a:srgbClr val="0D9488"/>
+              <a:srgbClr val="DB2777"/>
+            </a:solidFill>
+            <a:prstDash val="solid"/>
+          </a:ln>
+        </p:spPr>
+      </p:sp>
+      <p:sp>
+        <p:nvSpPr>
+          <p:cNvPr id="35" name="Text 33"/>
+          <p:cNvSpPr/>
+          <p:nvPr/>
+        </p:nvSpPr>
+        <p:spPr>
+          <a:xfrm>
+            <a:off x="2670048" y="4169664"/>
+            <a:ext cx="685800" cy="384048"/>
+          </a:xfrm>
+          <a:prstGeom prst="rect">
+            <a:avLst/>
+          </a:prstGeom>
+          <a:noFill/>
+          <a:ln/>
+        </p:spPr>
+        <p:txBody>
+          <a:bodyPr wrap="square" lIns="0" tIns="0" rIns="0" bIns="0" rtlCol="0" anchor="ctr"/>
+          <a:lstStyle/>
+          <a:p>
+            <a:pPr algn="ctr" indent="0" marL="0">
+              <a:buNone/>
+            </a:pPr>
+            <a:r>
+              <a:rPr lang="en-US" sz="900" b="1" dirty="0">
+                <a:solidFill>
+                  <a:srgbClr val="9D174D"/>
                 </a:solidFill>
                 <a:latin typeface="Trebuchet MS" pitchFamily="34" charset="0"/>
                 <a:ea typeface="Trebuchet MS" pitchFamily="34" charset="-122"/>
                 <a:cs typeface="Trebuchet MS" pitchFamily="34" charset="-120"/>
               </a:rPr>
-              <a:t>ty</a:t>
-            </a:r>
-            <a:endParaRPr lang="en-US" sz="1400" dirty="0"/>
-          </a:p>
-        </p:txBody>
-      </p:sp>
-      <p:sp>
-        <p:nvSpPr>
-          <p:cNvPr id="33" name="Shape 31"/>
-          <p:cNvSpPr/>
-          <p:nvPr/>
-        </p:nvSpPr>
-        <p:spPr>
-          <a:xfrm>
-            <a:off x="365760" y="4096512"/>
-            <a:ext cx="1371600" cy="804672"/>
+              <a:t>u</a:t>
+            </a:r>
+            <a:endParaRPr lang="en-US" sz="900" dirty="0"/>
+          </a:p>
+        </p:txBody>
+      </p:sp>
+      <p:sp>
+        <p:nvSpPr>
+          <p:cNvPr id="36" name="Shape 34"/>
+          <p:cNvSpPr/>
+          <p:nvPr/>
+        </p:nvSpPr>
+        <p:spPr>
+          <a:xfrm>
+            <a:off x="4123944" y="4169664"/>
+            <a:ext cx="685800" cy="384048"/>
           </a:xfrm>
           <a:prstGeom prst="rect">
             <a:avLst>
-              <a:gd name="adj" fmla="val 6818"/>
+              <a:gd name="adj" fmla="val 9524"/>
             </a:avLst>
           </a:prstGeom>
           <a:solidFill>
-            <a:srgbClr val="E2E8F0"/>
-          </a:solidFill>
-          <a:ln w="12700">
-            <a:solidFill>
-              <a:srgbClr val="E2E8F0"/>
-            </a:solidFill>
-            <a:prstDash val="solid"/>
-          </a:ln>
-        </p:spPr>
-      </p:sp>
-      <p:sp>
-        <p:nvSpPr>
-          <p:cNvPr id="34" name="Text 32"/>
-          <p:cNvSpPr/>
-          <p:nvPr/>
-        </p:nvSpPr>
-        <p:spPr>
-          <a:xfrm>
-            <a:off x="365760" y="4096512"/>
-            <a:ext cx="1371600" cy="804672"/>
-          </a:xfrm>
-          <a:prstGeom prst="rect">
-            <a:avLst/>
-          </a:prstGeom>
-          <a:noFill/>
-          <a:ln/>
-        </p:spPr>
-        <p:txBody>
-          <a:bodyPr wrap="square" lIns="0" tIns="0" rIns="0" bIns="0" rtlCol="0" anchor="ctr"/>
-          <a:lstStyle/>
-          <a:p>
-            <a:pPr algn="ctr" indent="0" marL="0">
-              <a:buNone/>
-            </a:pPr>
-            <a:r>
-              <a:rPr lang="en-US" sz="1100" b="1" dirty="0">
-                <a:solidFill>
-                  <a:srgbClr val="475569"/>
+            <a:srgbClr val="FFFFFF"/>
+          </a:solidFill>
+          <a:ln w="12700">
+            <a:solidFill>
+              <a:srgbClr val="DB2777"/>
+            </a:solidFill>
+            <a:prstDash val="solid"/>
+          </a:ln>
+        </p:spPr>
+      </p:sp>
+      <p:sp>
+        <p:nvSpPr>
+          <p:cNvPr id="37" name="Text 35"/>
+          <p:cNvSpPr/>
+          <p:nvPr/>
+        </p:nvSpPr>
+        <p:spPr>
+          <a:xfrm>
+            <a:off x="4123944" y="4169664"/>
+            <a:ext cx="685800" cy="384048"/>
+          </a:xfrm>
+          <a:prstGeom prst="rect">
+            <a:avLst/>
+          </a:prstGeom>
+          <a:noFill/>
+          <a:ln/>
+        </p:spPr>
+        <p:txBody>
+          <a:bodyPr wrap="square" lIns="0" tIns="0" rIns="0" bIns="0" rtlCol="0" anchor="ctr"/>
+          <a:lstStyle/>
+          <a:p>
+            <a:pPr algn="ctr" indent="0" marL="0">
+              <a:buNone/>
+            </a:pPr>
+            <a:r>
+              <a:rPr lang="en-US" sz="900" b="1" dirty="0">
+                <a:solidFill>
+                  <a:srgbClr val="9D174D"/>
                 </a:solidFill>
                 <a:latin typeface="Trebuchet MS" pitchFamily="34" charset="0"/>
                 <a:ea typeface="Trebuchet MS" pitchFamily="34" charset="-122"/>
                 <a:cs typeface="Trebuchet MS" pitchFamily="34" charset="-120"/>
               </a:rPr>
-              <a:t>Phonemes</a:t>
-            </a:r>
-            <a:endParaRPr lang="en-US" sz="1100" dirty="0"/>
-          </a:p>
-        </p:txBody>
-      </p:sp>
-      <p:sp>
-        <p:nvSpPr>
-          <p:cNvPr id="35" name="Shape 33"/>
-          <p:cNvSpPr/>
-          <p:nvPr/>
-        </p:nvSpPr>
-        <p:spPr>
-          <a:xfrm>
-            <a:off x="1874520" y="4096512"/>
-            <a:ext cx="6903720" cy="804672"/>
-          </a:xfrm>
-          <a:prstGeom prst="rect">
-            <a:avLst>
-              <a:gd name="adj" fmla="val 6818"/>
-            </a:avLst>
-          </a:prstGeom>
-          <a:solidFill>
-            <a:srgbClr val="FCE7F3"/>
-          </a:solidFill>
-          <a:ln w="12700">
-            <a:solidFill>
-              <a:srgbClr val="DB2777"/>
-            </a:solidFill>
-            <a:prstDash val="solid"/>
-          </a:ln>
-        </p:spPr>
-      </p:sp>
-      <p:sp>
-        <p:nvSpPr>
-          <p:cNvPr id="36" name="Shape 34"/>
-          <p:cNvSpPr/>
-          <p:nvPr/>
-        </p:nvSpPr>
-        <p:spPr>
-          <a:xfrm>
-            <a:off x="2427732" y="4169664"/>
+              <a:t>n</a:t>
+            </a:r>
+            <a:endParaRPr lang="en-US" sz="900" dirty="0"/>
+          </a:p>
+        </p:txBody>
+      </p:sp>
+      <p:sp>
+        <p:nvSpPr>
+          <p:cNvPr id="38" name="Shape 36"/>
+          <p:cNvSpPr/>
+          <p:nvPr/>
+        </p:nvSpPr>
+        <p:spPr>
+          <a:xfrm>
+            <a:off x="5577840" y="4169664"/>
             <a:ext cx="685800" cy="384048"/>
           </a:xfrm>
           <a:prstGeom prst="rect">
@@ -32399,13 +32640,13 @@
       </p:sp>
       <p:sp>
         <p:nvSpPr>
-          <p:cNvPr id="37" name="Text 35"/>
-          <p:cNvSpPr/>
-          <p:nvPr/>
-        </p:nvSpPr>
-        <p:spPr>
-          <a:xfrm>
-            <a:off x="2427732" y="4169664"/>
+          <p:cNvPr id="39" name="Text 37"/>
+          <p:cNvSpPr/>
+          <p:nvPr/>
+        </p:nvSpPr>
+        <p:spPr>
+          <a:xfrm>
+            <a:off x="5577840" y="4169664"/>
             <a:ext cx="685800" cy="384048"/>
           </a:xfrm>
           <a:prstGeom prst="rect">
@@ -32430,7 +32671,7 @@
                 <a:ea typeface="Trebuchet MS" pitchFamily="34" charset="-122"/>
                 <a:cs typeface="Trebuchet MS" pitchFamily="34" charset="-120"/>
               </a:rPr>
-              <a:t>u</a:t>
+              <a:t>i</a:t>
             </a:r>
             <a:endParaRPr lang="en-US" sz="900" dirty="0"/>
           </a:p>
@@ -32438,13 +32679,13 @@
       </p:sp>
       <p:sp>
         <p:nvSpPr>
-          <p:cNvPr id="38" name="Shape 36"/>
-          <p:cNvSpPr/>
-          <p:nvPr/>
-        </p:nvSpPr>
-        <p:spPr>
-          <a:xfrm>
-            <a:off x="3639312" y="4169664"/>
+          <p:cNvPr id="40" name="Shape 38"/>
+          <p:cNvSpPr/>
+          <p:nvPr/>
+        </p:nvSpPr>
+        <p:spPr>
+          <a:xfrm>
+            <a:off x="7031736" y="4169664"/>
             <a:ext cx="685800" cy="384048"/>
           </a:xfrm>
           <a:prstGeom prst="rect">
@@ -32465,13 +32706,13 @@
       </p:sp>
       <p:sp>
         <p:nvSpPr>
-          <p:cNvPr id="39" name="Text 37"/>
-          <p:cNvSpPr/>
-          <p:nvPr/>
-        </p:nvSpPr>
-        <p:spPr>
-          <a:xfrm>
-            <a:off x="3639312" y="4169664"/>
+          <p:cNvPr id="41" name="Text 39"/>
+          <p:cNvSpPr/>
+          <p:nvPr/>
+        </p:nvSpPr>
+        <p:spPr>
+          <a:xfrm>
+            <a:off x="7031736" y="4169664"/>
             <a:ext cx="685800" cy="384048"/>
           </a:xfrm>
           <a:prstGeom prst="rect">
@@ -32496,7 +32737,7 @@
                 <a:ea typeface="Trebuchet MS" pitchFamily="34" charset="-122"/>
                 <a:cs typeface="Trebuchet MS" pitchFamily="34" charset="-120"/>
               </a:rPr>
-              <a:t>n</a:t>
+              <a:t>que</a:t>
             </a:r>
             <a:endParaRPr lang="en-US" sz="900" dirty="0"/>
           </a:p>
@@ -32504,211 +32745,13 @@
       </p:sp>
       <p:sp>
         <p:nvSpPr>
-          <p:cNvPr id="40" name="Shape 38"/>
-          <p:cNvSpPr/>
-          <p:nvPr/>
-        </p:nvSpPr>
-        <p:spPr>
-          <a:xfrm>
-            <a:off x="4850892" y="4169664"/>
-            <a:ext cx="685800" cy="384048"/>
-          </a:xfrm>
-          <a:prstGeom prst="rect">
-            <a:avLst>
-              <a:gd name="adj" fmla="val 9524"/>
-            </a:avLst>
-          </a:prstGeom>
-          <a:solidFill>
-            <a:srgbClr val="FFFFFF"/>
-          </a:solidFill>
-          <a:ln w="12700">
-            <a:solidFill>
-              <a:srgbClr val="DB2777"/>
-            </a:solidFill>
-            <a:prstDash val="solid"/>
-          </a:ln>
-        </p:spPr>
-      </p:sp>
-      <p:sp>
-        <p:nvSpPr>
-          <p:cNvPr id="41" name="Text 39"/>
-          <p:cNvSpPr/>
-          <p:nvPr/>
-        </p:nvSpPr>
-        <p:spPr>
-          <a:xfrm>
-            <a:off x="4850892" y="4169664"/>
-            <a:ext cx="685800" cy="384048"/>
-          </a:xfrm>
-          <a:prstGeom prst="rect">
-            <a:avLst/>
-          </a:prstGeom>
-          <a:noFill/>
-          <a:ln/>
-        </p:spPr>
-        <p:txBody>
-          <a:bodyPr wrap="square" lIns="0" tIns="0" rIns="0" bIns="0" rtlCol="0" anchor="ctr"/>
-          <a:lstStyle/>
-          <a:p>
-            <a:pPr algn="ctr" indent="0" marL="0">
-              <a:buNone/>
-            </a:pPr>
-            <a:r>
-              <a:rPr lang="en-US" sz="900" b="1" dirty="0">
-                <a:solidFill>
-                  <a:srgbClr val="9D174D"/>
-                </a:solidFill>
-                <a:latin typeface="Trebuchet MS" pitchFamily="34" charset="0"/>
-                <a:ea typeface="Trebuchet MS" pitchFamily="34" charset="-122"/>
-                <a:cs typeface="Trebuchet MS" pitchFamily="34" charset="-120"/>
-              </a:rPr>
-              <a:t>i</a:t>
-            </a:r>
-            <a:endParaRPr lang="en-US" sz="900" dirty="0"/>
-          </a:p>
-        </p:txBody>
-      </p:sp>
-      <p:sp>
-        <p:nvSpPr>
-          <p:cNvPr id="42" name="Shape 40"/>
-          <p:cNvSpPr/>
-          <p:nvPr/>
-        </p:nvSpPr>
-        <p:spPr>
-          <a:xfrm>
-            <a:off x="6062472" y="4169664"/>
-            <a:ext cx="685800" cy="384048"/>
-          </a:xfrm>
-          <a:prstGeom prst="rect">
-            <a:avLst>
-              <a:gd name="adj" fmla="val 9524"/>
-            </a:avLst>
-          </a:prstGeom>
-          <a:solidFill>
-            <a:srgbClr val="FFFFFF"/>
-          </a:solidFill>
-          <a:ln w="12700">
-            <a:solidFill>
-              <a:srgbClr val="DB2777"/>
-            </a:solidFill>
-            <a:prstDash val="solid"/>
-          </a:ln>
-        </p:spPr>
-      </p:sp>
-      <p:sp>
-        <p:nvSpPr>
-          <p:cNvPr id="43" name="Text 41"/>
-          <p:cNvSpPr/>
-          <p:nvPr/>
-        </p:nvSpPr>
-        <p:spPr>
-          <a:xfrm>
-            <a:off x="6062472" y="4169664"/>
-            <a:ext cx="685800" cy="384048"/>
-          </a:xfrm>
-          <a:prstGeom prst="rect">
-            <a:avLst/>
-          </a:prstGeom>
-          <a:noFill/>
-          <a:ln/>
-        </p:spPr>
-        <p:txBody>
-          <a:bodyPr wrap="square" lIns="0" tIns="0" rIns="0" bIns="0" rtlCol="0" anchor="ctr"/>
-          <a:lstStyle/>
-          <a:p>
-            <a:pPr algn="ctr" indent="0" marL="0">
-              <a:buNone/>
-            </a:pPr>
-            <a:r>
-              <a:rPr lang="en-US" sz="900" b="1" dirty="0">
-                <a:solidFill>
-                  <a:srgbClr val="9D174D"/>
-                </a:solidFill>
-                <a:latin typeface="Trebuchet MS" pitchFamily="34" charset="0"/>
-                <a:ea typeface="Trebuchet MS" pitchFamily="34" charset="-122"/>
-                <a:cs typeface="Trebuchet MS" pitchFamily="34" charset="-120"/>
-              </a:rPr>
-              <a:t>t</a:t>
-            </a:r>
-            <a:endParaRPr lang="en-US" sz="900" dirty="0"/>
-          </a:p>
-        </p:txBody>
-      </p:sp>
-      <p:sp>
-        <p:nvSpPr>
-          <p:cNvPr id="44" name="Shape 42"/>
-          <p:cNvSpPr/>
-          <p:nvPr/>
-        </p:nvSpPr>
-        <p:spPr>
-          <a:xfrm>
-            <a:off x="7274052" y="4169664"/>
-            <a:ext cx="685800" cy="384048"/>
-          </a:xfrm>
-          <a:prstGeom prst="rect">
-            <a:avLst>
-              <a:gd name="adj" fmla="val 9524"/>
-            </a:avLst>
-          </a:prstGeom>
-          <a:solidFill>
-            <a:srgbClr val="FFFFFF"/>
-          </a:solidFill>
-          <a:ln w="12700">
-            <a:solidFill>
-              <a:srgbClr val="DB2777"/>
-            </a:solidFill>
-            <a:prstDash val="solid"/>
-          </a:ln>
-        </p:spPr>
-      </p:sp>
-      <p:sp>
-        <p:nvSpPr>
-          <p:cNvPr id="45" name="Text 43"/>
-          <p:cNvSpPr/>
-          <p:nvPr/>
-        </p:nvSpPr>
-        <p:spPr>
-          <a:xfrm>
-            <a:off x="7274052" y="4169664"/>
-            <a:ext cx="685800" cy="384048"/>
-          </a:xfrm>
-          <a:prstGeom prst="rect">
-            <a:avLst/>
-          </a:prstGeom>
-          <a:noFill/>
-          <a:ln/>
-        </p:spPr>
-        <p:txBody>
-          <a:bodyPr wrap="square" lIns="0" tIns="0" rIns="0" bIns="0" rtlCol="0" anchor="ctr"/>
-          <a:lstStyle/>
-          <a:p>
-            <a:pPr algn="ctr" indent="0" marL="0">
-              <a:buNone/>
-            </a:pPr>
-            <a:r>
-              <a:rPr lang="en-US" sz="900" b="1" dirty="0">
-                <a:solidFill>
-                  <a:srgbClr val="9D174D"/>
-                </a:solidFill>
-                <a:latin typeface="Trebuchet MS" pitchFamily="34" charset="0"/>
-                <a:ea typeface="Trebuchet MS" pitchFamily="34" charset="-122"/>
-                <a:cs typeface="Trebuchet MS" pitchFamily="34" charset="-120"/>
-              </a:rPr>
-              <a:t>y</a:t>
-            </a:r>
-            <a:endParaRPr lang="en-US" sz="900" dirty="0"/>
-          </a:p>
-        </p:txBody>
-      </p:sp>
-      <p:sp>
-        <p:nvSpPr>
-          <p:cNvPr id="46" name="Text 44"/>
-          <p:cNvSpPr/>
-          <p:nvPr/>
-        </p:nvSpPr>
-        <p:spPr>
-          <a:xfrm>
-            <a:off x="7274052" y="4572000"/>
+          <p:cNvPr id="42" name="Text 40"/>
+          <p:cNvSpPr/>
+          <p:nvPr/>
+        </p:nvSpPr>
+        <p:spPr>
+          <a:xfrm>
+            <a:off x="7031736" y="4572000"/>
             <a:ext cx="685800" cy="219456"/>
           </a:xfrm>
           <a:prstGeom prst="rect">
@@ -32733,7 +32776,7 @@
                 <a:ea typeface="Calibri" pitchFamily="34" charset="-122"/>
                 <a:cs typeface="Calibri" pitchFamily="34" charset="-120"/>
               </a:rPr>
-              <a:t>/ee/</a:t>
+              <a:t>/k/</a:t>
             </a:r>
             <a:endParaRPr lang="en-US" sz="750" dirty="0"/>
           </a:p>
@@ -34712,7 +34755,7 @@
                 <a:ea typeface="Trebuchet MS" pitchFamily="34" charset="-122"/>
                 <a:cs typeface="Trebuchet MS" pitchFamily="34" charset="-120"/>
               </a:rPr>
-              <a:t>cycle</a:t>
+              <a:t>corn</a:t>
             </a:r>
             <a:endParaRPr lang="en-US" sz="1300" dirty="0"/>
           </a:p>
@@ -35018,7 +35061,7 @@
                 <a:ea typeface="Trebuchet MS" pitchFamily="34" charset="-122"/>
                 <a:cs typeface="Trebuchet MS" pitchFamily="34" charset="-120"/>
               </a:rPr>
-              <a:t>corn</a:t>
+              <a:t>cy</a:t>
             </a:r>
             <a:endParaRPr lang="en-US" sz="1300" dirty="0"/>
           </a:p>
@@ -35171,7 +35214,7 @@
                 <a:ea typeface="Trebuchet MS" pitchFamily="34" charset="-122"/>
                 <a:cs typeface="Trebuchet MS" pitchFamily="34" charset="-120"/>
               </a:rPr>
-              <a:t>fy</a:t>
+              <a:t>son</a:t>
             </a:r>
             <a:endParaRPr lang="en-US" sz="1300" dirty="0"/>
           </a:p>
@@ -35406,7 +35449,7 @@
                 <a:ea typeface="Trebuchet MS" pitchFamily="34" charset="-122"/>
                 <a:cs typeface="Trebuchet MS" pitchFamily="34" charset="-120"/>
               </a:rPr>
-              <a:t>unicycle</a:t>
+              <a:t>unicorn</a:t>
             </a:r>
             <a:endParaRPr lang="en-US" sz="1200" dirty="0"/>
           </a:p>
@@ -35538,7 +35581,7 @@
                 <a:ea typeface="Trebuchet MS" pitchFamily="34" charset="-122"/>
                 <a:cs typeface="Trebuchet MS" pitchFamily="34" charset="-120"/>
               </a:rPr>
-              <a:t>unicorn</a:t>
+              <a:t>unicycle</a:t>
             </a:r>
             <a:endParaRPr lang="en-US" sz="1200" dirty="0"/>
           </a:p>
@@ -35604,7 +35647,7 @@
                 <a:ea typeface="Trebuchet MS" pitchFamily="34" charset="-122"/>
                 <a:cs typeface="Trebuchet MS" pitchFamily="34" charset="-120"/>
               </a:rPr>
-              <a:t>unique</a:t>
+              <a:t>unison</a:t>
             </a:r>
             <a:endParaRPr lang="en-US" sz="1200" dirty="0"/>
           </a:p>
@@ -35670,7 +35713,7 @@
                 <a:ea typeface="Trebuchet MS" pitchFamily="34" charset="-122"/>
                 <a:cs typeface="Trebuchet MS" pitchFamily="34" charset="-120"/>
               </a:rPr>
-              <a:t>unify</a:t>
+              <a:t>unique</a:t>
             </a:r>
             <a:endParaRPr lang="en-US" sz="1200" dirty="0"/>
           </a:p>
@@ -36990,7 +37033,7 @@
                 <a:ea typeface="Calibri" pitchFamily="34" charset="-122"/>
                 <a:cs typeface="Calibri" pitchFamily="34" charset="-120"/>
               </a:rPr>
-              <a:t>1.  The prefix 'uni-' means one or single.</a:t>
+              <a:t>1.  The prefix 'uni-' comes from Latin.</a:t>
             </a:r>
             <a:endParaRPr lang="en-US" sz="1300" dirty="0"/>
           </a:p>
@@ -37129,7 +37172,7 @@
                 <a:ea typeface="Calibri" pitchFamily="34" charset="-122"/>
                 <a:cs typeface="Calibri" pitchFamily="34" charset="-120"/>
               </a:rPr>
-              <a:t>2.  A unicycle has two wheels.</a:t>
+              <a:t>2.  The prefix 'uni-' means many or lots.</a:t>
             </a:r>
             <a:endParaRPr lang="en-US" sz="1300" dirty="0"/>
           </a:p>
@@ -37268,7 +37311,7 @@
                 <a:ea typeface="Calibri" pitchFamily="34" charset="-122"/>
                 <a:cs typeface="Calibri" pitchFamily="34" charset="-120"/>
               </a:rPr>
-              <a:t>3.  The prefix 'uni-' comes from Latin.</a:t>
+              <a:t>3.  The prefix 'uni-' means one or single.</a:t>
             </a:r>
             <a:endParaRPr lang="en-US" sz="1300" dirty="0"/>
           </a:p>
@@ -37407,7 +37450,7 @@
                 <a:ea typeface="Calibri" pitchFamily="34" charset="-122"/>
                 <a:cs typeface="Calibri" pitchFamily="34" charset="-120"/>
               </a:rPr>
-              <a:t>4.  A uniform helps everyone in a group look the same.</a:t>
+              <a:t>4.  The word 'uniform' contains the prefix 'uni-'.</a:t>
             </a:r>
             <a:endParaRPr lang="en-US" sz="1300" dirty="0"/>
           </a:p>
@@ -37546,7 +37589,7 @@
                 <a:ea typeface="Calibri" pitchFamily="34" charset="-122"/>
                 <a:cs typeface="Calibri" pitchFamily="34" charset="-120"/>
               </a:rPr>
-              <a:t>5.  The word 'universe' means just one small planet.</a:t>
+              <a:t>5.  A unicycle has two wheels.</a:t>
             </a:r>
             <a:endParaRPr lang="en-US" sz="1300" dirty="0"/>
           </a:p>
@@ -38251,7 +38294,7 @@
                 <a:ea typeface="Trebuchet MS" pitchFamily="34" charset="-122"/>
                 <a:cs typeface="Trebuchet MS" pitchFamily="34" charset="-120"/>
               </a:rPr>
-              <a:t>unicycle</a:t>
+              <a:t>unicorn</a:t>
             </a:r>
             <a:endParaRPr lang="en-US" sz="1300" dirty="0"/>
           </a:p>
@@ -38383,7 +38426,7 @@
                 <a:ea typeface="Trebuchet MS" pitchFamily="34" charset="-122"/>
                 <a:cs typeface="Trebuchet MS" pitchFamily="34" charset="-120"/>
               </a:rPr>
-              <a:t>unicorn</a:t>
+              <a:t>unicycle</a:t>
             </a:r>
             <a:endParaRPr lang="en-US" sz="1300" dirty="0"/>
           </a:p>
@@ -38449,7 +38492,7 @@
                 <a:ea typeface="Trebuchet MS" pitchFamily="34" charset="-122"/>
                 <a:cs typeface="Trebuchet MS" pitchFamily="34" charset="-120"/>
               </a:rPr>
-              <a:t>unique</a:t>
+              <a:t>unison</a:t>
             </a:r>
             <a:endParaRPr lang="en-US" sz="1300" dirty="0"/>
           </a:p>
@@ -38515,7 +38558,7 @@
                 <a:ea typeface="Trebuchet MS" pitchFamily="34" charset="-122"/>
                 <a:cs typeface="Trebuchet MS" pitchFamily="34" charset="-120"/>
               </a:rPr>
-              <a:t>unify</a:t>
+              <a:t>unique</a:t>
             </a:r>
             <a:endParaRPr lang="en-US" sz="1300" dirty="0"/>
           </a:p>
@@ -39391,7 +39434,7 @@
                 <a:ea typeface="Trebuchet MS" pitchFamily="34" charset="-122"/>
                 <a:cs typeface="Trebuchet MS" pitchFamily="34" charset="-120"/>
               </a:rPr>
-              <a:t>cycle</a:t>
+              <a:t>corn</a:t>
             </a:r>
             <a:endParaRPr lang="en-US" sz="1300" dirty="0"/>
           </a:p>
@@ -39697,7 +39740,7 @@
                 <a:ea typeface="Trebuchet MS" pitchFamily="34" charset="-122"/>
                 <a:cs typeface="Trebuchet MS" pitchFamily="34" charset="-120"/>
               </a:rPr>
-              <a:t>corn</a:t>
+              <a:t>cy</a:t>
             </a:r>
             <a:endParaRPr lang="en-US" sz="1300" dirty="0"/>
           </a:p>
@@ -39850,7 +39893,7 @@
                 <a:ea typeface="Trebuchet MS" pitchFamily="34" charset="-122"/>
                 <a:cs typeface="Trebuchet MS" pitchFamily="34" charset="-120"/>
               </a:rPr>
-              <a:t>fy</a:t>
+              <a:t>son</a:t>
             </a:r>
             <a:endParaRPr lang="en-US" sz="1300" dirty="0"/>
           </a:p>
@@ -40825,7 +40868,7 @@
                 <a:ea typeface="Calibri" pitchFamily="34" charset="-122"/>
                 <a:cs typeface="Calibri" pitchFamily="34" charset="-120"/>
               </a:rPr>
-              <a:t>Being the only one of its kind; unlike anything else.</a:t>
+              <a:t>When people do or say something together at exactly the same time.</a:t>
             </a:r>
             <a:endParaRPr lang="en-US" sz="1200" dirty="0"/>
           </a:p>
@@ -40898,7 +40941,7 @@
                 <a:ea typeface="Trebuchet MS" pitchFamily="34" charset="-122"/>
                 <a:cs typeface="Trebuchet MS" pitchFamily="34" charset="-120"/>
               </a:rPr>
-              <a:t>unicycle</a:t>
+              <a:t>unicorn</a:t>
             </a:r>
             <a:endParaRPr lang="en-US" sz="1200" dirty="0"/>
           </a:p>
@@ -40964,7 +41007,7 @@
                 <a:ea typeface="Calibri" pitchFamily="34" charset="-122"/>
                 <a:cs typeface="Calibri" pitchFamily="34" charset="-120"/>
               </a:rPr>
-              <a:t>A set of matching clothes worn by everyone in a group, like a school or sports team.</a:t>
+              <a:t>A set of matching clothes worn by members of the same group, like a school or sports team.</a:t>
             </a:r>
             <a:endParaRPr lang="en-US" sz="1200" dirty="0"/>
           </a:p>
@@ -41103,7 +41146,7 @@
                 <a:ea typeface="Calibri" pitchFamily="34" charset="-122"/>
                 <a:cs typeface="Calibri" pitchFamily="34" charset="-120"/>
               </a:rPr>
-              <a:t>A mythical horse-like creature with a single horn growing from its forehead.</a:t>
+              <a:t>A vehicle like a bicycle but with only one wheel, often ridden by performers.</a:t>
             </a:r>
             <a:endParaRPr lang="en-US" sz="1200" dirty="0"/>
           </a:p>
@@ -41176,7 +41219,7 @@
                 <a:ea typeface="Trebuchet MS" pitchFamily="34" charset="-122"/>
                 <a:cs typeface="Trebuchet MS" pitchFamily="34" charset="-120"/>
               </a:rPr>
-              <a:t>unicorn</a:t>
+              <a:t>unicycle</a:t>
             </a:r>
             <a:endParaRPr lang="en-US" sz="1200" dirty="0"/>
           </a:p>
@@ -41242,7 +41285,7 @@
                 <a:ea typeface="Calibri" pitchFamily="34" charset="-122"/>
                 <a:cs typeface="Calibri" pitchFamily="34" charset="-120"/>
               </a:rPr>
-              <a:t>To join separate things together into one group or whole.</a:t>
+              <a:t>Being the only one of its kind; unlike anything else.</a:t>
             </a:r>
             <a:endParaRPr lang="en-US" sz="1200" dirty="0"/>
           </a:p>
@@ -41315,7 +41358,7 @@
                 <a:ea typeface="Trebuchet MS" pitchFamily="34" charset="-122"/>
                 <a:cs typeface="Trebuchet MS" pitchFamily="34" charset="-120"/>
               </a:rPr>
-              <a:t>unique</a:t>
+              <a:t>unison</a:t>
             </a:r>
             <a:endParaRPr lang="en-US" sz="1200" dirty="0"/>
           </a:p>
@@ -41381,7 +41424,7 @@
                 <a:ea typeface="Calibri" pitchFamily="34" charset="-122"/>
                 <a:cs typeface="Calibri" pitchFamily="34" charset="-120"/>
               </a:rPr>
-              <a:t>The state of people or things being joined together and working as one.</a:t>
+              <a:t>The state of being joined together or working as one group.</a:t>
             </a:r>
             <a:endParaRPr lang="en-US" sz="1200" dirty="0"/>
           </a:p>
@@ -41454,7 +41497,7 @@
                 <a:ea typeface="Trebuchet MS" pitchFamily="34" charset="-122"/>
                 <a:cs typeface="Trebuchet MS" pitchFamily="34" charset="-120"/>
               </a:rPr>
-              <a:t>unify</a:t>
+              <a:t>unique</a:t>
             </a:r>
             <a:endParaRPr lang="en-US" sz="1200" dirty="0"/>
           </a:p>
@@ -41520,7 +41563,7 @@
                 <a:ea typeface="Calibri" pitchFamily="34" charset="-122"/>
                 <a:cs typeface="Calibri" pitchFamily="34" charset="-120"/>
               </a:rPr>
-              <a:t>Everything that exists — all the stars, planets, and space put together as one.</a:t>
+              <a:t>Everything that exists — all the stars, planets, and space put together.</a:t>
             </a:r>
             <a:endParaRPr lang="en-US" sz="1200" dirty="0"/>
           </a:p>
@@ -41659,7 +41702,7 @@
                 <a:ea typeface="Calibri" pitchFamily="34" charset="-122"/>
                 <a:cs typeface="Calibri" pitchFamily="34" charset="-120"/>
               </a:rPr>
-              <a:t>A vehicle like a bike but with only one wheel, often used by circus performers.</a:t>
+              <a:t>A mythical creature that looks like a horse with a single horn on its forehead.</a:t>
             </a:r>
             <a:endParaRPr lang="en-US" sz="1200" dirty="0"/>
           </a:p>
@@ -42154,7 +42197,7 @@
                 <a:ea typeface="Calibri" pitchFamily="34" charset="-122"/>
                 <a:cs typeface="Calibri" pitchFamily="34" charset="-120"/>
               </a:rPr>
-              <a:t>Every student at the school wore a blue and white uniform on sports day.</a:t>
+              <a:t>Every student at our school wears a uniform so we all look the same.</a:t>
             </a:r>
             <a:endParaRPr lang="en-US" sz="1500" dirty="0"/>
           </a:p>
@@ -42318,7 +42361,7 @@
                 <a:ea typeface="Calibri" pitchFamily="34" charset="-122"/>
                 <a:cs typeface="Calibri" pitchFamily="34" charset="-120"/>
               </a:rPr>
-              <a:t>The universe is so enormous that scientists are still discovering new galaxies.</a:t>
+              <a:t>The class sang in unison, and their voices filled the whole hall.</a:t>
             </a:r>
             <a:endParaRPr lang="en-US" sz="1500" dirty="0"/>
           </a:p>
@@ -42482,7 +42525,7 @@
                 <a:ea typeface="Calibri" pitchFamily="34" charset="-122"/>
                 <a:cs typeface="Calibri" pitchFamily="34" charset="-120"/>
               </a:rPr>
-              <a:t>Our class worked together in unity to build the best project at the science fair.</a:t>
+              <a:t>Scientists study the universe to learn more about distant stars and planets.</a:t>
             </a:r>
             <a:endParaRPr lang="en-US" sz="1500" dirty="0"/>
           </a:p>
